--- a/public/slides/aa174a/lecture_10.pptx
+++ b/public/slides/aa174a/lecture_10.pptx
@@ -174,12 +174,179 @@
 </p:presentation>
 </file>
 
-<file path=ppt/revisionInfo.xml><?xml version="1.0" encoding="utf-8"?>
-<p1510:revInfo xmlns:a="http://schemas.openxmlformats.org/drawingml/2006/main" xmlns:r="http://schemas.openxmlformats.org/officeDocument/2006/relationships" xmlns:p1510="http://schemas.microsoft.com/office/powerpoint/2015/10/main">
-  <p1510:revLst>
-    <p1510:client id="{3FB44407-2E79-C84B-9C6C-ABF4A1214A96}" v="4" dt="2025-10-23T15:45:09.211"/>
-  </p1510:revLst>
-</p1510:revInfo>
+<file path=ppt/changesInfos/changesInfo1.xml><?xml version="1.0" encoding="utf-8"?>
+<pc:chgInfo xmlns:a="http://schemas.openxmlformats.org/drawingml/2006/main" xmlns:r="http://schemas.openxmlformats.org/officeDocument/2006/relationships" xmlns:ac="http://schemas.microsoft.com/office/drawing/2013/main/command" xmlns:pc="http://schemas.microsoft.com/office/powerpoint/2013/main/command">
+  <pc:docChgLst>
+    <pc:chgData name="Daniele Gammelli" userId="292b8a31-f1ba-4b4c-b196-a231dc095d13" providerId="ADAL" clId="{6E670754-AB6A-5789-AA0A-6F6FD9CE3EEA}"/>
+    <pc:docChg chg="modSld">
+      <pc:chgData name="Daniele Gammelli" userId="292b8a31-f1ba-4b4c-b196-a231dc095d13" providerId="ADAL" clId="{6E670754-AB6A-5789-AA0A-6F6FD9CE3EEA}" dt="2026-08-13T22:53:15.059" v="22" actId="20577"/>
+      <pc:docMkLst>
+        <pc:docMk/>
+      </pc:docMkLst>
+      <pc:sldChg chg="modNotesTx">
+        <pc:chgData name="Daniele Gammelli" userId="292b8a31-f1ba-4b4c-b196-a231dc095d13" providerId="ADAL" clId="{6E670754-AB6A-5789-AA0A-6F6FD9CE3EEA}" dt="2026-08-13T22:53:15.059" v="22" actId="20577"/>
+        <pc:sldMkLst>
+          <pc:docMk/>
+          <pc:sldMk cId="629011366" sldId="285"/>
+        </pc:sldMkLst>
+      </pc:sldChg>
+      <pc:sldChg chg="modNotesTx">
+        <pc:chgData name="Daniele Gammelli" userId="292b8a31-f1ba-4b4c-b196-a231dc095d13" providerId="ADAL" clId="{6E670754-AB6A-5789-AA0A-6F6FD9CE3EEA}" dt="2026-08-13T22:52:05.842" v="0" actId="20577"/>
+        <pc:sldMkLst>
+          <pc:docMk/>
+          <pc:sldMk cId="2375764047" sldId="296"/>
+        </pc:sldMkLst>
+      </pc:sldChg>
+      <pc:sldChg chg="modNotesTx">
+        <pc:chgData name="Daniele Gammelli" userId="292b8a31-f1ba-4b4c-b196-a231dc095d13" providerId="ADAL" clId="{6E670754-AB6A-5789-AA0A-6F6FD9CE3EEA}" dt="2026-08-13T22:52:09.453" v="1" actId="20577"/>
+        <pc:sldMkLst>
+          <pc:docMk/>
+          <pc:sldMk cId="3316695184" sldId="297"/>
+        </pc:sldMkLst>
+      </pc:sldChg>
+      <pc:sldChg chg="modNotesTx">
+        <pc:chgData name="Daniele Gammelli" userId="292b8a31-f1ba-4b4c-b196-a231dc095d13" providerId="ADAL" clId="{6E670754-AB6A-5789-AA0A-6F6FD9CE3EEA}" dt="2026-08-13T22:52:30.137" v="8" actId="20577"/>
+        <pc:sldMkLst>
+          <pc:docMk/>
+          <pc:sldMk cId="181820845" sldId="298"/>
+        </pc:sldMkLst>
+      </pc:sldChg>
+      <pc:sldChg chg="modNotesTx">
+        <pc:chgData name="Daniele Gammelli" userId="292b8a31-f1ba-4b4c-b196-a231dc095d13" providerId="ADAL" clId="{6E670754-AB6A-5789-AA0A-6F6FD9CE3EEA}" dt="2026-08-13T22:52:12.392" v="2" actId="20577"/>
+        <pc:sldMkLst>
+          <pc:docMk/>
+          <pc:sldMk cId="3180360811" sldId="299"/>
+        </pc:sldMkLst>
+      </pc:sldChg>
+      <pc:sldChg chg="modNotesTx">
+        <pc:chgData name="Daniele Gammelli" userId="292b8a31-f1ba-4b4c-b196-a231dc095d13" providerId="ADAL" clId="{6E670754-AB6A-5789-AA0A-6F6FD9CE3EEA}" dt="2026-08-13T22:52:16.057" v="3" actId="20577"/>
+        <pc:sldMkLst>
+          <pc:docMk/>
+          <pc:sldMk cId="935763082" sldId="300"/>
+        </pc:sldMkLst>
+      </pc:sldChg>
+      <pc:sldChg chg="modNotesTx">
+        <pc:chgData name="Daniele Gammelli" userId="292b8a31-f1ba-4b4c-b196-a231dc095d13" providerId="ADAL" clId="{6E670754-AB6A-5789-AA0A-6F6FD9CE3EEA}" dt="2026-08-13T22:52:19.217" v="4" actId="20577"/>
+        <pc:sldMkLst>
+          <pc:docMk/>
+          <pc:sldMk cId="4264212390" sldId="301"/>
+        </pc:sldMkLst>
+      </pc:sldChg>
+      <pc:sldChg chg="modNotesTx">
+        <pc:chgData name="Daniele Gammelli" userId="292b8a31-f1ba-4b4c-b196-a231dc095d13" providerId="ADAL" clId="{6E670754-AB6A-5789-AA0A-6F6FD9CE3EEA}" dt="2026-08-13T22:52:21.812" v="5" actId="20577"/>
+        <pc:sldMkLst>
+          <pc:docMk/>
+          <pc:sldMk cId="848040296" sldId="302"/>
+        </pc:sldMkLst>
+      </pc:sldChg>
+      <pc:sldChg chg="modNotesTx">
+        <pc:chgData name="Daniele Gammelli" userId="292b8a31-f1ba-4b4c-b196-a231dc095d13" providerId="ADAL" clId="{6E670754-AB6A-5789-AA0A-6F6FD9CE3EEA}" dt="2026-08-13T22:52:26.673" v="7" actId="20577"/>
+        <pc:sldMkLst>
+          <pc:docMk/>
+          <pc:sldMk cId="411161650" sldId="303"/>
+        </pc:sldMkLst>
+      </pc:sldChg>
+      <pc:sldChg chg="modNotesTx">
+        <pc:chgData name="Daniele Gammelli" userId="292b8a31-f1ba-4b4c-b196-a231dc095d13" providerId="ADAL" clId="{6E670754-AB6A-5789-AA0A-6F6FD9CE3EEA}" dt="2026-08-13T22:52:32.898" v="9" actId="20577"/>
+        <pc:sldMkLst>
+          <pc:docMk/>
+          <pc:sldMk cId="1008743782" sldId="304"/>
+        </pc:sldMkLst>
+      </pc:sldChg>
+      <pc:sldChg chg="modNotesTx">
+        <pc:chgData name="Daniele Gammelli" userId="292b8a31-f1ba-4b4c-b196-a231dc095d13" providerId="ADAL" clId="{6E670754-AB6A-5789-AA0A-6F6FD9CE3EEA}" dt="2026-08-13T22:52:37.189" v="10" actId="20577"/>
+        <pc:sldMkLst>
+          <pc:docMk/>
+          <pc:sldMk cId="1016131519" sldId="305"/>
+        </pc:sldMkLst>
+      </pc:sldChg>
+      <pc:sldChg chg="modNotesTx">
+        <pc:chgData name="Daniele Gammelli" userId="292b8a31-f1ba-4b4c-b196-a231dc095d13" providerId="ADAL" clId="{6E670754-AB6A-5789-AA0A-6F6FD9CE3EEA}" dt="2026-08-13T22:52:42.766" v="11" actId="20577"/>
+        <pc:sldMkLst>
+          <pc:docMk/>
+          <pc:sldMk cId="1650393762" sldId="307"/>
+        </pc:sldMkLst>
+      </pc:sldChg>
+      <pc:sldChg chg="modNotesTx">
+        <pc:chgData name="Daniele Gammelli" userId="292b8a31-f1ba-4b4c-b196-a231dc095d13" providerId="ADAL" clId="{6E670754-AB6A-5789-AA0A-6F6FD9CE3EEA}" dt="2026-08-13T22:52:24.204" v="6" actId="20577"/>
+        <pc:sldMkLst>
+          <pc:docMk/>
+          <pc:sldMk cId="3397436534" sldId="308"/>
+        </pc:sldMkLst>
+      </pc:sldChg>
+      <pc:sldChg chg="modNotesTx">
+        <pc:chgData name="Daniele Gammelli" userId="292b8a31-f1ba-4b4c-b196-a231dc095d13" providerId="ADAL" clId="{6E670754-AB6A-5789-AA0A-6F6FD9CE3EEA}" dt="2026-08-13T22:52:45.021" v="12" actId="20577"/>
+        <pc:sldMkLst>
+          <pc:docMk/>
+          <pc:sldMk cId="61075213" sldId="309"/>
+        </pc:sldMkLst>
+      </pc:sldChg>
+      <pc:sldChg chg="modNotesTx">
+        <pc:chgData name="Daniele Gammelli" userId="292b8a31-f1ba-4b4c-b196-a231dc095d13" providerId="ADAL" clId="{6E670754-AB6A-5789-AA0A-6F6FD9CE3EEA}" dt="2026-08-13T22:52:48.321" v="13" actId="20577"/>
+        <pc:sldMkLst>
+          <pc:docMk/>
+          <pc:sldMk cId="1097290423" sldId="310"/>
+        </pc:sldMkLst>
+      </pc:sldChg>
+      <pc:sldChg chg="modNotesTx">
+        <pc:chgData name="Daniele Gammelli" userId="292b8a31-f1ba-4b4c-b196-a231dc095d13" providerId="ADAL" clId="{6E670754-AB6A-5789-AA0A-6F6FD9CE3EEA}" dt="2026-08-13T22:52:50.879" v="14" actId="20577"/>
+        <pc:sldMkLst>
+          <pc:docMk/>
+          <pc:sldMk cId="1124094996" sldId="311"/>
+        </pc:sldMkLst>
+      </pc:sldChg>
+      <pc:sldChg chg="modNotesTx">
+        <pc:chgData name="Daniele Gammelli" userId="292b8a31-f1ba-4b4c-b196-a231dc095d13" providerId="ADAL" clId="{6E670754-AB6A-5789-AA0A-6F6FD9CE3EEA}" dt="2026-08-13T22:52:53.546" v="15" actId="20577"/>
+        <pc:sldMkLst>
+          <pc:docMk/>
+          <pc:sldMk cId="1692656370" sldId="312"/>
+        </pc:sldMkLst>
+      </pc:sldChg>
+      <pc:sldChg chg="modNotesTx">
+        <pc:chgData name="Daniele Gammelli" userId="292b8a31-f1ba-4b4c-b196-a231dc095d13" providerId="ADAL" clId="{6E670754-AB6A-5789-AA0A-6F6FD9CE3EEA}" dt="2026-08-13T22:52:56.789" v="16" actId="20577"/>
+        <pc:sldMkLst>
+          <pc:docMk/>
+          <pc:sldMk cId="444641854" sldId="317"/>
+        </pc:sldMkLst>
+      </pc:sldChg>
+      <pc:sldChg chg="modNotesTx">
+        <pc:chgData name="Daniele Gammelli" userId="292b8a31-f1ba-4b4c-b196-a231dc095d13" providerId="ADAL" clId="{6E670754-AB6A-5789-AA0A-6F6FD9CE3EEA}" dt="2026-08-13T22:52:59.911" v="17" actId="20577"/>
+        <pc:sldMkLst>
+          <pc:docMk/>
+          <pc:sldMk cId="2128235011" sldId="318"/>
+        </pc:sldMkLst>
+      </pc:sldChg>
+      <pc:sldChg chg="modNotesTx">
+        <pc:chgData name="Daniele Gammelli" userId="292b8a31-f1ba-4b4c-b196-a231dc095d13" providerId="ADAL" clId="{6E670754-AB6A-5789-AA0A-6F6FD9CE3EEA}" dt="2026-08-13T22:53:02.244" v="18" actId="20577"/>
+        <pc:sldMkLst>
+          <pc:docMk/>
+          <pc:sldMk cId="2176840656" sldId="319"/>
+        </pc:sldMkLst>
+      </pc:sldChg>
+      <pc:sldChg chg="modNotesTx">
+        <pc:chgData name="Daniele Gammelli" userId="292b8a31-f1ba-4b4c-b196-a231dc095d13" providerId="ADAL" clId="{6E670754-AB6A-5789-AA0A-6F6FD9CE3EEA}" dt="2026-08-13T22:53:06.312" v="19" actId="20577"/>
+        <pc:sldMkLst>
+          <pc:docMk/>
+          <pc:sldMk cId="314688914" sldId="322"/>
+        </pc:sldMkLst>
+      </pc:sldChg>
+      <pc:sldChg chg="modNotesTx">
+        <pc:chgData name="Daniele Gammelli" userId="292b8a31-f1ba-4b4c-b196-a231dc095d13" providerId="ADAL" clId="{6E670754-AB6A-5789-AA0A-6F6FD9CE3EEA}" dt="2026-08-13T22:53:10.105" v="20" actId="20577"/>
+        <pc:sldMkLst>
+          <pc:docMk/>
+          <pc:sldMk cId="2092404364" sldId="323"/>
+        </pc:sldMkLst>
+      </pc:sldChg>
+      <pc:sldChg chg="modNotesTx">
+        <pc:chgData name="Daniele Gammelli" userId="292b8a31-f1ba-4b4c-b196-a231dc095d13" providerId="ADAL" clId="{6E670754-AB6A-5789-AA0A-6F6FD9CE3EEA}" dt="2026-08-13T22:53:12.429" v="21" actId="20577"/>
+        <pc:sldMkLst>
+          <pc:docMk/>
+          <pc:sldMk cId="2472688716" sldId="324"/>
+        </pc:sldMkLst>
+      </pc:sldChg>
+    </pc:docChg>
+  </pc:docChgLst>
+</pc:chgInfo>
 </file>
 
 <file path=ppt/notesMasters/notesMaster1.xml><?xml version="1.0" encoding="utf-8"?>
@@ -264,7 +431,7 @@
           <a:p>
             <a:fld id="{EBD6F028-2067-3740-AA48-A91E93570B1D}" type="datetimeFigureOut">
               <a:rPr lang="en-US" smtClean="0"/>
-              <a:t>12/20/2025</a:t>
+              <a:t>8/13/26</a:t>
             </a:fld>
             <a:endParaRPr lang="en-US"/>
           </a:p>
@@ -663,20 +830,7 @@
               <a:buFont typeface="Arial" charset="0"/>
               <a:buChar char="•"/>
             </a:pPr>
-            <a:r>
-              <a:rPr lang="en-US" dirty="0"/>
-              <a:t>So we far we have described a mapping between a point P in the 3D camera reference system to a point p in the 2D image plane. But what if the information we have about points in 3D (or in general about any physical object) is available in the world coordinate system?</a:t>
-            </a:r>
-          </a:p>
-          <a:p>
-            <a:pPr marL="171450" indent="-171450">
-              <a:buFont typeface="Arial" charset="0"/>
-              <a:buChar char="•"/>
-            </a:pPr>
-            <a:r>
-              <a:rPr lang="en-US" dirty="0"/>
-              <a:t>Then, we need to include to our mapping an additional transformation that allows to relate points from/to the world reference system to/from the camera reference system. This transformation is captured by a rotation matrix R and a translation vector T. </a:t>
-            </a:r>
+            <a:endParaRPr lang="en-US" dirty="0"/>
           </a:p>
         </p:txBody>
       </p:sp>
@@ -777,29 +931,6 @@
               <a:tabLst/>
               <a:defRPr/>
             </a:pPr>
-            <a:r>
-              <a:rPr lang="en-US" dirty="0"/>
-              <a:t>The transformation that allows to relate points from/to the world reference system to/ from the camera reference system is a rigid transformation and is regulated by a translation t and a rotation R in 3D. </a:t>
-            </a:r>
-          </a:p>
-          <a:p>
-            <a:pPr marL="0" marR="0" indent="0" algn="l" defTabSz="914400" rtl="0" eaLnBrk="1" fontAlgn="auto" latinLnBrk="0" hangingPunct="1">
-              <a:lnSpc>
-                <a:spcPct val="100000"/>
-              </a:lnSpc>
-              <a:spcBef>
-                <a:spcPts val="0"/>
-              </a:spcBef>
-              <a:spcAft>
-                <a:spcPts val="0"/>
-              </a:spcAft>
-              <a:buClrTx/>
-              <a:buSzTx/>
-              <a:buFontTx/>
-              <a:buNone/>
-              <a:tabLst/>
-              <a:defRPr/>
-            </a:pPr>
             <a:endParaRPr lang="en-US" sz="1200" kern="1200" dirty="0">
               <a:solidFill>
                 <a:schemeClr val="tx1"/>
@@ -809,669 +940,6 @@
               <a:ea typeface="+mn-ea"/>
               <a:cs typeface="+mn-cs"/>
             </a:endParaRPr>
-          </a:p>
-          <a:p>
-            <a:pPr marL="0" marR="0" indent="0" algn="l" defTabSz="914400" rtl="0" eaLnBrk="1" fontAlgn="auto" latinLnBrk="0" hangingPunct="1">
-              <a:lnSpc>
-                <a:spcPct val="100000"/>
-              </a:lnSpc>
-              <a:spcBef>
-                <a:spcPts val="0"/>
-              </a:spcBef>
-              <a:spcAft>
-                <a:spcPts val="0"/>
-              </a:spcAft>
-              <a:buClrTx/>
-              <a:buSzTx/>
-              <a:buFontTx/>
-              <a:buNone/>
-              <a:tabLst/>
-              <a:defRPr/>
-            </a:pPr>
-            <a:r>
-              <a:rPr lang="en-US" sz="1200" kern="1200" dirty="0">
-                <a:solidFill>
-                  <a:schemeClr val="tx1"/>
-                </a:solidFill>
-                <a:effectLst/>
-                <a:latin typeface="+mn-lt"/>
-                <a:ea typeface="+mn-ea"/>
-                <a:cs typeface="+mn-cs"/>
-              </a:rPr>
-              <a:t>\</a:t>
-            </a:r>
-            <a:r>
-              <a:rPr lang="en-US" sz="1200" kern="1200" dirty="0" err="1">
-                <a:solidFill>
-                  <a:schemeClr val="tx1"/>
-                </a:solidFill>
-                <a:effectLst/>
-                <a:latin typeface="+mn-lt"/>
-                <a:ea typeface="+mn-ea"/>
-                <a:cs typeface="+mn-cs"/>
-              </a:rPr>
-              <a:t>Rightarrow</a:t>
-            </a:r>
-            <a:r>
-              <a:rPr lang="en-US" sz="1200" kern="1200" dirty="0">
-                <a:solidFill>
-                  <a:schemeClr val="tx1"/>
-                </a:solidFill>
-                <a:effectLst/>
-                <a:latin typeface="+mn-lt"/>
-                <a:ea typeface="+mn-ea"/>
-                <a:cs typeface="+mn-cs"/>
-              </a:rPr>
-              <a:t> P_C = t+ R\, P_W</a:t>
-            </a:r>
-          </a:p>
-          <a:p>
-            <a:endParaRPr lang="en-US" sz="1200" kern="1200" dirty="0">
-              <a:solidFill>
-                <a:schemeClr val="tx1"/>
-              </a:solidFill>
-              <a:effectLst/>
-              <a:latin typeface="+mn-lt"/>
-              <a:ea typeface="+mn-ea"/>
-              <a:cs typeface="+mn-cs"/>
-            </a:endParaRPr>
-          </a:p>
-          <a:p>
-            <a:endParaRPr lang="en-US" sz="1200" kern="1200" dirty="0">
-              <a:solidFill>
-                <a:schemeClr val="tx1"/>
-              </a:solidFill>
-              <a:effectLst/>
-              <a:latin typeface="+mn-lt"/>
-              <a:ea typeface="+mn-ea"/>
-              <a:cs typeface="+mn-cs"/>
-            </a:endParaRPr>
-          </a:p>
-          <a:p>
-            <a:r>
-              <a:rPr lang="en-US" sz="1200" kern="1200" dirty="0">
-                <a:solidFill>
-                  <a:schemeClr val="tx1"/>
-                </a:solidFill>
-                <a:effectLst/>
-                <a:latin typeface="+mn-lt"/>
-                <a:ea typeface="+mn-ea"/>
-                <a:cs typeface="+mn-cs"/>
-              </a:rPr>
-              <a:t>R = \begin{</a:t>
-            </a:r>
-            <a:r>
-              <a:rPr lang="en-US" sz="1200" kern="1200" dirty="0" err="1">
-                <a:solidFill>
-                  <a:schemeClr val="tx1"/>
-                </a:solidFill>
-                <a:effectLst/>
-                <a:latin typeface="+mn-lt"/>
-                <a:ea typeface="+mn-ea"/>
-                <a:cs typeface="+mn-cs"/>
-              </a:rPr>
-              <a:t>bmatrix</a:t>
-            </a:r>
-            <a:r>
-              <a:rPr lang="en-US" sz="1200" kern="1200" dirty="0">
-                <a:solidFill>
-                  <a:schemeClr val="tx1"/>
-                </a:solidFill>
-                <a:effectLst/>
-                <a:latin typeface="+mn-lt"/>
-                <a:ea typeface="+mn-ea"/>
-                <a:cs typeface="+mn-cs"/>
-              </a:rPr>
-              <a:t>}</a:t>
-            </a:r>
-          </a:p>
-          <a:p>
-            <a:r>
-              <a:rPr lang="en-US" sz="1200" kern="1200" dirty="0" err="1">
-                <a:solidFill>
-                  <a:schemeClr val="tx1"/>
-                </a:solidFill>
-                <a:effectLst/>
-                <a:latin typeface="+mn-lt"/>
-                <a:ea typeface="+mn-ea"/>
-                <a:cs typeface="+mn-cs"/>
-              </a:rPr>
-              <a:t>i_W</a:t>
-            </a:r>
-            <a:r>
-              <a:rPr lang="en-US" sz="1200" kern="1200" dirty="0">
-                <a:solidFill>
-                  <a:schemeClr val="tx1"/>
-                </a:solidFill>
-                <a:effectLst/>
-                <a:latin typeface="+mn-lt"/>
-                <a:ea typeface="+mn-ea"/>
-                <a:cs typeface="+mn-cs"/>
-              </a:rPr>
-              <a:t>\</a:t>
-            </a:r>
-            <a:r>
-              <a:rPr lang="en-US" sz="1200" kern="1200" dirty="0" err="1">
-                <a:solidFill>
-                  <a:schemeClr val="tx1"/>
-                </a:solidFill>
-                <a:effectLst/>
-                <a:latin typeface="+mn-lt"/>
-                <a:ea typeface="+mn-ea"/>
-                <a:cs typeface="+mn-cs"/>
-              </a:rPr>
-              <a:t>cdot</a:t>
-            </a:r>
-            <a:r>
-              <a:rPr lang="en-US" sz="1200" kern="1200" dirty="0">
-                <a:solidFill>
-                  <a:schemeClr val="tx1"/>
-                </a:solidFill>
-                <a:effectLst/>
-                <a:latin typeface="+mn-lt"/>
-                <a:ea typeface="+mn-ea"/>
-                <a:cs typeface="+mn-cs"/>
-              </a:rPr>
-              <a:t> </a:t>
-            </a:r>
-            <a:r>
-              <a:rPr lang="en-US" sz="1200" kern="1200" dirty="0" err="1">
-                <a:solidFill>
-                  <a:schemeClr val="tx1"/>
-                </a:solidFill>
-                <a:effectLst/>
-                <a:latin typeface="+mn-lt"/>
-                <a:ea typeface="+mn-ea"/>
-                <a:cs typeface="+mn-cs"/>
-              </a:rPr>
-              <a:t>i</a:t>
-            </a:r>
-            <a:r>
-              <a:rPr lang="en-US" sz="1200" kern="1200" dirty="0">
-                <a:solidFill>
-                  <a:schemeClr val="tx1"/>
-                </a:solidFill>
-                <a:effectLst/>
-                <a:latin typeface="+mn-lt"/>
-                <a:ea typeface="+mn-ea"/>
-                <a:cs typeface="+mn-cs"/>
-              </a:rPr>
-              <a:t> &amp; </a:t>
-            </a:r>
-            <a:r>
-              <a:rPr lang="en-US" sz="1200" kern="1200" dirty="0" err="1">
-                <a:solidFill>
-                  <a:schemeClr val="tx1"/>
-                </a:solidFill>
-                <a:effectLst/>
-                <a:latin typeface="+mn-lt"/>
-                <a:ea typeface="+mn-ea"/>
-                <a:cs typeface="+mn-cs"/>
-              </a:rPr>
-              <a:t>j_W</a:t>
-            </a:r>
-            <a:r>
-              <a:rPr lang="en-US" sz="1200" kern="1200" dirty="0">
-                <a:solidFill>
-                  <a:schemeClr val="tx1"/>
-                </a:solidFill>
-                <a:effectLst/>
-                <a:latin typeface="+mn-lt"/>
-                <a:ea typeface="+mn-ea"/>
-                <a:cs typeface="+mn-cs"/>
-              </a:rPr>
-              <a:t>\</a:t>
-            </a:r>
-            <a:r>
-              <a:rPr lang="en-US" sz="1200" kern="1200" dirty="0" err="1">
-                <a:solidFill>
-                  <a:schemeClr val="tx1"/>
-                </a:solidFill>
-                <a:effectLst/>
-                <a:latin typeface="+mn-lt"/>
-                <a:ea typeface="+mn-ea"/>
-                <a:cs typeface="+mn-cs"/>
-              </a:rPr>
-              <a:t>cdot</a:t>
-            </a:r>
-            <a:r>
-              <a:rPr lang="en-US" sz="1200" kern="1200" dirty="0">
-                <a:solidFill>
-                  <a:schemeClr val="tx1"/>
-                </a:solidFill>
-                <a:effectLst/>
-                <a:latin typeface="+mn-lt"/>
-                <a:ea typeface="+mn-ea"/>
-                <a:cs typeface="+mn-cs"/>
-              </a:rPr>
-              <a:t> </a:t>
-            </a:r>
-            <a:r>
-              <a:rPr lang="en-US" sz="1200" kern="1200" dirty="0" err="1">
-                <a:solidFill>
-                  <a:schemeClr val="tx1"/>
-                </a:solidFill>
-                <a:effectLst/>
-                <a:latin typeface="+mn-lt"/>
-                <a:ea typeface="+mn-ea"/>
-                <a:cs typeface="+mn-cs"/>
-              </a:rPr>
-              <a:t>i</a:t>
-            </a:r>
-            <a:r>
-              <a:rPr lang="en-US" sz="1200" kern="1200" dirty="0">
-                <a:solidFill>
-                  <a:schemeClr val="tx1"/>
-                </a:solidFill>
-                <a:effectLst/>
-                <a:latin typeface="+mn-lt"/>
-                <a:ea typeface="+mn-ea"/>
-                <a:cs typeface="+mn-cs"/>
-              </a:rPr>
-              <a:t> &amp; </a:t>
-            </a:r>
-            <a:r>
-              <a:rPr lang="en-US" sz="1200" kern="1200" dirty="0" err="1">
-                <a:solidFill>
-                  <a:schemeClr val="tx1"/>
-                </a:solidFill>
-                <a:effectLst/>
-                <a:latin typeface="+mn-lt"/>
-                <a:ea typeface="+mn-ea"/>
-                <a:cs typeface="+mn-cs"/>
-              </a:rPr>
-              <a:t>k_W</a:t>
-            </a:r>
-            <a:r>
-              <a:rPr lang="en-US" sz="1200" kern="1200" dirty="0">
-                <a:solidFill>
-                  <a:schemeClr val="tx1"/>
-                </a:solidFill>
-                <a:effectLst/>
-                <a:latin typeface="+mn-lt"/>
-                <a:ea typeface="+mn-ea"/>
-                <a:cs typeface="+mn-cs"/>
-              </a:rPr>
-              <a:t>\</a:t>
-            </a:r>
-            <a:r>
-              <a:rPr lang="en-US" sz="1200" kern="1200" dirty="0" err="1">
-                <a:solidFill>
-                  <a:schemeClr val="tx1"/>
-                </a:solidFill>
-                <a:effectLst/>
-                <a:latin typeface="+mn-lt"/>
-                <a:ea typeface="+mn-ea"/>
-                <a:cs typeface="+mn-cs"/>
-              </a:rPr>
-              <a:t>cdot</a:t>
-            </a:r>
-            <a:r>
-              <a:rPr lang="en-US" sz="1200" kern="1200" dirty="0">
-                <a:solidFill>
-                  <a:schemeClr val="tx1"/>
-                </a:solidFill>
-                <a:effectLst/>
-                <a:latin typeface="+mn-lt"/>
-                <a:ea typeface="+mn-ea"/>
-                <a:cs typeface="+mn-cs"/>
-              </a:rPr>
-              <a:t> </a:t>
-            </a:r>
-            <a:r>
-              <a:rPr lang="en-US" sz="1200" kern="1200" dirty="0" err="1">
-                <a:solidFill>
-                  <a:schemeClr val="tx1"/>
-                </a:solidFill>
-                <a:effectLst/>
-                <a:latin typeface="+mn-lt"/>
-                <a:ea typeface="+mn-ea"/>
-                <a:cs typeface="+mn-cs"/>
-              </a:rPr>
-              <a:t>i</a:t>
-            </a:r>
-            <a:r>
-              <a:rPr lang="en-US" sz="1200" kern="1200" dirty="0">
-                <a:solidFill>
-                  <a:schemeClr val="tx1"/>
-                </a:solidFill>
-                <a:effectLst/>
-                <a:latin typeface="+mn-lt"/>
-                <a:ea typeface="+mn-ea"/>
-                <a:cs typeface="+mn-cs"/>
-              </a:rPr>
-              <a:t>\\</a:t>
-            </a:r>
-          </a:p>
-          <a:p>
-            <a:r>
-              <a:rPr lang="en-US" sz="1200" kern="1200" dirty="0" err="1">
-                <a:solidFill>
-                  <a:schemeClr val="tx1"/>
-                </a:solidFill>
-                <a:effectLst/>
-                <a:latin typeface="+mn-lt"/>
-                <a:ea typeface="+mn-ea"/>
-                <a:cs typeface="+mn-cs"/>
-              </a:rPr>
-              <a:t>i_W</a:t>
-            </a:r>
-            <a:r>
-              <a:rPr lang="en-US" sz="1200" kern="1200" dirty="0">
-                <a:solidFill>
-                  <a:schemeClr val="tx1"/>
-                </a:solidFill>
-                <a:effectLst/>
-                <a:latin typeface="+mn-lt"/>
-                <a:ea typeface="+mn-ea"/>
-                <a:cs typeface="+mn-cs"/>
-              </a:rPr>
-              <a:t>\</a:t>
-            </a:r>
-            <a:r>
-              <a:rPr lang="en-US" sz="1200" kern="1200" dirty="0" err="1">
-                <a:solidFill>
-                  <a:schemeClr val="tx1"/>
-                </a:solidFill>
-                <a:effectLst/>
-                <a:latin typeface="+mn-lt"/>
-                <a:ea typeface="+mn-ea"/>
-                <a:cs typeface="+mn-cs"/>
-              </a:rPr>
-              <a:t>cdot</a:t>
-            </a:r>
-            <a:r>
-              <a:rPr lang="en-US" sz="1200" kern="1200" dirty="0">
-                <a:solidFill>
-                  <a:schemeClr val="tx1"/>
-                </a:solidFill>
-                <a:effectLst/>
-                <a:latin typeface="+mn-lt"/>
-                <a:ea typeface="+mn-ea"/>
-                <a:cs typeface="+mn-cs"/>
-              </a:rPr>
-              <a:t> j &amp; </a:t>
-            </a:r>
-            <a:r>
-              <a:rPr lang="en-US" sz="1200" kern="1200" dirty="0" err="1">
-                <a:solidFill>
-                  <a:schemeClr val="tx1"/>
-                </a:solidFill>
-                <a:effectLst/>
-                <a:latin typeface="+mn-lt"/>
-                <a:ea typeface="+mn-ea"/>
-                <a:cs typeface="+mn-cs"/>
-              </a:rPr>
-              <a:t>j_W</a:t>
-            </a:r>
-            <a:r>
-              <a:rPr lang="en-US" sz="1200" kern="1200" dirty="0">
-                <a:solidFill>
-                  <a:schemeClr val="tx1"/>
-                </a:solidFill>
-                <a:effectLst/>
-                <a:latin typeface="+mn-lt"/>
-                <a:ea typeface="+mn-ea"/>
-                <a:cs typeface="+mn-cs"/>
-              </a:rPr>
-              <a:t>\</a:t>
-            </a:r>
-            <a:r>
-              <a:rPr lang="en-US" sz="1200" kern="1200" dirty="0" err="1">
-                <a:solidFill>
-                  <a:schemeClr val="tx1"/>
-                </a:solidFill>
-                <a:effectLst/>
-                <a:latin typeface="+mn-lt"/>
-                <a:ea typeface="+mn-ea"/>
-                <a:cs typeface="+mn-cs"/>
-              </a:rPr>
-              <a:t>cdot</a:t>
-            </a:r>
-            <a:r>
-              <a:rPr lang="en-US" sz="1200" kern="1200" dirty="0">
-                <a:solidFill>
-                  <a:schemeClr val="tx1"/>
-                </a:solidFill>
-                <a:effectLst/>
-                <a:latin typeface="+mn-lt"/>
-                <a:ea typeface="+mn-ea"/>
-                <a:cs typeface="+mn-cs"/>
-              </a:rPr>
-              <a:t> j &amp; </a:t>
-            </a:r>
-            <a:r>
-              <a:rPr lang="en-US" sz="1200" kern="1200" dirty="0" err="1">
-                <a:solidFill>
-                  <a:schemeClr val="tx1"/>
-                </a:solidFill>
-                <a:effectLst/>
-                <a:latin typeface="+mn-lt"/>
-                <a:ea typeface="+mn-ea"/>
-                <a:cs typeface="+mn-cs"/>
-              </a:rPr>
-              <a:t>k_W</a:t>
-            </a:r>
-            <a:r>
-              <a:rPr lang="en-US" sz="1200" kern="1200" dirty="0">
-                <a:solidFill>
-                  <a:schemeClr val="tx1"/>
-                </a:solidFill>
-                <a:effectLst/>
-                <a:latin typeface="+mn-lt"/>
-                <a:ea typeface="+mn-ea"/>
-                <a:cs typeface="+mn-cs"/>
-              </a:rPr>
-              <a:t>\</a:t>
-            </a:r>
-            <a:r>
-              <a:rPr lang="en-US" sz="1200" kern="1200" dirty="0" err="1">
-                <a:solidFill>
-                  <a:schemeClr val="tx1"/>
-                </a:solidFill>
-                <a:effectLst/>
-                <a:latin typeface="+mn-lt"/>
-                <a:ea typeface="+mn-ea"/>
-                <a:cs typeface="+mn-cs"/>
-              </a:rPr>
-              <a:t>cdot</a:t>
-            </a:r>
-            <a:r>
-              <a:rPr lang="en-US" sz="1200" kern="1200" dirty="0">
-                <a:solidFill>
-                  <a:schemeClr val="tx1"/>
-                </a:solidFill>
-                <a:effectLst/>
-                <a:latin typeface="+mn-lt"/>
-                <a:ea typeface="+mn-ea"/>
-                <a:cs typeface="+mn-cs"/>
-              </a:rPr>
-              <a:t> j\\</a:t>
-            </a:r>
-          </a:p>
-          <a:p>
-            <a:r>
-              <a:rPr lang="en-US" sz="1200" kern="1200" dirty="0" err="1">
-                <a:solidFill>
-                  <a:schemeClr val="tx1"/>
-                </a:solidFill>
-                <a:effectLst/>
-                <a:latin typeface="+mn-lt"/>
-                <a:ea typeface="+mn-ea"/>
-                <a:cs typeface="+mn-cs"/>
-              </a:rPr>
-              <a:t>i_W</a:t>
-            </a:r>
-            <a:r>
-              <a:rPr lang="en-US" sz="1200" kern="1200" dirty="0">
-                <a:solidFill>
-                  <a:schemeClr val="tx1"/>
-                </a:solidFill>
-                <a:effectLst/>
-                <a:latin typeface="+mn-lt"/>
-                <a:ea typeface="+mn-ea"/>
-                <a:cs typeface="+mn-cs"/>
-              </a:rPr>
-              <a:t>\</a:t>
-            </a:r>
-            <a:r>
-              <a:rPr lang="en-US" sz="1200" kern="1200" dirty="0" err="1">
-                <a:solidFill>
-                  <a:schemeClr val="tx1"/>
-                </a:solidFill>
-                <a:effectLst/>
-                <a:latin typeface="+mn-lt"/>
-                <a:ea typeface="+mn-ea"/>
-                <a:cs typeface="+mn-cs"/>
-              </a:rPr>
-              <a:t>cdot</a:t>
-            </a:r>
-            <a:r>
-              <a:rPr lang="en-US" sz="1200" kern="1200" dirty="0">
-                <a:solidFill>
-                  <a:schemeClr val="tx1"/>
-                </a:solidFill>
-                <a:effectLst/>
-                <a:latin typeface="+mn-lt"/>
-                <a:ea typeface="+mn-ea"/>
-                <a:cs typeface="+mn-cs"/>
-              </a:rPr>
-              <a:t> k &amp; </a:t>
-            </a:r>
-            <a:r>
-              <a:rPr lang="en-US" sz="1200" kern="1200" dirty="0" err="1">
-                <a:solidFill>
-                  <a:schemeClr val="tx1"/>
-                </a:solidFill>
-                <a:effectLst/>
-                <a:latin typeface="+mn-lt"/>
-                <a:ea typeface="+mn-ea"/>
-                <a:cs typeface="+mn-cs"/>
-              </a:rPr>
-              <a:t>j_W</a:t>
-            </a:r>
-            <a:r>
-              <a:rPr lang="en-US" sz="1200" kern="1200" dirty="0">
-                <a:solidFill>
-                  <a:schemeClr val="tx1"/>
-                </a:solidFill>
-                <a:effectLst/>
-                <a:latin typeface="+mn-lt"/>
-                <a:ea typeface="+mn-ea"/>
-                <a:cs typeface="+mn-cs"/>
-              </a:rPr>
-              <a:t>\</a:t>
-            </a:r>
-            <a:r>
-              <a:rPr lang="en-US" sz="1200" kern="1200" dirty="0" err="1">
-                <a:solidFill>
-                  <a:schemeClr val="tx1"/>
-                </a:solidFill>
-                <a:effectLst/>
-                <a:latin typeface="+mn-lt"/>
-                <a:ea typeface="+mn-ea"/>
-                <a:cs typeface="+mn-cs"/>
-              </a:rPr>
-              <a:t>cdot</a:t>
-            </a:r>
-            <a:r>
-              <a:rPr lang="en-US" sz="1200" kern="1200" dirty="0">
-                <a:solidFill>
-                  <a:schemeClr val="tx1"/>
-                </a:solidFill>
-                <a:effectLst/>
-                <a:latin typeface="+mn-lt"/>
-                <a:ea typeface="+mn-ea"/>
-                <a:cs typeface="+mn-cs"/>
-              </a:rPr>
-              <a:t> k &amp; </a:t>
-            </a:r>
-            <a:r>
-              <a:rPr lang="en-US" sz="1200" kern="1200" dirty="0" err="1">
-                <a:solidFill>
-                  <a:schemeClr val="tx1"/>
-                </a:solidFill>
-                <a:effectLst/>
-                <a:latin typeface="+mn-lt"/>
-                <a:ea typeface="+mn-ea"/>
-                <a:cs typeface="+mn-cs"/>
-              </a:rPr>
-              <a:t>k_W</a:t>
-            </a:r>
-            <a:r>
-              <a:rPr lang="en-US" sz="1200" kern="1200" dirty="0">
-                <a:solidFill>
-                  <a:schemeClr val="tx1"/>
-                </a:solidFill>
-                <a:effectLst/>
-                <a:latin typeface="+mn-lt"/>
-                <a:ea typeface="+mn-ea"/>
-                <a:cs typeface="+mn-cs"/>
-              </a:rPr>
-              <a:t>\</a:t>
-            </a:r>
-            <a:r>
-              <a:rPr lang="en-US" sz="1200" kern="1200" dirty="0" err="1">
-                <a:solidFill>
-                  <a:schemeClr val="tx1"/>
-                </a:solidFill>
-                <a:effectLst/>
-                <a:latin typeface="+mn-lt"/>
-                <a:ea typeface="+mn-ea"/>
-                <a:cs typeface="+mn-cs"/>
-              </a:rPr>
-              <a:t>cdot</a:t>
-            </a:r>
-            <a:r>
-              <a:rPr lang="en-US" sz="1200" kern="1200" dirty="0">
-                <a:solidFill>
-                  <a:schemeClr val="tx1"/>
-                </a:solidFill>
-                <a:effectLst/>
-                <a:latin typeface="+mn-lt"/>
-                <a:ea typeface="+mn-ea"/>
-                <a:cs typeface="+mn-cs"/>
-              </a:rPr>
-              <a:t> k\\</a:t>
-            </a:r>
-          </a:p>
-          <a:p>
-            <a:r>
-              <a:rPr lang="en-US" sz="1200" kern="1200" dirty="0">
-                <a:solidFill>
-                  <a:schemeClr val="tx1"/>
-                </a:solidFill>
-                <a:effectLst/>
-                <a:latin typeface="+mn-lt"/>
-                <a:ea typeface="+mn-ea"/>
-                <a:cs typeface="+mn-cs"/>
-              </a:rPr>
-              <a:t>\end{</a:t>
-            </a:r>
-            <a:r>
-              <a:rPr lang="en-US" sz="1200" kern="1200" dirty="0" err="1">
-                <a:solidFill>
-                  <a:schemeClr val="tx1"/>
-                </a:solidFill>
-                <a:effectLst/>
-                <a:latin typeface="+mn-lt"/>
-                <a:ea typeface="+mn-ea"/>
-                <a:cs typeface="+mn-cs"/>
-              </a:rPr>
-              <a:t>bmatrix</a:t>
-            </a:r>
-            <a:r>
-              <a:rPr lang="en-US" sz="1200" kern="1200" dirty="0">
-                <a:solidFill>
-                  <a:schemeClr val="tx1"/>
-                </a:solidFill>
-                <a:effectLst/>
-                <a:latin typeface="+mn-lt"/>
-                <a:ea typeface="+mn-ea"/>
-                <a:cs typeface="+mn-cs"/>
-              </a:rPr>
-              <a:t>}</a:t>
-            </a:r>
           </a:p>
         </p:txBody>
       </p:sp>
@@ -1555,368 +1023,6 @@
           <a:bodyPr/>
           <a:lstStyle/>
           <a:p>
-            <a:pPr marL="171450" indent="-171450">
-              <a:buFont typeface="Arial" charset="0"/>
-              <a:buChar char="•"/>
-            </a:pPr>
-            <a:r>
-              <a:rPr lang="en-US" dirty="0"/>
-              <a:t>The benefit of working in a homogeneous coordinates is that these two transforma6ons can be compactly described by the matrix [R T; O 1] as the slide illustrates. </a:t>
-            </a:r>
-          </a:p>
-          <a:p>
-            <a:pPr marL="171450" indent="-171450">
-              <a:buFont typeface="Arial" charset="0"/>
-              <a:buChar char="•"/>
-            </a:pPr>
-            <a:r>
-              <a:rPr lang="en-US" dirty="0"/>
-              <a:t>This is a 4x4 matrix and allows to map any point Pw = [</a:t>
-            </a:r>
-            <a:r>
-              <a:rPr lang="en-US" dirty="0" err="1"/>
-              <a:t>xw</a:t>
-            </a:r>
-            <a:r>
-              <a:rPr lang="en-US" dirty="0"/>
-              <a:t> </a:t>
-            </a:r>
-            <a:r>
-              <a:rPr lang="en-US" dirty="0" err="1"/>
-              <a:t>yw</a:t>
-            </a:r>
-            <a:r>
-              <a:rPr lang="en-US" dirty="0"/>
-              <a:t> </a:t>
-            </a:r>
-            <a:r>
-              <a:rPr lang="en-US" dirty="0" err="1"/>
-              <a:t>zw</a:t>
-            </a:r>
-            <a:r>
-              <a:rPr lang="en-US" dirty="0"/>
-              <a:t> 1]T in the world reference system to a point P = [x y z 1]T in the camera reference system (in homogenous coordinates)</a:t>
-            </a:r>
-            <a:endParaRPr lang="en-US" sz="1200" kern="1200" dirty="0">
-              <a:solidFill>
-                <a:schemeClr val="tx1"/>
-              </a:solidFill>
-              <a:effectLst/>
-              <a:latin typeface="+mn-lt"/>
-              <a:ea typeface="+mn-ea"/>
-              <a:cs typeface="+mn-cs"/>
-            </a:endParaRPr>
-          </a:p>
-          <a:p>
-            <a:endParaRPr lang="en-US" sz="1200" kern="1200" dirty="0">
-              <a:solidFill>
-                <a:schemeClr val="tx1"/>
-              </a:solidFill>
-              <a:effectLst/>
-              <a:latin typeface="+mn-lt"/>
-              <a:ea typeface="+mn-ea"/>
-              <a:cs typeface="+mn-cs"/>
-            </a:endParaRPr>
-          </a:p>
-          <a:p>
-            <a:r>
-              <a:rPr lang="en-US" sz="1200" kern="1200" dirty="0">
-                <a:solidFill>
-                  <a:schemeClr val="tx1"/>
-                </a:solidFill>
-                <a:effectLst/>
-                <a:latin typeface="+mn-lt"/>
-                <a:ea typeface="+mn-ea"/>
-                <a:cs typeface="+mn-cs"/>
-              </a:rPr>
-              <a:t>\begin{</a:t>
-            </a:r>
-            <a:r>
-              <a:rPr lang="en-US" sz="1200" kern="1200" dirty="0" err="1">
-                <a:solidFill>
-                  <a:schemeClr val="tx1"/>
-                </a:solidFill>
-                <a:effectLst/>
-                <a:latin typeface="+mn-lt"/>
-                <a:ea typeface="+mn-ea"/>
-                <a:cs typeface="+mn-cs"/>
-              </a:rPr>
-              <a:t>pmatrix</a:t>
-            </a:r>
-            <a:r>
-              <a:rPr lang="en-US" sz="1200" kern="1200" dirty="0">
-                <a:solidFill>
-                  <a:schemeClr val="tx1"/>
-                </a:solidFill>
-                <a:effectLst/>
-                <a:latin typeface="+mn-lt"/>
-                <a:ea typeface="+mn-ea"/>
-                <a:cs typeface="+mn-cs"/>
-              </a:rPr>
-              <a:t>}</a:t>
-            </a:r>
-          </a:p>
-          <a:p>
-            <a:r>
-              <a:rPr lang="en-US" sz="1200" kern="1200" dirty="0">
-                <a:solidFill>
-                  <a:schemeClr val="tx1"/>
-                </a:solidFill>
-                <a:effectLst/>
-                <a:latin typeface="+mn-lt"/>
-                <a:ea typeface="+mn-ea"/>
-                <a:cs typeface="+mn-cs"/>
-              </a:rPr>
-              <a:t>P_C\\</a:t>
-            </a:r>
-          </a:p>
-          <a:p>
-            <a:r>
-              <a:rPr lang="en-US" sz="1200" kern="1200" dirty="0">
-                <a:solidFill>
-                  <a:schemeClr val="tx1"/>
-                </a:solidFill>
-                <a:effectLst/>
-                <a:latin typeface="+mn-lt"/>
-                <a:ea typeface="+mn-ea"/>
-                <a:cs typeface="+mn-cs"/>
-              </a:rPr>
-              <a:t>1</a:t>
-            </a:r>
-          </a:p>
-          <a:p>
-            <a:r>
-              <a:rPr lang="en-US" sz="1200" kern="1200" dirty="0">
-                <a:solidFill>
-                  <a:schemeClr val="tx1"/>
-                </a:solidFill>
-                <a:effectLst/>
-                <a:latin typeface="+mn-lt"/>
-                <a:ea typeface="+mn-ea"/>
-                <a:cs typeface="+mn-cs"/>
-              </a:rPr>
-              <a:t>\end{</a:t>
-            </a:r>
-            <a:r>
-              <a:rPr lang="en-US" sz="1200" kern="1200" dirty="0" err="1">
-                <a:solidFill>
-                  <a:schemeClr val="tx1"/>
-                </a:solidFill>
-                <a:effectLst/>
-                <a:latin typeface="+mn-lt"/>
-                <a:ea typeface="+mn-ea"/>
-                <a:cs typeface="+mn-cs"/>
-              </a:rPr>
-              <a:t>pmatrix</a:t>
-            </a:r>
-            <a:r>
-              <a:rPr lang="en-US" sz="1200" kern="1200" dirty="0">
-                <a:solidFill>
-                  <a:schemeClr val="tx1"/>
-                </a:solidFill>
-                <a:effectLst/>
-                <a:latin typeface="+mn-lt"/>
-                <a:ea typeface="+mn-ea"/>
-                <a:cs typeface="+mn-cs"/>
-              </a:rPr>
-              <a:t>}</a:t>
-            </a:r>
-          </a:p>
-          <a:p>
-            <a:r>
-              <a:rPr lang="en-US" sz="1200" kern="1200" dirty="0">
-                <a:solidFill>
-                  <a:schemeClr val="tx1"/>
-                </a:solidFill>
-                <a:effectLst/>
-                <a:latin typeface="+mn-lt"/>
-                <a:ea typeface="+mn-ea"/>
-                <a:cs typeface="+mn-cs"/>
-              </a:rPr>
-              <a:t>= \begin{</a:t>
-            </a:r>
-            <a:r>
-              <a:rPr lang="en-US" sz="1200" kern="1200" dirty="0" err="1">
-                <a:solidFill>
-                  <a:schemeClr val="tx1"/>
-                </a:solidFill>
-                <a:effectLst/>
-                <a:latin typeface="+mn-lt"/>
-                <a:ea typeface="+mn-ea"/>
-                <a:cs typeface="+mn-cs"/>
-              </a:rPr>
-              <a:t>bmatrix</a:t>
-            </a:r>
-            <a:r>
-              <a:rPr lang="en-US" sz="1200" kern="1200" dirty="0">
-                <a:solidFill>
-                  <a:schemeClr val="tx1"/>
-                </a:solidFill>
-                <a:effectLst/>
-                <a:latin typeface="+mn-lt"/>
-                <a:ea typeface="+mn-ea"/>
-                <a:cs typeface="+mn-cs"/>
-              </a:rPr>
-              <a:t>}</a:t>
-            </a:r>
-          </a:p>
-          <a:p>
-            <a:r>
-              <a:rPr lang="en-US" sz="1200" kern="1200" dirty="0">
-                <a:solidFill>
-                  <a:schemeClr val="tx1"/>
-                </a:solidFill>
-                <a:effectLst/>
-                <a:latin typeface="+mn-lt"/>
-                <a:ea typeface="+mn-ea"/>
-                <a:cs typeface="+mn-cs"/>
-              </a:rPr>
-              <a:t>R &amp; t\\</a:t>
-            </a:r>
-          </a:p>
-          <a:p>
-            <a:r>
-              <a:rPr lang="en-US" sz="1200" kern="1200" dirty="0">
-                <a:solidFill>
-                  <a:schemeClr val="tx1"/>
-                </a:solidFill>
-                <a:effectLst/>
-                <a:latin typeface="+mn-lt"/>
-                <a:ea typeface="+mn-ea"/>
-                <a:cs typeface="+mn-cs"/>
-              </a:rPr>
-              <a:t>0_{1\times 3} &amp; 1</a:t>
-            </a:r>
-          </a:p>
-          <a:p>
-            <a:r>
-              <a:rPr lang="en-US" sz="1200" kern="1200" dirty="0">
-                <a:solidFill>
-                  <a:schemeClr val="tx1"/>
-                </a:solidFill>
-                <a:effectLst/>
-                <a:latin typeface="+mn-lt"/>
-                <a:ea typeface="+mn-ea"/>
-                <a:cs typeface="+mn-cs"/>
-              </a:rPr>
-              <a:t>\end{</a:t>
-            </a:r>
-            <a:r>
-              <a:rPr lang="en-US" sz="1200" kern="1200" dirty="0" err="1">
-                <a:solidFill>
-                  <a:schemeClr val="tx1"/>
-                </a:solidFill>
-                <a:effectLst/>
-                <a:latin typeface="+mn-lt"/>
-                <a:ea typeface="+mn-ea"/>
-                <a:cs typeface="+mn-cs"/>
-              </a:rPr>
-              <a:t>bmatrix</a:t>
-            </a:r>
-            <a:r>
-              <a:rPr lang="en-US" sz="1200" kern="1200" dirty="0">
-                <a:solidFill>
-                  <a:schemeClr val="tx1"/>
-                </a:solidFill>
-                <a:effectLst/>
-                <a:latin typeface="+mn-lt"/>
-                <a:ea typeface="+mn-ea"/>
-                <a:cs typeface="+mn-cs"/>
-              </a:rPr>
-              <a:t>}\begin{</a:t>
-            </a:r>
-            <a:r>
-              <a:rPr lang="en-US" sz="1200" kern="1200" dirty="0" err="1">
-                <a:solidFill>
-                  <a:schemeClr val="tx1"/>
-                </a:solidFill>
-                <a:effectLst/>
-                <a:latin typeface="+mn-lt"/>
-                <a:ea typeface="+mn-ea"/>
-                <a:cs typeface="+mn-cs"/>
-              </a:rPr>
-              <a:t>pmatrix</a:t>
-            </a:r>
-            <a:r>
-              <a:rPr lang="en-US" sz="1200" kern="1200" dirty="0">
-                <a:solidFill>
-                  <a:schemeClr val="tx1"/>
-                </a:solidFill>
-                <a:effectLst/>
-                <a:latin typeface="+mn-lt"/>
-                <a:ea typeface="+mn-ea"/>
-                <a:cs typeface="+mn-cs"/>
-              </a:rPr>
-              <a:t>}</a:t>
-            </a:r>
-          </a:p>
-          <a:p>
-            <a:r>
-              <a:rPr lang="en-US" sz="1200" kern="1200" dirty="0">
-                <a:solidFill>
-                  <a:schemeClr val="tx1"/>
-                </a:solidFill>
-                <a:effectLst/>
-                <a:latin typeface="+mn-lt"/>
-                <a:ea typeface="+mn-ea"/>
-                <a:cs typeface="+mn-cs"/>
-              </a:rPr>
-              <a:t>P_W\\</a:t>
-            </a:r>
-          </a:p>
-          <a:p>
-            <a:r>
-              <a:rPr lang="en-US" sz="1200" kern="1200" dirty="0">
-                <a:solidFill>
-                  <a:schemeClr val="tx1"/>
-                </a:solidFill>
-                <a:effectLst/>
-                <a:latin typeface="+mn-lt"/>
-                <a:ea typeface="+mn-ea"/>
-                <a:cs typeface="+mn-cs"/>
-              </a:rPr>
-              <a:t>1</a:t>
-            </a:r>
-          </a:p>
-          <a:p>
-            <a:r>
-              <a:rPr lang="en-US" sz="1200" kern="1200" dirty="0">
-                <a:solidFill>
-                  <a:schemeClr val="tx1"/>
-                </a:solidFill>
-                <a:effectLst/>
-                <a:latin typeface="+mn-lt"/>
-                <a:ea typeface="+mn-ea"/>
-                <a:cs typeface="+mn-cs"/>
-              </a:rPr>
-              <a:t>\end{</a:t>
-            </a:r>
-            <a:r>
-              <a:rPr lang="en-US" sz="1200" kern="1200" dirty="0" err="1">
-                <a:solidFill>
-                  <a:schemeClr val="tx1"/>
-                </a:solidFill>
-                <a:effectLst/>
-                <a:latin typeface="+mn-lt"/>
-                <a:ea typeface="+mn-ea"/>
-                <a:cs typeface="+mn-cs"/>
-              </a:rPr>
-              <a:t>pmatrix</a:t>
-            </a:r>
-            <a:r>
-              <a:rPr lang="en-US" sz="1200" kern="1200" dirty="0">
-                <a:solidFill>
-                  <a:schemeClr val="tx1"/>
-                </a:solidFill>
-                <a:effectLst/>
-                <a:latin typeface="+mn-lt"/>
-                <a:ea typeface="+mn-ea"/>
-                <a:cs typeface="+mn-cs"/>
-              </a:rPr>
-              <a:t>}</a:t>
-            </a:r>
-          </a:p>
-          <a:p>
             <a:endParaRPr lang="en-US" dirty="0"/>
           </a:p>
         </p:txBody>
@@ -2005,218 +1111,6 @@
               <a:buFont typeface="Arial" charset="0"/>
               <a:buChar char="•"/>
             </a:pPr>
-            <a:r>
-              <a:rPr lang="en-US" dirty="0"/>
-              <a:t>The projection mapping is compactly given by the </a:t>
-            </a:r>
-            <a:r>
-              <a:rPr lang="en-US" dirty="0" err="1"/>
-              <a:t>projectiion</a:t>
-            </a:r>
-            <a:r>
-              <a:rPr lang="en-US" dirty="0"/>
-              <a:t> matrix K [R T], where K are called internal or intrinsic parameter and [R T] are called the external or extrinsic parameters</a:t>
-            </a:r>
-          </a:p>
-          <a:p>
-            <a:pPr marL="171450" indent="-171450">
-              <a:buFont typeface="Arial" charset="0"/>
-              <a:buChar char="•"/>
-            </a:pPr>
-            <a:r>
-              <a:rPr lang="en-US" dirty="0"/>
-              <a:t>The former are related to the intrinsic physical properties of the camera (e.g. focal length, </a:t>
-            </a:r>
-            <a:r>
-              <a:rPr lang="en-US" dirty="0" err="1"/>
-              <a:t>etc</a:t>
-            </a:r>
-            <a:r>
-              <a:rPr lang="en-US" dirty="0"/>
-              <a:t>…) where the latter are related to pose and location of the camera; </a:t>
-            </a:r>
-          </a:p>
-          <a:p>
-            <a:pPr marL="171450" indent="-171450">
-              <a:buFont typeface="Arial" charset="0"/>
-              <a:buChar char="•"/>
-            </a:pPr>
-            <a:r>
-              <a:rPr lang="en-US" dirty="0"/>
-              <a:t>Notice that these two set of parameters are nicely separated in this formulation. </a:t>
-            </a:r>
-            <a:endParaRPr lang="en-US" sz="1200" kern="1200" dirty="0">
-              <a:solidFill>
-                <a:schemeClr val="tx1"/>
-              </a:solidFill>
-              <a:effectLst/>
-              <a:latin typeface="+mn-lt"/>
-              <a:ea typeface="+mn-ea"/>
-              <a:cs typeface="+mn-cs"/>
-            </a:endParaRPr>
-          </a:p>
-          <a:p>
-            <a:endParaRPr lang="en-US" sz="1200" kern="1200" dirty="0">
-              <a:solidFill>
-                <a:schemeClr val="tx1"/>
-              </a:solidFill>
-              <a:effectLst/>
-              <a:latin typeface="+mn-lt"/>
-              <a:ea typeface="+mn-ea"/>
-              <a:cs typeface="+mn-cs"/>
-            </a:endParaRPr>
-          </a:p>
-          <a:p>
-            <a:r>
-              <a:rPr lang="en-US" sz="1200" kern="1200" dirty="0" err="1">
-                <a:solidFill>
-                  <a:schemeClr val="tx1"/>
-                </a:solidFill>
-                <a:effectLst/>
-                <a:latin typeface="+mn-lt"/>
-                <a:ea typeface="+mn-ea"/>
-                <a:cs typeface="+mn-cs"/>
-              </a:rPr>
-              <a:t>p^h</a:t>
-            </a:r>
-            <a:r>
-              <a:rPr lang="en-US" sz="1200" kern="1200" dirty="0">
-                <a:solidFill>
-                  <a:schemeClr val="tx1"/>
-                </a:solidFill>
-                <a:effectLst/>
-                <a:latin typeface="+mn-lt"/>
-                <a:ea typeface="+mn-ea"/>
-                <a:cs typeface="+mn-cs"/>
-              </a:rPr>
-              <a:t> = [K \quad 0_{3\times 1}]</a:t>
-            </a:r>
-            <a:r>
-              <a:rPr lang="en-US" sz="1200" kern="1200" dirty="0" err="1">
-                <a:solidFill>
-                  <a:schemeClr val="tx1"/>
-                </a:solidFill>
-                <a:effectLst/>
-                <a:latin typeface="+mn-lt"/>
-                <a:ea typeface="+mn-ea"/>
-                <a:cs typeface="+mn-cs"/>
-              </a:rPr>
-              <a:t>P_C^h</a:t>
-            </a:r>
-            <a:r>
-              <a:rPr lang="en-US" sz="1200" kern="1200" dirty="0">
-                <a:solidFill>
-                  <a:schemeClr val="tx1"/>
-                </a:solidFill>
-                <a:effectLst/>
-                <a:latin typeface="+mn-lt"/>
-                <a:ea typeface="+mn-ea"/>
-                <a:cs typeface="+mn-cs"/>
-              </a:rPr>
-              <a:t> = K[I_{3\times 3} \quad 0_{3\times 1}]\begin{</a:t>
-            </a:r>
-            <a:r>
-              <a:rPr lang="en-US" sz="1200" kern="1200" dirty="0" err="1">
-                <a:solidFill>
-                  <a:schemeClr val="tx1"/>
-                </a:solidFill>
-                <a:effectLst/>
-                <a:latin typeface="+mn-lt"/>
-                <a:ea typeface="+mn-ea"/>
-                <a:cs typeface="+mn-cs"/>
-              </a:rPr>
-              <a:t>bmatrix</a:t>
-            </a:r>
-            <a:r>
-              <a:rPr lang="en-US" sz="1200" kern="1200" dirty="0">
-                <a:solidFill>
-                  <a:schemeClr val="tx1"/>
-                </a:solidFill>
-                <a:effectLst/>
-                <a:latin typeface="+mn-lt"/>
-                <a:ea typeface="+mn-ea"/>
-                <a:cs typeface="+mn-cs"/>
-              </a:rPr>
-              <a:t>}</a:t>
-            </a:r>
-          </a:p>
-          <a:p>
-            <a:r>
-              <a:rPr lang="en-US" sz="1200" kern="1200" dirty="0">
-                <a:solidFill>
-                  <a:schemeClr val="tx1"/>
-                </a:solidFill>
-                <a:effectLst/>
-                <a:latin typeface="+mn-lt"/>
-                <a:ea typeface="+mn-ea"/>
-                <a:cs typeface="+mn-cs"/>
-              </a:rPr>
-              <a:t>R &amp; t\\</a:t>
-            </a:r>
-          </a:p>
-          <a:p>
-            <a:r>
-              <a:rPr lang="en-US" sz="1200" kern="1200" dirty="0">
-                <a:solidFill>
-                  <a:schemeClr val="tx1"/>
-                </a:solidFill>
-                <a:effectLst/>
-                <a:latin typeface="+mn-lt"/>
-                <a:ea typeface="+mn-ea"/>
-                <a:cs typeface="+mn-cs"/>
-              </a:rPr>
-              <a:t>0_{1\times 3} &amp; 1</a:t>
-            </a:r>
-          </a:p>
-          <a:p>
-            <a:r>
-              <a:rPr lang="en-US" sz="1200" kern="1200" dirty="0">
-                <a:solidFill>
-                  <a:schemeClr val="tx1"/>
-                </a:solidFill>
-                <a:effectLst/>
-                <a:latin typeface="+mn-lt"/>
-                <a:ea typeface="+mn-ea"/>
-                <a:cs typeface="+mn-cs"/>
-              </a:rPr>
-              <a:t>\end{</a:t>
-            </a:r>
-            <a:r>
-              <a:rPr lang="en-US" sz="1200" kern="1200" dirty="0" err="1">
-                <a:solidFill>
-                  <a:schemeClr val="tx1"/>
-                </a:solidFill>
-                <a:effectLst/>
-                <a:latin typeface="+mn-lt"/>
-                <a:ea typeface="+mn-ea"/>
-                <a:cs typeface="+mn-cs"/>
-              </a:rPr>
-              <a:t>bmatrix</a:t>
-            </a:r>
-            <a:r>
-              <a:rPr lang="en-US" sz="1200" kern="1200" dirty="0">
-                <a:solidFill>
-                  <a:schemeClr val="tx1"/>
-                </a:solidFill>
-                <a:effectLst/>
-                <a:latin typeface="+mn-lt"/>
-                <a:ea typeface="+mn-ea"/>
-                <a:cs typeface="+mn-cs"/>
-              </a:rPr>
-              <a:t>}</a:t>
-            </a:r>
-            <a:r>
-              <a:rPr lang="en-US" sz="1200" kern="1200" dirty="0" err="1">
-                <a:solidFill>
-                  <a:schemeClr val="tx1"/>
-                </a:solidFill>
-                <a:effectLst/>
-                <a:latin typeface="+mn-lt"/>
-                <a:ea typeface="+mn-ea"/>
-                <a:cs typeface="+mn-cs"/>
-              </a:rPr>
-              <a:t>P_W^h</a:t>
-            </a:r>
             <a:endParaRPr lang="en-US" sz="1200" kern="1200" dirty="0">
               <a:solidFill>
                 <a:schemeClr val="tx1"/>
@@ -2309,80 +1203,6 @@
           <a:bodyPr/>
           <a:lstStyle/>
           <a:p>
-            <a:pPr marL="171450" indent="-171450">
-              <a:buFont typeface="Arial" charset="0"/>
-              <a:buChar char="•"/>
-            </a:pPr>
-            <a:r>
-              <a:rPr lang="en-US" dirty="0"/>
-              <a:t>Recall that our camera is modeled using internal, or intrinsic, parameters (K) and external, or extrinsic, parameters ([R T]). Their product gives us the full 3x4 projection matrix, shown before. It has 11 degrees of freedom</a:t>
-            </a:r>
-          </a:p>
-          <a:p>
-            <a:pPr marL="171450" indent="-171450">
-              <a:buFont typeface="Arial" charset="0"/>
-              <a:buChar char="•"/>
-            </a:pPr>
-            <a:r>
-              <a:rPr lang="en-US" dirty="0"/>
-              <a:t>Problem: given one or more images taken by a camera, estimate its intrinsic and extrinsic parameters. </a:t>
-            </a:r>
-          </a:p>
-          <a:p>
-            <a:pPr marL="171450" indent="-171450">
-              <a:buFont typeface="Arial" charset="0"/>
-              <a:buChar char="•"/>
-            </a:pPr>
-            <a:r>
-              <a:rPr lang="en-US" dirty="0"/>
-              <a:t>We can describe this problem more precisely using a calibration rig, such as the one shown above. </a:t>
-            </a:r>
-          </a:p>
-          <a:p>
-            <a:pPr marL="171450" indent="-171450">
-              <a:buFont typeface="Arial" charset="0"/>
-              <a:buChar char="•"/>
-            </a:pPr>
-            <a:r>
-              <a:rPr lang="en-US" dirty="0"/>
-              <a:t>The rig usually consists of a pattern (usually a checkerboard) with known dimensions. The rig also defines our world reference coordinate frame ([</a:t>
-            </a:r>
-            <a:r>
-              <a:rPr lang="en-US" dirty="0" err="1"/>
-              <a:t>Ow,iw,jw,kw</a:t>
-            </a:r>
-            <a:r>
-              <a:rPr lang="en-US" dirty="0"/>
-              <a:t>] as shown in the figure. </a:t>
-            </a:r>
-          </a:p>
-          <a:p>
-            <a:pPr marL="171450" indent="-171450">
-              <a:buFont typeface="Arial" charset="0"/>
-              <a:buChar char="•"/>
-            </a:pPr>
-            <a:r>
-              <a:rPr lang="en-US" dirty="0"/>
-              <a:t>Now, suppose we are given n points on the calibration rig, P1 … </a:t>
-            </a:r>
-            <a:r>
-              <a:rPr lang="en-US" dirty="0" err="1"/>
-              <a:t>Pn</a:t>
-            </a:r>
-            <a:r>
-              <a:rPr lang="en-US" dirty="0"/>
-              <a:t> , along with their corresponding coordinates, p1 , … </a:t>
-            </a:r>
-            <a:r>
-              <a:rPr lang="en-US" dirty="0" err="1"/>
-              <a:t>pn</a:t>
-            </a:r>
-            <a:r>
-              <a:rPr lang="en-US" dirty="0"/>
-              <a:t> in the image. Using these correspondences, our goal is to estimate both intrinsic and extrinsic parameters.</a:t>
-            </a:r>
-          </a:p>
-          <a:p>
             <a:endParaRPr lang="en-US" dirty="0"/>
           </a:p>
         </p:txBody>
@@ -2452,1879 +1272,37 @@
         </p:nvSpPr>
         <p:spPr/>
       </p:sp>
-      <mc:AlternateContent xmlns:mc="http://schemas.openxmlformats.org/markup-compatibility/2006" xmlns:a14="http://schemas.microsoft.com/office/drawing/2010/main">
-        <mc:Choice Requires="a14">
-          <p:sp>
-            <p:nvSpPr>
-              <p:cNvPr id="3" name="Notes Placeholder 2"/>
-              <p:cNvSpPr>
-                <a:spLocks noGrp="1"/>
-              </p:cNvSpPr>
-              <p:nvPr>
-                <p:ph type="body" idx="1"/>
-              </p:nvPr>
-            </p:nvSpPr>
-            <p:spPr/>
-            <p:txBody>
-              <a:bodyPr/>
-              <a:lstStyle/>
-              <a:p>
-                <a:pPr marL="171450" indent="-171450">
-                  <a:buFont typeface="Arial" charset="0"/>
-                  <a:buChar char="•"/>
-                </a:pPr>
-                <a:r>
-                  <a:rPr lang="en-US" dirty="0"/>
-                  <a:t>In the next slides, we will set up a linear system of equations from n of such correspondences and propose a procedure for solving it against the unknowns (intrinsic and extrinsic parameters). </a:t>
-                </a:r>
-              </a:p>
-              <a:p>
-                <a:pPr marL="171450" indent="-171450">
-                  <a:buFont typeface="Arial" charset="0"/>
-                  <a:buChar char="•"/>
-                </a:pPr>
-                <a:r>
-                  <a:rPr lang="en-US" dirty="0"/>
-                  <a:t>Let’s consider the </a:t>
-                </a:r>
-                <a:r>
-                  <a:rPr lang="en-US" dirty="0" err="1"/>
-                  <a:t>ith</a:t>
-                </a:r>
-                <a:r>
-                  <a:rPr lang="en-US" dirty="0"/>
-                  <a:t> correspondence pair defined by a point Pi in the calibration rig (in the world reference system) and its observation pi in the image [</a:t>
-                </a:r>
-                <a:r>
-                  <a:rPr lang="is-IS" dirty="0"/>
-                  <a:t>…</a:t>
-                </a:r>
-                <a:r>
-                  <a:rPr lang="en-US" dirty="0"/>
-                  <a:t>.]</a:t>
-                </a:r>
-              </a:p>
-              <a:p>
-                <a:pPr marL="171450" indent="-171450">
-                  <a:buFont typeface="Arial" charset="0"/>
-                  <a:buChar char="•"/>
-                </a:pPr>
-                <a:r>
-                  <a:rPr lang="en-US" dirty="0"/>
-                  <a:t>This gives rise to </a:t>
-                </a:r>
-                <a14:m>
-                  <m:oMath xmlns:m="http://schemas.openxmlformats.org/officeDocument/2006/math">
-                    <m:r>
-                      <a:rPr lang="en-US" b="0" i="1" smtClean="0">
-                        <a:latin typeface="Cambria Math" charset="0"/>
-                      </a:rPr>
-                      <m:t>2</m:t>
-                    </m:r>
-                    <m:r>
-                      <a:rPr lang="en-US" b="0" i="1" smtClean="0">
-                        <a:latin typeface="Cambria Math" charset="0"/>
-                      </a:rPr>
-                      <m:t>𝑛</m:t>
-                    </m:r>
-                  </m:oMath>
-                </a14:m>
-                <a:r>
-                  <a:rPr lang="en-US" dirty="0"/>
-                  <a:t> component-wise equations</a:t>
-                </a:r>
-                <a:endParaRPr lang="en-US" sz="1200" kern="1200" dirty="0">
-                  <a:solidFill>
-                    <a:schemeClr val="tx1"/>
-                  </a:solidFill>
-                  <a:effectLst/>
-                  <a:latin typeface="+mn-lt"/>
-                  <a:ea typeface="+mn-ea"/>
-                  <a:cs typeface="+mn-cs"/>
-                </a:endParaRPr>
-              </a:p>
-              <a:p>
-                <a:endParaRPr lang="en-US" sz="1200" kern="1200" dirty="0">
-                  <a:solidFill>
-                    <a:schemeClr val="tx1"/>
-                  </a:solidFill>
-                  <a:effectLst/>
-                  <a:latin typeface="+mn-lt"/>
-                  <a:ea typeface="+mn-ea"/>
-                  <a:cs typeface="+mn-cs"/>
-                </a:endParaRPr>
-              </a:p>
-              <a:p>
-                <a:r>
-                  <a:rPr lang="en-US" sz="1200" kern="1200" dirty="0" err="1">
-                    <a:solidFill>
-                      <a:schemeClr val="tx1"/>
-                    </a:solidFill>
-                    <a:effectLst/>
-                    <a:latin typeface="+mn-lt"/>
-                    <a:ea typeface="+mn-ea"/>
-                    <a:cs typeface="+mn-cs"/>
-                  </a:rPr>
-                  <a:t>u_i</a:t>
-                </a:r>
-                <a:r>
-                  <a:rPr lang="en-US" sz="1200" kern="1200" dirty="0">
-                    <a:solidFill>
-                      <a:schemeClr val="tx1"/>
-                    </a:solidFill>
-                    <a:effectLst/>
-                    <a:latin typeface="+mn-lt"/>
-                    <a:ea typeface="+mn-ea"/>
-                    <a:cs typeface="+mn-cs"/>
-                  </a:rPr>
-                  <a:t>\, (m_3\</a:t>
-                </a:r>
-                <a:r>
-                  <a:rPr lang="en-US" sz="1200" kern="1200" dirty="0" err="1">
-                    <a:solidFill>
-                      <a:schemeClr val="tx1"/>
-                    </a:solidFill>
-                    <a:effectLst/>
-                    <a:latin typeface="+mn-lt"/>
-                    <a:ea typeface="+mn-ea"/>
-                    <a:cs typeface="+mn-cs"/>
-                  </a:rPr>
-                  <a:t>cdot</a:t>
-                </a:r>
-                <a:r>
-                  <a:rPr lang="en-US" sz="1200" kern="1200" dirty="0">
-                    <a:solidFill>
-                      <a:schemeClr val="tx1"/>
-                    </a:solidFill>
-                    <a:effectLst/>
-                    <a:latin typeface="+mn-lt"/>
-                    <a:ea typeface="+mn-ea"/>
-                    <a:cs typeface="+mn-cs"/>
-                  </a:rPr>
-                  <a:t> P_{</a:t>
-                </a:r>
-                <a:r>
-                  <a:rPr lang="en-US" sz="1200" kern="1200" dirty="0" err="1">
-                    <a:solidFill>
-                      <a:schemeClr val="tx1"/>
-                    </a:solidFill>
-                    <a:effectLst/>
-                    <a:latin typeface="+mn-lt"/>
-                    <a:ea typeface="+mn-ea"/>
-                    <a:cs typeface="+mn-cs"/>
-                  </a:rPr>
-                  <a:t>W,i</a:t>
-                </a:r>
-                <a:r>
-                  <a:rPr lang="en-US" sz="1200" kern="1200" dirty="0">
-                    <a:solidFill>
-                      <a:schemeClr val="tx1"/>
-                    </a:solidFill>
-                    <a:effectLst/>
-                    <a:latin typeface="+mn-lt"/>
-                    <a:ea typeface="+mn-ea"/>
-                    <a:cs typeface="+mn-cs"/>
-                  </a:rPr>
-                  <a:t>}^h) - m_1\</a:t>
-                </a:r>
-                <a:r>
-                  <a:rPr lang="en-US" sz="1200" kern="1200" dirty="0" err="1">
-                    <a:solidFill>
-                      <a:schemeClr val="tx1"/>
-                    </a:solidFill>
-                    <a:effectLst/>
-                    <a:latin typeface="+mn-lt"/>
-                    <a:ea typeface="+mn-ea"/>
-                    <a:cs typeface="+mn-cs"/>
-                  </a:rPr>
-                  <a:t>cdot</a:t>
-                </a:r>
-                <a:r>
-                  <a:rPr lang="en-US" sz="1200" kern="1200" dirty="0">
-                    <a:solidFill>
-                      <a:schemeClr val="tx1"/>
-                    </a:solidFill>
-                    <a:effectLst/>
-                    <a:latin typeface="+mn-lt"/>
-                    <a:ea typeface="+mn-ea"/>
-                    <a:cs typeface="+mn-cs"/>
-                  </a:rPr>
-                  <a:t>{P_{</a:t>
-                </a:r>
-                <a:r>
-                  <a:rPr lang="en-US" sz="1200" kern="1200" dirty="0" err="1">
-                    <a:solidFill>
-                      <a:schemeClr val="tx1"/>
-                    </a:solidFill>
-                    <a:effectLst/>
-                    <a:latin typeface="+mn-lt"/>
-                    <a:ea typeface="+mn-ea"/>
-                    <a:cs typeface="+mn-cs"/>
-                  </a:rPr>
-                  <a:t>W,i</a:t>
-                </a:r>
-                <a:r>
-                  <a:rPr lang="en-US" sz="1200" kern="1200" dirty="0">
-                    <a:solidFill>
-                      <a:schemeClr val="tx1"/>
-                    </a:solidFill>
-                    <a:effectLst/>
-                    <a:latin typeface="+mn-lt"/>
-                    <a:ea typeface="+mn-ea"/>
-                    <a:cs typeface="+mn-cs"/>
-                  </a:rPr>
-                  <a:t>}^h}=0\\</a:t>
-                </a:r>
-              </a:p>
-              <a:p>
-                <a:r>
-                  <a:rPr lang="en-US" sz="1200" kern="1200" dirty="0" err="1">
-                    <a:solidFill>
-                      <a:schemeClr val="tx1"/>
-                    </a:solidFill>
-                    <a:effectLst/>
-                    <a:latin typeface="+mn-lt"/>
-                    <a:ea typeface="+mn-ea"/>
-                    <a:cs typeface="+mn-cs"/>
-                  </a:rPr>
-                  <a:t>v_i</a:t>
-                </a:r>
-                <a:r>
-                  <a:rPr lang="en-US" sz="1200" kern="1200" dirty="0">
-                    <a:solidFill>
-                      <a:schemeClr val="tx1"/>
-                    </a:solidFill>
-                    <a:effectLst/>
-                    <a:latin typeface="+mn-lt"/>
-                    <a:ea typeface="+mn-ea"/>
-                    <a:cs typeface="+mn-cs"/>
-                  </a:rPr>
-                  <a:t>\, (m_3\</a:t>
-                </a:r>
-                <a:r>
-                  <a:rPr lang="en-US" sz="1200" kern="1200" dirty="0" err="1">
-                    <a:solidFill>
-                      <a:schemeClr val="tx1"/>
-                    </a:solidFill>
-                    <a:effectLst/>
-                    <a:latin typeface="+mn-lt"/>
-                    <a:ea typeface="+mn-ea"/>
-                    <a:cs typeface="+mn-cs"/>
-                  </a:rPr>
-                  <a:t>cdot</a:t>
-                </a:r>
-                <a:r>
-                  <a:rPr lang="en-US" sz="1200" kern="1200" dirty="0">
-                    <a:solidFill>
-                      <a:schemeClr val="tx1"/>
-                    </a:solidFill>
-                    <a:effectLst/>
-                    <a:latin typeface="+mn-lt"/>
-                    <a:ea typeface="+mn-ea"/>
-                    <a:cs typeface="+mn-cs"/>
-                  </a:rPr>
-                  <a:t> P_{</a:t>
-                </a:r>
-                <a:r>
-                  <a:rPr lang="en-US" sz="1200" kern="1200" dirty="0" err="1">
-                    <a:solidFill>
-                      <a:schemeClr val="tx1"/>
-                    </a:solidFill>
-                    <a:effectLst/>
-                    <a:latin typeface="+mn-lt"/>
-                    <a:ea typeface="+mn-ea"/>
-                    <a:cs typeface="+mn-cs"/>
-                  </a:rPr>
-                  <a:t>W,i</a:t>
-                </a:r>
-                <a:r>
-                  <a:rPr lang="en-US" sz="1200" kern="1200" dirty="0">
-                    <a:solidFill>
-                      <a:schemeClr val="tx1"/>
-                    </a:solidFill>
-                    <a:effectLst/>
-                    <a:latin typeface="+mn-lt"/>
-                    <a:ea typeface="+mn-ea"/>
-                    <a:cs typeface="+mn-cs"/>
-                  </a:rPr>
-                  <a:t>}^h) - m_2\</a:t>
-                </a:r>
-                <a:r>
-                  <a:rPr lang="en-US" sz="1200" kern="1200" dirty="0" err="1">
-                    <a:solidFill>
-                      <a:schemeClr val="tx1"/>
-                    </a:solidFill>
-                    <a:effectLst/>
-                    <a:latin typeface="+mn-lt"/>
-                    <a:ea typeface="+mn-ea"/>
-                    <a:cs typeface="+mn-cs"/>
-                  </a:rPr>
-                  <a:t>cdot</a:t>
-                </a:r>
-                <a:r>
-                  <a:rPr lang="en-US" sz="1200" kern="1200" dirty="0">
-                    <a:solidFill>
-                      <a:schemeClr val="tx1"/>
-                    </a:solidFill>
-                    <a:effectLst/>
-                    <a:latin typeface="+mn-lt"/>
-                    <a:ea typeface="+mn-ea"/>
-                    <a:cs typeface="+mn-cs"/>
-                  </a:rPr>
-                  <a:t>{P_{</a:t>
-                </a:r>
-                <a:r>
-                  <a:rPr lang="en-US" sz="1200" kern="1200" dirty="0" err="1">
-                    <a:solidFill>
-                      <a:schemeClr val="tx1"/>
-                    </a:solidFill>
-                    <a:effectLst/>
-                    <a:latin typeface="+mn-lt"/>
-                    <a:ea typeface="+mn-ea"/>
-                    <a:cs typeface="+mn-cs"/>
-                  </a:rPr>
-                  <a:t>W,i</a:t>
-                </a:r>
-                <a:r>
-                  <a:rPr lang="en-US" sz="1200" kern="1200" dirty="0">
-                    <a:solidFill>
-                      <a:schemeClr val="tx1"/>
-                    </a:solidFill>
-                    <a:effectLst/>
-                    <a:latin typeface="+mn-lt"/>
-                    <a:ea typeface="+mn-ea"/>
-                    <a:cs typeface="+mn-cs"/>
-                  </a:rPr>
-                  <a:t>}^h}=0</a:t>
-                </a:r>
-              </a:p>
-              <a:p>
-                <a:endParaRPr lang="en-US" sz="1200" kern="1200" dirty="0">
-                  <a:solidFill>
-                    <a:schemeClr val="tx1"/>
-                  </a:solidFill>
-                  <a:effectLst/>
-                  <a:latin typeface="+mn-lt"/>
-                  <a:ea typeface="+mn-ea"/>
-                  <a:cs typeface="+mn-cs"/>
-                </a:endParaRPr>
-              </a:p>
-              <a:p>
-                <a:endParaRPr lang="en-US" sz="1200" kern="1200" dirty="0">
-                  <a:solidFill>
-                    <a:schemeClr val="tx1"/>
-                  </a:solidFill>
-                  <a:effectLst/>
-                  <a:latin typeface="+mn-lt"/>
-                  <a:ea typeface="+mn-ea"/>
-                  <a:cs typeface="+mn-cs"/>
-                </a:endParaRPr>
-              </a:p>
-              <a:p>
-                <a:r>
-                  <a:rPr lang="en-US" sz="1200" kern="1200" dirty="0" err="1">
-                    <a:solidFill>
-                      <a:schemeClr val="tx1"/>
-                    </a:solidFill>
-                    <a:effectLst/>
-                    <a:latin typeface="+mn-lt"/>
-                    <a:ea typeface="+mn-ea"/>
-                    <a:cs typeface="+mn-cs"/>
-                  </a:rPr>
-                  <a:t>u_i</a:t>
-                </a:r>
-                <a:r>
-                  <a:rPr lang="en-US" sz="1200" kern="1200" dirty="0">
-                    <a:solidFill>
-                      <a:schemeClr val="tx1"/>
-                    </a:solidFill>
-                    <a:effectLst/>
-                    <a:latin typeface="+mn-lt"/>
-                    <a:ea typeface="+mn-ea"/>
-                    <a:cs typeface="+mn-cs"/>
-                  </a:rPr>
-                  <a:t> &amp;= \</a:t>
-                </a:r>
-                <a:r>
-                  <a:rPr lang="en-US" sz="1200" kern="1200" dirty="0" err="1">
-                    <a:solidFill>
-                      <a:schemeClr val="tx1"/>
-                    </a:solidFill>
-                    <a:effectLst/>
-                    <a:latin typeface="+mn-lt"/>
-                    <a:ea typeface="+mn-ea"/>
-                    <a:cs typeface="+mn-cs"/>
-                  </a:rPr>
-                  <a:t>frac</a:t>
-                </a:r>
-                <a:r>
-                  <a:rPr lang="en-US" sz="1200" kern="1200" dirty="0">
-                    <a:solidFill>
-                      <a:schemeClr val="tx1"/>
-                    </a:solidFill>
-                    <a:effectLst/>
-                    <a:latin typeface="+mn-lt"/>
-                    <a:ea typeface="+mn-ea"/>
-                    <a:cs typeface="+mn-cs"/>
-                  </a:rPr>
-                  <a:t>{m_1\</a:t>
-                </a:r>
-                <a:r>
-                  <a:rPr lang="en-US" sz="1200" kern="1200" dirty="0" err="1">
-                    <a:solidFill>
-                      <a:schemeClr val="tx1"/>
-                    </a:solidFill>
-                    <a:effectLst/>
-                    <a:latin typeface="+mn-lt"/>
-                    <a:ea typeface="+mn-ea"/>
-                    <a:cs typeface="+mn-cs"/>
-                  </a:rPr>
-                  <a:t>cdot</a:t>
-                </a:r>
-                <a:r>
-                  <a:rPr lang="en-US" sz="1200" kern="1200" dirty="0">
-                    <a:solidFill>
-                      <a:schemeClr val="tx1"/>
-                    </a:solidFill>
-                    <a:effectLst/>
-                    <a:latin typeface="+mn-lt"/>
-                    <a:ea typeface="+mn-ea"/>
-                    <a:cs typeface="+mn-cs"/>
-                  </a:rPr>
-                  <a:t>{P_{</a:t>
-                </a:r>
-                <a:r>
-                  <a:rPr lang="en-US" sz="1200" kern="1200" dirty="0" err="1">
-                    <a:solidFill>
-                      <a:schemeClr val="tx1"/>
-                    </a:solidFill>
-                    <a:effectLst/>
-                    <a:latin typeface="+mn-lt"/>
-                    <a:ea typeface="+mn-ea"/>
-                    <a:cs typeface="+mn-cs"/>
-                  </a:rPr>
-                  <a:t>W,i</a:t>
-                </a:r>
-                <a:r>
-                  <a:rPr lang="en-US" sz="1200" kern="1200" dirty="0">
-                    <a:solidFill>
-                      <a:schemeClr val="tx1"/>
-                    </a:solidFill>
-                    <a:effectLst/>
-                    <a:latin typeface="+mn-lt"/>
-                    <a:ea typeface="+mn-ea"/>
-                    <a:cs typeface="+mn-cs"/>
-                  </a:rPr>
-                  <a:t>}^h}}{m_3\</a:t>
-                </a:r>
-                <a:r>
-                  <a:rPr lang="en-US" sz="1200" kern="1200" dirty="0" err="1">
-                    <a:solidFill>
-                      <a:schemeClr val="tx1"/>
-                    </a:solidFill>
-                    <a:effectLst/>
-                    <a:latin typeface="+mn-lt"/>
-                    <a:ea typeface="+mn-ea"/>
-                    <a:cs typeface="+mn-cs"/>
-                  </a:rPr>
-                  <a:t>cdot</a:t>
-                </a:r>
-                <a:r>
-                  <a:rPr lang="en-US" sz="1200" kern="1200" dirty="0">
-                    <a:solidFill>
-                      <a:schemeClr val="tx1"/>
-                    </a:solidFill>
-                    <a:effectLst/>
-                    <a:latin typeface="+mn-lt"/>
-                    <a:ea typeface="+mn-ea"/>
-                    <a:cs typeface="+mn-cs"/>
-                  </a:rPr>
-                  <a:t>{P_{</a:t>
-                </a:r>
-                <a:r>
-                  <a:rPr lang="en-US" sz="1200" kern="1200" dirty="0" err="1">
-                    <a:solidFill>
-                      <a:schemeClr val="tx1"/>
-                    </a:solidFill>
-                    <a:effectLst/>
-                    <a:latin typeface="+mn-lt"/>
-                    <a:ea typeface="+mn-ea"/>
-                    <a:cs typeface="+mn-cs"/>
-                  </a:rPr>
-                  <a:t>W,i</a:t>
-                </a:r>
-                <a:r>
-                  <a:rPr lang="en-US" sz="1200" kern="1200" dirty="0">
-                    <a:solidFill>
-                      <a:schemeClr val="tx1"/>
-                    </a:solidFill>
-                    <a:effectLst/>
-                    <a:latin typeface="+mn-lt"/>
-                    <a:ea typeface="+mn-ea"/>
-                    <a:cs typeface="+mn-cs"/>
-                  </a:rPr>
-                  <a:t>}^h}}\\</a:t>
-                </a:r>
-              </a:p>
-              <a:p>
-                <a:r>
-                  <a:rPr lang="en-US" sz="1200" kern="1200" dirty="0" err="1">
-                    <a:solidFill>
-                      <a:schemeClr val="tx1"/>
-                    </a:solidFill>
-                    <a:effectLst/>
-                    <a:latin typeface="+mn-lt"/>
-                    <a:ea typeface="+mn-ea"/>
-                    <a:cs typeface="+mn-cs"/>
-                  </a:rPr>
-                  <a:t>v_i</a:t>
-                </a:r>
-                <a:r>
-                  <a:rPr lang="en-US" sz="1200" kern="1200" dirty="0">
-                    <a:solidFill>
-                      <a:schemeClr val="tx1"/>
-                    </a:solidFill>
-                    <a:effectLst/>
-                    <a:latin typeface="+mn-lt"/>
-                    <a:ea typeface="+mn-ea"/>
-                    <a:cs typeface="+mn-cs"/>
-                  </a:rPr>
-                  <a:t> &amp;= \</a:t>
-                </a:r>
-                <a:r>
-                  <a:rPr lang="en-US" sz="1200" kern="1200" dirty="0" err="1">
-                    <a:solidFill>
-                      <a:schemeClr val="tx1"/>
-                    </a:solidFill>
-                    <a:effectLst/>
-                    <a:latin typeface="+mn-lt"/>
-                    <a:ea typeface="+mn-ea"/>
-                    <a:cs typeface="+mn-cs"/>
-                  </a:rPr>
-                  <a:t>frac</a:t>
-                </a:r>
-                <a:r>
-                  <a:rPr lang="en-US" sz="1200" kern="1200" dirty="0">
-                    <a:solidFill>
-                      <a:schemeClr val="tx1"/>
-                    </a:solidFill>
-                    <a:effectLst/>
-                    <a:latin typeface="+mn-lt"/>
-                    <a:ea typeface="+mn-ea"/>
-                    <a:cs typeface="+mn-cs"/>
-                  </a:rPr>
-                  <a:t>{m_2\</a:t>
-                </a:r>
-                <a:r>
-                  <a:rPr lang="en-US" sz="1200" kern="1200" dirty="0" err="1">
-                    <a:solidFill>
-                      <a:schemeClr val="tx1"/>
-                    </a:solidFill>
-                    <a:effectLst/>
-                    <a:latin typeface="+mn-lt"/>
-                    <a:ea typeface="+mn-ea"/>
-                    <a:cs typeface="+mn-cs"/>
-                  </a:rPr>
-                  <a:t>cdot</a:t>
-                </a:r>
-                <a:r>
-                  <a:rPr lang="en-US" sz="1200" kern="1200" dirty="0">
-                    <a:solidFill>
-                      <a:schemeClr val="tx1"/>
-                    </a:solidFill>
-                    <a:effectLst/>
-                    <a:latin typeface="+mn-lt"/>
-                    <a:ea typeface="+mn-ea"/>
-                    <a:cs typeface="+mn-cs"/>
-                  </a:rPr>
-                  <a:t>{P_{</a:t>
-                </a:r>
-                <a:r>
-                  <a:rPr lang="en-US" sz="1200" kern="1200" dirty="0" err="1">
-                    <a:solidFill>
-                      <a:schemeClr val="tx1"/>
-                    </a:solidFill>
-                    <a:effectLst/>
-                    <a:latin typeface="+mn-lt"/>
-                    <a:ea typeface="+mn-ea"/>
-                    <a:cs typeface="+mn-cs"/>
-                  </a:rPr>
-                  <a:t>W,i</a:t>
-                </a:r>
-                <a:r>
-                  <a:rPr lang="en-US" sz="1200" kern="1200" dirty="0">
-                    <a:solidFill>
-                      <a:schemeClr val="tx1"/>
-                    </a:solidFill>
-                    <a:effectLst/>
-                    <a:latin typeface="+mn-lt"/>
-                    <a:ea typeface="+mn-ea"/>
-                    <a:cs typeface="+mn-cs"/>
-                  </a:rPr>
-                  <a:t>}^h}}{m_3\</a:t>
-                </a:r>
-                <a:r>
-                  <a:rPr lang="en-US" sz="1200" kern="1200" dirty="0" err="1">
-                    <a:solidFill>
-                      <a:schemeClr val="tx1"/>
-                    </a:solidFill>
-                    <a:effectLst/>
-                    <a:latin typeface="+mn-lt"/>
-                    <a:ea typeface="+mn-ea"/>
-                    <a:cs typeface="+mn-cs"/>
-                  </a:rPr>
-                  <a:t>cdot</a:t>
-                </a:r>
-                <a:r>
-                  <a:rPr lang="en-US" sz="1200" kern="1200" dirty="0">
-                    <a:solidFill>
-                      <a:schemeClr val="tx1"/>
-                    </a:solidFill>
-                    <a:effectLst/>
-                    <a:latin typeface="+mn-lt"/>
-                    <a:ea typeface="+mn-ea"/>
-                    <a:cs typeface="+mn-cs"/>
-                  </a:rPr>
-                  <a:t>{P_{</a:t>
-                </a:r>
-                <a:r>
-                  <a:rPr lang="en-US" sz="1200" kern="1200" dirty="0" err="1">
-                    <a:solidFill>
-                      <a:schemeClr val="tx1"/>
-                    </a:solidFill>
-                    <a:effectLst/>
-                    <a:latin typeface="+mn-lt"/>
-                    <a:ea typeface="+mn-ea"/>
-                    <a:cs typeface="+mn-cs"/>
-                  </a:rPr>
-                  <a:t>W,i</a:t>
-                </a:r>
-                <a:r>
-                  <a:rPr lang="en-US" sz="1200" kern="1200" dirty="0">
-                    <a:solidFill>
-                      <a:schemeClr val="tx1"/>
-                    </a:solidFill>
-                    <a:effectLst/>
-                    <a:latin typeface="+mn-lt"/>
-                    <a:ea typeface="+mn-ea"/>
-                    <a:cs typeface="+mn-cs"/>
-                  </a:rPr>
-                  <a:t>}^h}}</a:t>
-                </a:r>
-              </a:p>
-              <a:p>
-                <a:endParaRPr lang="en-US" sz="1200" kern="1200" dirty="0">
-                  <a:solidFill>
-                    <a:schemeClr val="tx1"/>
-                  </a:solidFill>
-                  <a:effectLst/>
-                  <a:latin typeface="+mn-lt"/>
-                  <a:ea typeface="+mn-ea"/>
-                  <a:cs typeface="+mn-cs"/>
-                </a:endParaRPr>
-              </a:p>
-              <a:p>
-                <a:endParaRPr lang="en-US" sz="1200" kern="1200" dirty="0">
-                  <a:solidFill>
-                    <a:schemeClr val="tx1"/>
-                  </a:solidFill>
-                  <a:effectLst/>
-                  <a:latin typeface="+mn-lt"/>
-                  <a:ea typeface="+mn-ea"/>
-                  <a:cs typeface="+mn-cs"/>
-                </a:endParaRPr>
-              </a:p>
-              <a:p>
-                <a:r>
-                  <a:rPr lang="en-US" sz="1200" kern="1200" dirty="0">
-                    <a:solidFill>
-                      <a:schemeClr val="tx1"/>
-                    </a:solidFill>
-                    <a:effectLst/>
-                    <a:latin typeface="+mn-lt"/>
-                    <a:ea typeface="+mn-ea"/>
-                    <a:cs typeface="+mn-cs"/>
-                  </a:rPr>
-                  <a:t>p^{h}_</a:t>
-                </a:r>
-                <a:r>
-                  <a:rPr lang="en-US" sz="1200" kern="1200" dirty="0" err="1">
-                    <a:solidFill>
-                      <a:schemeClr val="tx1"/>
-                    </a:solidFill>
-                    <a:effectLst/>
-                    <a:latin typeface="+mn-lt"/>
-                    <a:ea typeface="+mn-ea"/>
-                    <a:cs typeface="+mn-cs"/>
-                  </a:rPr>
-                  <a:t>i</a:t>
-                </a:r>
-                <a:r>
-                  <a:rPr lang="en-US" sz="1200" kern="1200" dirty="0">
-                    <a:solidFill>
-                      <a:schemeClr val="tx1"/>
-                    </a:solidFill>
-                    <a:effectLst/>
-                    <a:latin typeface="+mn-lt"/>
-                    <a:ea typeface="+mn-ea"/>
-                    <a:cs typeface="+mn-cs"/>
-                  </a:rPr>
-                  <a:t> = M \, P_{</a:t>
-                </a:r>
-                <a:r>
-                  <a:rPr lang="en-US" sz="1200" kern="1200" dirty="0" err="1">
-                    <a:solidFill>
-                      <a:schemeClr val="tx1"/>
-                    </a:solidFill>
-                    <a:effectLst/>
-                    <a:latin typeface="+mn-lt"/>
-                    <a:ea typeface="+mn-ea"/>
-                    <a:cs typeface="+mn-cs"/>
-                  </a:rPr>
-                  <a:t>W,i</a:t>
-                </a:r>
-                <a:r>
-                  <a:rPr lang="en-US" sz="1200" kern="1200" dirty="0">
-                    <a:solidFill>
-                      <a:schemeClr val="tx1"/>
-                    </a:solidFill>
-                    <a:effectLst/>
-                    <a:latin typeface="+mn-lt"/>
-                    <a:ea typeface="+mn-ea"/>
-                    <a:cs typeface="+mn-cs"/>
-                  </a:rPr>
-                  <a:t>}^h, \, \, </a:t>
-                </a:r>
-                <a:r>
-                  <a:rPr lang="en-US" sz="1200" kern="1200" dirty="0" err="1">
-                    <a:solidFill>
-                      <a:schemeClr val="tx1"/>
-                    </a:solidFill>
-                    <a:effectLst/>
-                    <a:latin typeface="+mn-lt"/>
-                    <a:ea typeface="+mn-ea"/>
-                    <a:cs typeface="+mn-cs"/>
-                  </a:rPr>
-                  <a:t>i</a:t>
-                </a:r>
-                <a:r>
-                  <a:rPr lang="en-US" sz="1200" kern="1200" dirty="0">
-                    <a:solidFill>
-                      <a:schemeClr val="tx1"/>
-                    </a:solidFill>
-                    <a:effectLst/>
-                    <a:latin typeface="+mn-lt"/>
-                    <a:ea typeface="+mn-ea"/>
-                    <a:cs typeface="+mn-cs"/>
-                  </a:rPr>
-                  <a:t>=1,\</a:t>
-                </a:r>
-                <a:r>
-                  <a:rPr lang="en-US" sz="1200" kern="1200" dirty="0" err="1">
-                    <a:solidFill>
-                      <a:schemeClr val="tx1"/>
-                    </a:solidFill>
-                    <a:effectLst/>
-                    <a:latin typeface="+mn-lt"/>
-                    <a:ea typeface="+mn-ea"/>
-                    <a:cs typeface="+mn-cs"/>
-                  </a:rPr>
-                  <a:t>ldots</a:t>
-                </a:r>
-                <a:r>
-                  <a:rPr lang="en-US" sz="1200" kern="1200" dirty="0">
-                    <a:solidFill>
-                      <a:schemeClr val="tx1"/>
-                    </a:solidFill>
-                    <a:effectLst/>
-                    <a:latin typeface="+mn-lt"/>
-                    <a:ea typeface="+mn-ea"/>
-                    <a:cs typeface="+mn-cs"/>
-                  </a:rPr>
-                  <a:t>, n, \</a:t>
-                </a:r>
-                <a:r>
-                  <a:rPr lang="en-US" sz="1200" kern="1200" dirty="0" err="1">
-                    <a:solidFill>
-                      <a:schemeClr val="tx1"/>
-                    </a:solidFill>
-                    <a:effectLst/>
-                    <a:latin typeface="+mn-lt"/>
-                    <a:ea typeface="+mn-ea"/>
-                    <a:cs typeface="+mn-cs"/>
-                  </a:rPr>
-                  <a:t>qquad</a:t>
-                </a:r>
-                <a:r>
-                  <a:rPr lang="en-US" sz="1200" kern="1200" dirty="0">
-                    <a:solidFill>
-                      <a:schemeClr val="tx1"/>
-                    </a:solidFill>
-                    <a:effectLst/>
-                    <a:latin typeface="+mn-lt"/>
-                    <a:ea typeface="+mn-ea"/>
-                    <a:cs typeface="+mn-cs"/>
-                  </a:rPr>
-                  <a:t> \text{where} \quad M = K[R \quad t] = \begin{</a:t>
-                </a:r>
-                <a:r>
-                  <a:rPr lang="en-US" sz="1200" kern="1200" dirty="0" err="1">
-                    <a:solidFill>
-                      <a:schemeClr val="tx1"/>
-                    </a:solidFill>
-                    <a:effectLst/>
-                    <a:latin typeface="+mn-lt"/>
-                    <a:ea typeface="+mn-ea"/>
-                    <a:cs typeface="+mn-cs"/>
-                  </a:rPr>
-                  <a:t>bmatrix</a:t>
-                </a:r>
-                <a:r>
-                  <a:rPr lang="en-US" sz="1200" kern="1200" dirty="0">
-                    <a:solidFill>
-                      <a:schemeClr val="tx1"/>
-                    </a:solidFill>
-                    <a:effectLst/>
-                    <a:latin typeface="+mn-lt"/>
-                    <a:ea typeface="+mn-ea"/>
-                    <a:cs typeface="+mn-cs"/>
-                  </a:rPr>
-                  <a:t>}</a:t>
-                </a:r>
-              </a:p>
-              <a:p>
-                <a:r>
-                  <a:rPr lang="en-US" sz="1200" kern="1200" dirty="0">
-                    <a:solidFill>
-                      <a:schemeClr val="tx1"/>
-                    </a:solidFill>
-                    <a:effectLst/>
-                    <a:latin typeface="+mn-lt"/>
-                    <a:ea typeface="+mn-ea"/>
-                    <a:cs typeface="+mn-cs"/>
-                  </a:rPr>
-                  <a:t>m_1\\</a:t>
-                </a:r>
-              </a:p>
-              <a:p>
-                <a:r>
-                  <a:rPr lang="en-US" sz="1200" kern="1200" dirty="0">
-                    <a:solidFill>
-                      <a:schemeClr val="tx1"/>
-                    </a:solidFill>
-                    <a:effectLst/>
-                    <a:latin typeface="+mn-lt"/>
-                    <a:ea typeface="+mn-ea"/>
-                    <a:cs typeface="+mn-cs"/>
-                  </a:rPr>
-                  <a:t>m_2\\</a:t>
-                </a:r>
-              </a:p>
-              <a:p>
-                <a:r>
-                  <a:rPr lang="en-US" sz="1200" kern="1200" dirty="0">
-                    <a:solidFill>
-                      <a:schemeClr val="tx1"/>
-                    </a:solidFill>
-                    <a:effectLst/>
-                    <a:latin typeface="+mn-lt"/>
-                    <a:ea typeface="+mn-ea"/>
-                    <a:cs typeface="+mn-cs"/>
-                  </a:rPr>
-                  <a:t>m_3\end{</a:t>
-                </a:r>
-                <a:r>
-                  <a:rPr lang="en-US" sz="1200" kern="1200" dirty="0" err="1">
-                    <a:solidFill>
-                      <a:schemeClr val="tx1"/>
-                    </a:solidFill>
-                    <a:effectLst/>
-                    <a:latin typeface="+mn-lt"/>
-                    <a:ea typeface="+mn-ea"/>
-                    <a:cs typeface="+mn-cs"/>
-                  </a:rPr>
-                  <a:t>bmatrix</a:t>
-                </a:r>
-                <a:r>
-                  <a:rPr lang="en-US" sz="1200" kern="1200" dirty="0">
-                    <a:solidFill>
-                      <a:schemeClr val="tx1"/>
-                    </a:solidFill>
-                    <a:effectLst/>
-                    <a:latin typeface="+mn-lt"/>
-                    <a:ea typeface="+mn-ea"/>
-                    <a:cs typeface="+mn-cs"/>
-                  </a:rPr>
-                  <a:t>}</a:t>
-                </a:r>
-              </a:p>
-              <a:p>
-                <a:br>
-                  <a:rPr lang="en-US" sz="1200" kern="1200" dirty="0">
-                    <a:solidFill>
-                      <a:schemeClr val="tx1"/>
-                    </a:solidFill>
-                    <a:effectLst/>
-                    <a:latin typeface="+mn-lt"/>
-                    <a:ea typeface="+mn-ea"/>
-                    <a:cs typeface="+mn-cs"/>
-                  </a:rPr>
-                </a:br>
-                <a:endParaRPr lang="en-US" sz="1200" kern="1200" dirty="0">
-                  <a:solidFill>
-                    <a:schemeClr val="tx1"/>
-                  </a:solidFill>
-                  <a:effectLst/>
-                  <a:latin typeface="+mn-lt"/>
-                  <a:ea typeface="+mn-ea"/>
-                  <a:cs typeface="+mn-cs"/>
-                </a:endParaRPr>
-              </a:p>
-            </p:txBody>
-          </p:sp>
-        </mc:Choice>
-        <mc:Fallback xmlns="">
-          <p:sp>
-            <p:nvSpPr>
-              <p:cNvPr id="3" name="Notes Placeholder 2"/>
-              <p:cNvSpPr>
-                <a:spLocks noGrp="1"/>
-              </p:cNvSpPr>
-              <p:nvPr>
-                <p:ph type="body" idx="1"/>
-              </p:nvPr>
-            </p:nvSpPr>
-            <p:spPr/>
-            <p:txBody>
-              <a:bodyPr/>
-              <a:lstStyle/>
-              <a:p>
-                <a:pPr marL="171450" indent="-171450">
-                  <a:buFont typeface="Arial" charset="0"/>
-                  <a:buChar char="•"/>
-                </a:pPr>
-                <a:r>
-                  <a:rPr lang="en-US" dirty="0" smtClean="0"/>
-                  <a:t>In the next slides, we will set up a linear system of </a:t>
-                </a:r>
-                <a:r>
-                  <a:rPr lang="en-US" dirty="0" smtClean="0"/>
-                  <a:t>equations </a:t>
-                </a:r>
-                <a:r>
-                  <a:rPr lang="en-US" dirty="0" smtClean="0"/>
-                  <a:t>from n of such correspondences and propose a procedure for solving it against the unknowns (intrinsic and extrinsic parameters). </a:t>
-                </a:r>
-                <a:endParaRPr lang="en-US" dirty="0" smtClean="0"/>
-              </a:p>
-              <a:p>
-                <a:pPr marL="171450" indent="-171450">
-                  <a:buFont typeface="Arial" charset="0"/>
-                  <a:buChar char="•"/>
-                </a:pPr>
-                <a:r>
-                  <a:rPr lang="en-US" dirty="0" smtClean="0"/>
-                  <a:t>Let’s consider the </a:t>
-                </a:r>
-                <a:r>
-                  <a:rPr lang="en-US" dirty="0" err="1" smtClean="0"/>
-                  <a:t>ith</a:t>
-                </a:r>
-                <a:r>
-                  <a:rPr lang="en-US" dirty="0" smtClean="0"/>
-                  <a:t> correspondence pair defined by a point Pi in the calibration rig (in the world reference system) and its observation pi in the image [</a:t>
-                </a:r>
-                <a:r>
-                  <a:rPr lang="is-IS" dirty="0" smtClean="0"/>
-                  <a:t>…</a:t>
-                </a:r>
-                <a:r>
-                  <a:rPr lang="en-US" dirty="0" smtClean="0"/>
-                  <a:t>.]</a:t>
-                </a:r>
-              </a:p>
-              <a:p>
-                <a:pPr marL="171450" indent="-171450">
-                  <a:buFont typeface="Arial" charset="0"/>
-                  <a:buChar char="•"/>
-                </a:pPr>
-                <a:r>
-                  <a:rPr lang="en-US" dirty="0" smtClean="0"/>
-                  <a:t>This gives rise to </a:t>
-                </a:r>
-                <a:r>
-                  <a:rPr lang="en-US" b="0" i="0" smtClean="0">
-                    <a:latin typeface="Cambria Math" charset="0"/>
-                  </a:rPr>
-                  <a:t>2𝑛</a:t>
-                </a:r>
-                <a:r>
-                  <a:rPr lang="en-US" dirty="0" smtClean="0"/>
-                  <a:t> component-wise equations</a:t>
-                </a:r>
-                <a:endParaRPr lang="en-US" sz="1200" kern="1200" dirty="0" smtClean="0">
-                  <a:solidFill>
-                    <a:schemeClr val="tx1"/>
-                  </a:solidFill>
-                  <a:effectLst/>
-                  <a:latin typeface="+mn-lt"/>
-                  <a:ea typeface="+mn-ea"/>
-                  <a:cs typeface="+mn-cs"/>
-                </a:endParaRPr>
-              </a:p>
-              <a:p>
-                <a:endParaRPr lang="en-US" sz="1200" kern="1200" dirty="0" smtClean="0">
-                  <a:solidFill>
-                    <a:schemeClr val="tx1"/>
-                  </a:solidFill>
-                  <a:effectLst/>
-                  <a:latin typeface="+mn-lt"/>
-                  <a:ea typeface="+mn-ea"/>
-                  <a:cs typeface="+mn-cs"/>
-                </a:endParaRPr>
-              </a:p>
-              <a:p>
-                <a:r>
-                  <a:rPr lang="en-US" sz="1200" kern="1200" dirty="0" err="1" smtClean="0">
-                    <a:solidFill>
-                      <a:schemeClr val="tx1"/>
-                    </a:solidFill>
-                    <a:effectLst/>
-                    <a:latin typeface="+mn-lt"/>
-                    <a:ea typeface="+mn-ea"/>
-                    <a:cs typeface="+mn-cs"/>
-                  </a:rPr>
-                  <a:t>u_i</a:t>
-                </a:r>
-                <a:r>
-                  <a:rPr lang="en-US" sz="1200" kern="1200" dirty="0" smtClean="0">
-                    <a:solidFill>
-                      <a:schemeClr val="tx1"/>
-                    </a:solidFill>
-                    <a:effectLst/>
-                    <a:latin typeface="+mn-lt"/>
-                    <a:ea typeface="+mn-ea"/>
-                    <a:cs typeface="+mn-cs"/>
-                  </a:rPr>
-                  <a:t>\, (m_3\</a:t>
-                </a:r>
-                <a:r>
-                  <a:rPr lang="en-US" sz="1200" kern="1200" dirty="0" err="1" smtClean="0">
-                    <a:solidFill>
-                      <a:schemeClr val="tx1"/>
-                    </a:solidFill>
-                    <a:effectLst/>
-                    <a:latin typeface="+mn-lt"/>
-                    <a:ea typeface="+mn-ea"/>
-                    <a:cs typeface="+mn-cs"/>
-                  </a:rPr>
-                  <a:t>cdot</a:t>
-                </a:r>
-                <a:r>
-                  <a:rPr lang="en-US" sz="1200" kern="1200" dirty="0" smtClean="0">
-                    <a:solidFill>
-                      <a:schemeClr val="tx1"/>
-                    </a:solidFill>
-                    <a:effectLst/>
-                    <a:latin typeface="+mn-lt"/>
-                    <a:ea typeface="+mn-ea"/>
-                    <a:cs typeface="+mn-cs"/>
-                  </a:rPr>
-                  <a:t> P_{</a:t>
-                </a:r>
-                <a:r>
-                  <a:rPr lang="en-US" sz="1200" kern="1200" dirty="0" err="1" smtClean="0">
-                    <a:solidFill>
-                      <a:schemeClr val="tx1"/>
-                    </a:solidFill>
-                    <a:effectLst/>
-                    <a:latin typeface="+mn-lt"/>
-                    <a:ea typeface="+mn-ea"/>
-                    <a:cs typeface="+mn-cs"/>
-                  </a:rPr>
-                  <a:t>W,i</a:t>
-                </a:r>
-                <a:r>
-                  <a:rPr lang="en-US" sz="1200" kern="1200" dirty="0" smtClean="0">
-                    <a:solidFill>
-                      <a:schemeClr val="tx1"/>
-                    </a:solidFill>
-                    <a:effectLst/>
-                    <a:latin typeface="+mn-lt"/>
-                    <a:ea typeface="+mn-ea"/>
-                    <a:cs typeface="+mn-cs"/>
-                  </a:rPr>
-                  <a:t>}^h) - m_1\</a:t>
-                </a:r>
-                <a:r>
-                  <a:rPr lang="en-US" sz="1200" kern="1200" dirty="0" err="1" smtClean="0">
-                    <a:solidFill>
-                      <a:schemeClr val="tx1"/>
-                    </a:solidFill>
-                    <a:effectLst/>
-                    <a:latin typeface="+mn-lt"/>
-                    <a:ea typeface="+mn-ea"/>
-                    <a:cs typeface="+mn-cs"/>
-                  </a:rPr>
-                  <a:t>cdot</a:t>
-                </a:r>
-                <a:r>
-                  <a:rPr lang="en-US" sz="1200" kern="1200" dirty="0" smtClean="0">
-                    <a:solidFill>
-                      <a:schemeClr val="tx1"/>
-                    </a:solidFill>
-                    <a:effectLst/>
-                    <a:latin typeface="+mn-lt"/>
-                    <a:ea typeface="+mn-ea"/>
-                    <a:cs typeface="+mn-cs"/>
-                  </a:rPr>
-                  <a:t>{P_{</a:t>
-                </a:r>
-                <a:r>
-                  <a:rPr lang="en-US" sz="1200" kern="1200" dirty="0" err="1" smtClean="0">
-                    <a:solidFill>
-                      <a:schemeClr val="tx1"/>
-                    </a:solidFill>
-                    <a:effectLst/>
-                    <a:latin typeface="+mn-lt"/>
-                    <a:ea typeface="+mn-ea"/>
-                    <a:cs typeface="+mn-cs"/>
-                  </a:rPr>
-                  <a:t>W,i</a:t>
-                </a:r>
-                <a:r>
-                  <a:rPr lang="en-US" sz="1200" kern="1200" dirty="0" smtClean="0">
-                    <a:solidFill>
-                      <a:schemeClr val="tx1"/>
-                    </a:solidFill>
-                    <a:effectLst/>
-                    <a:latin typeface="+mn-lt"/>
-                    <a:ea typeface="+mn-ea"/>
-                    <a:cs typeface="+mn-cs"/>
-                  </a:rPr>
-                  <a:t>}^h}=0\\</a:t>
-                </a:r>
-              </a:p>
-              <a:p>
-                <a:r>
-                  <a:rPr lang="en-US" sz="1200" kern="1200" dirty="0" err="1" smtClean="0">
-                    <a:solidFill>
-                      <a:schemeClr val="tx1"/>
-                    </a:solidFill>
-                    <a:effectLst/>
-                    <a:latin typeface="+mn-lt"/>
-                    <a:ea typeface="+mn-ea"/>
-                    <a:cs typeface="+mn-cs"/>
-                  </a:rPr>
-                  <a:t>v_i</a:t>
-                </a:r>
-                <a:r>
-                  <a:rPr lang="en-US" sz="1200" kern="1200" dirty="0" smtClean="0">
-                    <a:solidFill>
-                      <a:schemeClr val="tx1"/>
-                    </a:solidFill>
-                    <a:effectLst/>
-                    <a:latin typeface="+mn-lt"/>
-                    <a:ea typeface="+mn-ea"/>
-                    <a:cs typeface="+mn-cs"/>
-                  </a:rPr>
-                  <a:t>\, (m_3\</a:t>
-                </a:r>
-                <a:r>
-                  <a:rPr lang="en-US" sz="1200" kern="1200" dirty="0" err="1" smtClean="0">
-                    <a:solidFill>
-                      <a:schemeClr val="tx1"/>
-                    </a:solidFill>
-                    <a:effectLst/>
-                    <a:latin typeface="+mn-lt"/>
-                    <a:ea typeface="+mn-ea"/>
-                    <a:cs typeface="+mn-cs"/>
-                  </a:rPr>
-                  <a:t>cdot</a:t>
-                </a:r>
-                <a:r>
-                  <a:rPr lang="en-US" sz="1200" kern="1200" dirty="0" smtClean="0">
-                    <a:solidFill>
-                      <a:schemeClr val="tx1"/>
-                    </a:solidFill>
-                    <a:effectLst/>
-                    <a:latin typeface="+mn-lt"/>
-                    <a:ea typeface="+mn-ea"/>
-                    <a:cs typeface="+mn-cs"/>
-                  </a:rPr>
-                  <a:t> P_{</a:t>
-                </a:r>
-                <a:r>
-                  <a:rPr lang="en-US" sz="1200" kern="1200" dirty="0" err="1" smtClean="0">
-                    <a:solidFill>
-                      <a:schemeClr val="tx1"/>
-                    </a:solidFill>
-                    <a:effectLst/>
-                    <a:latin typeface="+mn-lt"/>
-                    <a:ea typeface="+mn-ea"/>
-                    <a:cs typeface="+mn-cs"/>
-                  </a:rPr>
-                  <a:t>W,i</a:t>
-                </a:r>
-                <a:r>
-                  <a:rPr lang="en-US" sz="1200" kern="1200" dirty="0" smtClean="0">
-                    <a:solidFill>
-                      <a:schemeClr val="tx1"/>
-                    </a:solidFill>
-                    <a:effectLst/>
-                    <a:latin typeface="+mn-lt"/>
-                    <a:ea typeface="+mn-ea"/>
-                    <a:cs typeface="+mn-cs"/>
-                  </a:rPr>
-                  <a:t>}^h) - m_2\</a:t>
-                </a:r>
-                <a:r>
-                  <a:rPr lang="en-US" sz="1200" kern="1200" dirty="0" err="1" smtClean="0">
-                    <a:solidFill>
-                      <a:schemeClr val="tx1"/>
-                    </a:solidFill>
-                    <a:effectLst/>
-                    <a:latin typeface="+mn-lt"/>
-                    <a:ea typeface="+mn-ea"/>
-                    <a:cs typeface="+mn-cs"/>
-                  </a:rPr>
-                  <a:t>cdot</a:t>
-                </a:r>
-                <a:r>
-                  <a:rPr lang="en-US" sz="1200" kern="1200" dirty="0" smtClean="0">
-                    <a:solidFill>
-                      <a:schemeClr val="tx1"/>
-                    </a:solidFill>
-                    <a:effectLst/>
-                    <a:latin typeface="+mn-lt"/>
-                    <a:ea typeface="+mn-ea"/>
-                    <a:cs typeface="+mn-cs"/>
-                  </a:rPr>
-                  <a:t>{P_{</a:t>
-                </a:r>
-                <a:r>
-                  <a:rPr lang="en-US" sz="1200" kern="1200" dirty="0" err="1" smtClean="0">
-                    <a:solidFill>
-                      <a:schemeClr val="tx1"/>
-                    </a:solidFill>
-                    <a:effectLst/>
-                    <a:latin typeface="+mn-lt"/>
-                    <a:ea typeface="+mn-ea"/>
-                    <a:cs typeface="+mn-cs"/>
-                  </a:rPr>
-                  <a:t>W,i</a:t>
-                </a:r>
-                <a:r>
-                  <a:rPr lang="en-US" sz="1200" kern="1200" dirty="0" smtClean="0">
-                    <a:solidFill>
-                      <a:schemeClr val="tx1"/>
-                    </a:solidFill>
-                    <a:effectLst/>
-                    <a:latin typeface="+mn-lt"/>
-                    <a:ea typeface="+mn-ea"/>
-                    <a:cs typeface="+mn-cs"/>
-                  </a:rPr>
-                  <a:t>}^h}=0</a:t>
-                </a:r>
-              </a:p>
-              <a:p>
-                <a:endParaRPr lang="en-US" sz="1200" kern="1200" dirty="0" smtClean="0">
-                  <a:solidFill>
-                    <a:schemeClr val="tx1"/>
-                  </a:solidFill>
-                  <a:effectLst/>
-                  <a:latin typeface="+mn-lt"/>
-                  <a:ea typeface="+mn-ea"/>
-                  <a:cs typeface="+mn-cs"/>
-                </a:endParaRPr>
-              </a:p>
-              <a:p>
-                <a:endParaRPr lang="en-US" sz="1200" kern="1200" dirty="0" smtClean="0">
-                  <a:solidFill>
-                    <a:schemeClr val="tx1"/>
-                  </a:solidFill>
-                  <a:effectLst/>
-                  <a:latin typeface="+mn-lt"/>
-                  <a:ea typeface="+mn-ea"/>
-                  <a:cs typeface="+mn-cs"/>
-                </a:endParaRPr>
-              </a:p>
-              <a:p>
-                <a:r>
-                  <a:rPr lang="en-US" sz="1200" kern="1200" dirty="0" err="1" smtClean="0">
-                    <a:solidFill>
-                      <a:schemeClr val="tx1"/>
-                    </a:solidFill>
-                    <a:effectLst/>
-                    <a:latin typeface="+mn-lt"/>
-                    <a:ea typeface="+mn-ea"/>
-                    <a:cs typeface="+mn-cs"/>
-                  </a:rPr>
-                  <a:t>u_i</a:t>
-                </a:r>
-                <a:r>
-                  <a:rPr lang="en-US" sz="1200" kern="1200" dirty="0" smtClean="0">
-                    <a:solidFill>
-                      <a:schemeClr val="tx1"/>
-                    </a:solidFill>
-                    <a:effectLst/>
-                    <a:latin typeface="+mn-lt"/>
-                    <a:ea typeface="+mn-ea"/>
-                    <a:cs typeface="+mn-cs"/>
-                  </a:rPr>
-                  <a:t> &amp;= \</a:t>
-                </a:r>
-                <a:r>
-                  <a:rPr lang="en-US" sz="1200" kern="1200" dirty="0" err="1" smtClean="0">
-                    <a:solidFill>
-                      <a:schemeClr val="tx1"/>
-                    </a:solidFill>
-                    <a:effectLst/>
-                    <a:latin typeface="+mn-lt"/>
-                    <a:ea typeface="+mn-ea"/>
-                    <a:cs typeface="+mn-cs"/>
-                  </a:rPr>
-                  <a:t>frac</a:t>
-                </a:r>
-                <a:r>
-                  <a:rPr lang="en-US" sz="1200" kern="1200" dirty="0" smtClean="0">
-                    <a:solidFill>
-                      <a:schemeClr val="tx1"/>
-                    </a:solidFill>
-                    <a:effectLst/>
-                    <a:latin typeface="+mn-lt"/>
-                    <a:ea typeface="+mn-ea"/>
-                    <a:cs typeface="+mn-cs"/>
-                  </a:rPr>
-                  <a:t>{m_1\</a:t>
-                </a:r>
-                <a:r>
-                  <a:rPr lang="en-US" sz="1200" kern="1200" dirty="0" err="1" smtClean="0">
-                    <a:solidFill>
-                      <a:schemeClr val="tx1"/>
-                    </a:solidFill>
-                    <a:effectLst/>
-                    <a:latin typeface="+mn-lt"/>
-                    <a:ea typeface="+mn-ea"/>
-                    <a:cs typeface="+mn-cs"/>
-                  </a:rPr>
-                  <a:t>cdot</a:t>
-                </a:r>
-                <a:r>
-                  <a:rPr lang="en-US" sz="1200" kern="1200" dirty="0" smtClean="0">
-                    <a:solidFill>
-                      <a:schemeClr val="tx1"/>
-                    </a:solidFill>
-                    <a:effectLst/>
-                    <a:latin typeface="+mn-lt"/>
-                    <a:ea typeface="+mn-ea"/>
-                    <a:cs typeface="+mn-cs"/>
-                  </a:rPr>
-                  <a:t>{P_{</a:t>
-                </a:r>
-                <a:r>
-                  <a:rPr lang="en-US" sz="1200" kern="1200" dirty="0" err="1" smtClean="0">
-                    <a:solidFill>
-                      <a:schemeClr val="tx1"/>
-                    </a:solidFill>
-                    <a:effectLst/>
-                    <a:latin typeface="+mn-lt"/>
-                    <a:ea typeface="+mn-ea"/>
-                    <a:cs typeface="+mn-cs"/>
-                  </a:rPr>
-                  <a:t>W,i</a:t>
-                </a:r>
-                <a:r>
-                  <a:rPr lang="en-US" sz="1200" kern="1200" dirty="0" smtClean="0">
-                    <a:solidFill>
-                      <a:schemeClr val="tx1"/>
-                    </a:solidFill>
-                    <a:effectLst/>
-                    <a:latin typeface="+mn-lt"/>
-                    <a:ea typeface="+mn-ea"/>
-                    <a:cs typeface="+mn-cs"/>
-                  </a:rPr>
-                  <a:t>}^h}}{m_3\</a:t>
-                </a:r>
-                <a:r>
-                  <a:rPr lang="en-US" sz="1200" kern="1200" dirty="0" err="1" smtClean="0">
-                    <a:solidFill>
-                      <a:schemeClr val="tx1"/>
-                    </a:solidFill>
-                    <a:effectLst/>
-                    <a:latin typeface="+mn-lt"/>
-                    <a:ea typeface="+mn-ea"/>
-                    <a:cs typeface="+mn-cs"/>
-                  </a:rPr>
-                  <a:t>cdot</a:t>
-                </a:r>
-                <a:r>
-                  <a:rPr lang="en-US" sz="1200" kern="1200" dirty="0" smtClean="0">
-                    <a:solidFill>
-                      <a:schemeClr val="tx1"/>
-                    </a:solidFill>
-                    <a:effectLst/>
-                    <a:latin typeface="+mn-lt"/>
-                    <a:ea typeface="+mn-ea"/>
-                    <a:cs typeface="+mn-cs"/>
-                  </a:rPr>
-                  <a:t>{P_{</a:t>
-                </a:r>
-                <a:r>
-                  <a:rPr lang="en-US" sz="1200" kern="1200" dirty="0" err="1" smtClean="0">
-                    <a:solidFill>
-                      <a:schemeClr val="tx1"/>
-                    </a:solidFill>
-                    <a:effectLst/>
-                    <a:latin typeface="+mn-lt"/>
-                    <a:ea typeface="+mn-ea"/>
-                    <a:cs typeface="+mn-cs"/>
-                  </a:rPr>
-                  <a:t>W,i</a:t>
-                </a:r>
-                <a:r>
-                  <a:rPr lang="en-US" sz="1200" kern="1200" dirty="0" smtClean="0">
-                    <a:solidFill>
-                      <a:schemeClr val="tx1"/>
-                    </a:solidFill>
-                    <a:effectLst/>
-                    <a:latin typeface="+mn-lt"/>
-                    <a:ea typeface="+mn-ea"/>
-                    <a:cs typeface="+mn-cs"/>
-                  </a:rPr>
-                  <a:t>}^h}}\\</a:t>
-                </a:r>
-              </a:p>
-              <a:p>
-                <a:r>
-                  <a:rPr lang="en-US" sz="1200" kern="1200" dirty="0" err="1" smtClean="0">
-                    <a:solidFill>
-                      <a:schemeClr val="tx1"/>
-                    </a:solidFill>
-                    <a:effectLst/>
-                    <a:latin typeface="+mn-lt"/>
-                    <a:ea typeface="+mn-ea"/>
-                    <a:cs typeface="+mn-cs"/>
-                  </a:rPr>
-                  <a:t>v_i</a:t>
-                </a:r>
-                <a:r>
-                  <a:rPr lang="en-US" sz="1200" kern="1200" dirty="0" smtClean="0">
-                    <a:solidFill>
-                      <a:schemeClr val="tx1"/>
-                    </a:solidFill>
-                    <a:effectLst/>
-                    <a:latin typeface="+mn-lt"/>
-                    <a:ea typeface="+mn-ea"/>
-                    <a:cs typeface="+mn-cs"/>
-                  </a:rPr>
-                  <a:t> &amp;= \</a:t>
-                </a:r>
-                <a:r>
-                  <a:rPr lang="en-US" sz="1200" kern="1200" dirty="0" err="1" smtClean="0">
-                    <a:solidFill>
-                      <a:schemeClr val="tx1"/>
-                    </a:solidFill>
-                    <a:effectLst/>
-                    <a:latin typeface="+mn-lt"/>
-                    <a:ea typeface="+mn-ea"/>
-                    <a:cs typeface="+mn-cs"/>
-                  </a:rPr>
-                  <a:t>frac</a:t>
-                </a:r>
-                <a:r>
-                  <a:rPr lang="en-US" sz="1200" kern="1200" dirty="0" smtClean="0">
-                    <a:solidFill>
-                      <a:schemeClr val="tx1"/>
-                    </a:solidFill>
-                    <a:effectLst/>
-                    <a:latin typeface="+mn-lt"/>
-                    <a:ea typeface="+mn-ea"/>
-                    <a:cs typeface="+mn-cs"/>
-                  </a:rPr>
-                  <a:t>{m_2\</a:t>
-                </a:r>
-                <a:r>
-                  <a:rPr lang="en-US" sz="1200" kern="1200" dirty="0" err="1" smtClean="0">
-                    <a:solidFill>
-                      <a:schemeClr val="tx1"/>
-                    </a:solidFill>
-                    <a:effectLst/>
-                    <a:latin typeface="+mn-lt"/>
-                    <a:ea typeface="+mn-ea"/>
-                    <a:cs typeface="+mn-cs"/>
-                  </a:rPr>
-                  <a:t>cdot</a:t>
-                </a:r>
-                <a:r>
-                  <a:rPr lang="en-US" sz="1200" kern="1200" dirty="0" smtClean="0">
-                    <a:solidFill>
-                      <a:schemeClr val="tx1"/>
-                    </a:solidFill>
-                    <a:effectLst/>
-                    <a:latin typeface="+mn-lt"/>
-                    <a:ea typeface="+mn-ea"/>
-                    <a:cs typeface="+mn-cs"/>
-                  </a:rPr>
-                  <a:t>{P_{</a:t>
-                </a:r>
-                <a:r>
-                  <a:rPr lang="en-US" sz="1200" kern="1200" dirty="0" err="1" smtClean="0">
-                    <a:solidFill>
-                      <a:schemeClr val="tx1"/>
-                    </a:solidFill>
-                    <a:effectLst/>
-                    <a:latin typeface="+mn-lt"/>
-                    <a:ea typeface="+mn-ea"/>
-                    <a:cs typeface="+mn-cs"/>
-                  </a:rPr>
-                  <a:t>W,i</a:t>
-                </a:r>
-                <a:r>
-                  <a:rPr lang="en-US" sz="1200" kern="1200" dirty="0" smtClean="0">
-                    <a:solidFill>
-                      <a:schemeClr val="tx1"/>
-                    </a:solidFill>
-                    <a:effectLst/>
-                    <a:latin typeface="+mn-lt"/>
-                    <a:ea typeface="+mn-ea"/>
-                    <a:cs typeface="+mn-cs"/>
-                  </a:rPr>
-                  <a:t>}^h}}{m_3\</a:t>
-                </a:r>
-                <a:r>
-                  <a:rPr lang="en-US" sz="1200" kern="1200" dirty="0" err="1" smtClean="0">
-                    <a:solidFill>
-                      <a:schemeClr val="tx1"/>
-                    </a:solidFill>
-                    <a:effectLst/>
-                    <a:latin typeface="+mn-lt"/>
-                    <a:ea typeface="+mn-ea"/>
-                    <a:cs typeface="+mn-cs"/>
-                  </a:rPr>
-                  <a:t>cdot</a:t>
-                </a:r>
-                <a:r>
-                  <a:rPr lang="en-US" sz="1200" kern="1200" dirty="0" smtClean="0">
-                    <a:solidFill>
-                      <a:schemeClr val="tx1"/>
-                    </a:solidFill>
-                    <a:effectLst/>
-                    <a:latin typeface="+mn-lt"/>
-                    <a:ea typeface="+mn-ea"/>
-                    <a:cs typeface="+mn-cs"/>
-                  </a:rPr>
-                  <a:t>{P_{</a:t>
-                </a:r>
-                <a:r>
-                  <a:rPr lang="en-US" sz="1200" kern="1200" dirty="0" err="1" smtClean="0">
-                    <a:solidFill>
-                      <a:schemeClr val="tx1"/>
-                    </a:solidFill>
-                    <a:effectLst/>
-                    <a:latin typeface="+mn-lt"/>
-                    <a:ea typeface="+mn-ea"/>
-                    <a:cs typeface="+mn-cs"/>
-                  </a:rPr>
-                  <a:t>W,i</a:t>
-                </a:r>
-                <a:r>
-                  <a:rPr lang="en-US" sz="1200" kern="1200" dirty="0" smtClean="0">
-                    <a:solidFill>
-                      <a:schemeClr val="tx1"/>
-                    </a:solidFill>
-                    <a:effectLst/>
-                    <a:latin typeface="+mn-lt"/>
-                    <a:ea typeface="+mn-ea"/>
-                    <a:cs typeface="+mn-cs"/>
-                  </a:rPr>
-                  <a:t>}^h}}</a:t>
-                </a:r>
-              </a:p>
-              <a:p>
-                <a:endParaRPr lang="en-US" sz="1200" kern="1200" dirty="0" smtClean="0">
-                  <a:solidFill>
-                    <a:schemeClr val="tx1"/>
-                  </a:solidFill>
-                  <a:effectLst/>
-                  <a:latin typeface="+mn-lt"/>
-                  <a:ea typeface="+mn-ea"/>
-                  <a:cs typeface="+mn-cs"/>
-                </a:endParaRPr>
-              </a:p>
-              <a:p>
-                <a:endParaRPr lang="en-US" sz="1200" kern="1200" dirty="0" smtClean="0">
-                  <a:solidFill>
-                    <a:schemeClr val="tx1"/>
-                  </a:solidFill>
-                  <a:effectLst/>
-                  <a:latin typeface="+mn-lt"/>
-                  <a:ea typeface="+mn-ea"/>
-                  <a:cs typeface="+mn-cs"/>
-                </a:endParaRPr>
-              </a:p>
-              <a:p>
-                <a:r>
-                  <a:rPr lang="en-US" sz="1200" kern="1200" dirty="0" smtClean="0">
-                    <a:solidFill>
-                      <a:schemeClr val="tx1"/>
-                    </a:solidFill>
-                    <a:effectLst/>
-                    <a:latin typeface="+mn-lt"/>
-                    <a:ea typeface="+mn-ea"/>
-                    <a:cs typeface="+mn-cs"/>
-                  </a:rPr>
-                  <a:t>p^{h}_</a:t>
-                </a:r>
-                <a:r>
-                  <a:rPr lang="en-US" sz="1200" kern="1200" dirty="0" err="1" smtClean="0">
-                    <a:solidFill>
-                      <a:schemeClr val="tx1"/>
-                    </a:solidFill>
-                    <a:effectLst/>
-                    <a:latin typeface="+mn-lt"/>
-                    <a:ea typeface="+mn-ea"/>
-                    <a:cs typeface="+mn-cs"/>
-                  </a:rPr>
-                  <a:t>i</a:t>
-                </a:r>
-                <a:r>
-                  <a:rPr lang="en-US" sz="1200" kern="1200" dirty="0" smtClean="0">
-                    <a:solidFill>
-                      <a:schemeClr val="tx1"/>
-                    </a:solidFill>
-                    <a:effectLst/>
-                    <a:latin typeface="+mn-lt"/>
-                    <a:ea typeface="+mn-ea"/>
-                    <a:cs typeface="+mn-cs"/>
-                  </a:rPr>
-                  <a:t> = M \, P_{</a:t>
-                </a:r>
-                <a:r>
-                  <a:rPr lang="en-US" sz="1200" kern="1200" dirty="0" err="1" smtClean="0">
-                    <a:solidFill>
-                      <a:schemeClr val="tx1"/>
-                    </a:solidFill>
-                    <a:effectLst/>
-                    <a:latin typeface="+mn-lt"/>
-                    <a:ea typeface="+mn-ea"/>
-                    <a:cs typeface="+mn-cs"/>
-                  </a:rPr>
-                  <a:t>W,i</a:t>
-                </a:r>
-                <a:r>
-                  <a:rPr lang="en-US" sz="1200" kern="1200" dirty="0" smtClean="0">
-                    <a:solidFill>
-                      <a:schemeClr val="tx1"/>
-                    </a:solidFill>
-                    <a:effectLst/>
-                    <a:latin typeface="+mn-lt"/>
-                    <a:ea typeface="+mn-ea"/>
-                    <a:cs typeface="+mn-cs"/>
-                  </a:rPr>
-                  <a:t>}^h, \, \, </a:t>
-                </a:r>
-                <a:r>
-                  <a:rPr lang="en-US" sz="1200" kern="1200" dirty="0" err="1" smtClean="0">
-                    <a:solidFill>
-                      <a:schemeClr val="tx1"/>
-                    </a:solidFill>
-                    <a:effectLst/>
-                    <a:latin typeface="+mn-lt"/>
-                    <a:ea typeface="+mn-ea"/>
-                    <a:cs typeface="+mn-cs"/>
-                  </a:rPr>
-                  <a:t>i</a:t>
-                </a:r>
-                <a:r>
-                  <a:rPr lang="en-US" sz="1200" kern="1200" dirty="0" smtClean="0">
-                    <a:solidFill>
-                      <a:schemeClr val="tx1"/>
-                    </a:solidFill>
-                    <a:effectLst/>
-                    <a:latin typeface="+mn-lt"/>
-                    <a:ea typeface="+mn-ea"/>
-                    <a:cs typeface="+mn-cs"/>
-                  </a:rPr>
-                  <a:t>=1,\</a:t>
-                </a:r>
-                <a:r>
-                  <a:rPr lang="en-US" sz="1200" kern="1200" dirty="0" err="1" smtClean="0">
-                    <a:solidFill>
-                      <a:schemeClr val="tx1"/>
-                    </a:solidFill>
-                    <a:effectLst/>
-                    <a:latin typeface="+mn-lt"/>
-                    <a:ea typeface="+mn-ea"/>
-                    <a:cs typeface="+mn-cs"/>
-                  </a:rPr>
-                  <a:t>ldots</a:t>
-                </a:r>
-                <a:r>
-                  <a:rPr lang="en-US" sz="1200" kern="1200" dirty="0" smtClean="0">
-                    <a:solidFill>
-                      <a:schemeClr val="tx1"/>
-                    </a:solidFill>
-                    <a:effectLst/>
-                    <a:latin typeface="+mn-lt"/>
-                    <a:ea typeface="+mn-ea"/>
-                    <a:cs typeface="+mn-cs"/>
-                  </a:rPr>
-                  <a:t>, n, \</a:t>
-                </a:r>
-                <a:r>
-                  <a:rPr lang="en-US" sz="1200" kern="1200" dirty="0" err="1" smtClean="0">
-                    <a:solidFill>
-                      <a:schemeClr val="tx1"/>
-                    </a:solidFill>
-                    <a:effectLst/>
-                    <a:latin typeface="+mn-lt"/>
-                    <a:ea typeface="+mn-ea"/>
-                    <a:cs typeface="+mn-cs"/>
-                  </a:rPr>
-                  <a:t>qquad</a:t>
-                </a:r>
-                <a:r>
-                  <a:rPr lang="en-US" sz="1200" kern="1200" dirty="0" smtClean="0">
-                    <a:solidFill>
-                      <a:schemeClr val="tx1"/>
-                    </a:solidFill>
-                    <a:effectLst/>
-                    <a:latin typeface="+mn-lt"/>
-                    <a:ea typeface="+mn-ea"/>
-                    <a:cs typeface="+mn-cs"/>
-                  </a:rPr>
-                  <a:t> \text{where} \quad M = K[R \quad t] = \begin{</a:t>
-                </a:r>
-                <a:r>
-                  <a:rPr lang="en-US" sz="1200" kern="1200" dirty="0" err="1" smtClean="0">
-                    <a:solidFill>
-                      <a:schemeClr val="tx1"/>
-                    </a:solidFill>
-                    <a:effectLst/>
-                    <a:latin typeface="+mn-lt"/>
-                    <a:ea typeface="+mn-ea"/>
-                    <a:cs typeface="+mn-cs"/>
-                  </a:rPr>
-                  <a:t>bmatrix</a:t>
-                </a:r>
-                <a:r>
-                  <a:rPr lang="en-US" sz="1200" kern="1200" dirty="0" smtClean="0">
-                    <a:solidFill>
-                      <a:schemeClr val="tx1"/>
-                    </a:solidFill>
-                    <a:effectLst/>
-                    <a:latin typeface="+mn-lt"/>
-                    <a:ea typeface="+mn-ea"/>
-                    <a:cs typeface="+mn-cs"/>
-                  </a:rPr>
-                  <a:t>}</a:t>
-                </a:r>
-              </a:p>
-              <a:p>
-                <a:r>
-                  <a:rPr lang="en-US" sz="1200" kern="1200" dirty="0" smtClean="0">
-                    <a:solidFill>
-                      <a:schemeClr val="tx1"/>
-                    </a:solidFill>
-                    <a:effectLst/>
-                    <a:latin typeface="+mn-lt"/>
-                    <a:ea typeface="+mn-ea"/>
-                    <a:cs typeface="+mn-cs"/>
-                  </a:rPr>
-                  <a:t>m_1\\</a:t>
-                </a:r>
-              </a:p>
-              <a:p>
-                <a:r>
-                  <a:rPr lang="en-US" sz="1200" kern="1200" dirty="0" smtClean="0">
-                    <a:solidFill>
-                      <a:schemeClr val="tx1"/>
-                    </a:solidFill>
-                    <a:effectLst/>
-                    <a:latin typeface="+mn-lt"/>
-                    <a:ea typeface="+mn-ea"/>
-                    <a:cs typeface="+mn-cs"/>
-                  </a:rPr>
-                  <a:t>m_2\\</a:t>
-                </a:r>
-              </a:p>
-              <a:p>
-                <a:r>
-                  <a:rPr lang="en-US" sz="1200" kern="1200" dirty="0" smtClean="0">
-                    <a:solidFill>
-                      <a:schemeClr val="tx1"/>
-                    </a:solidFill>
-                    <a:effectLst/>
-                    <a:latin typeface="+mn-lt"/>
-                    <a:ea typeface="+mn-ea"/>
-                    <a:cs typeface="+mn-cs"/>
-                  </a:rPr>
-                  <a:t>m_3\end{</a:t>
-                </a:r>
-                <a:r>
-                  <a:rPr lang="en-US" sz="1200" kern="1200" dirty="0" err="1" smtClean="0">
-                    <a:solidFill>
-                      <a:schemeClr val="tx1"/>
-                    </a:solidFill>
-                    <a:effectLst/>
-                    <a:latin typeface="+mn-lt"/>
-                    <a:ea typeface="+mn-ea"/>
-                    <a:cs typeface="+mn-cs"/>
-                  </a:rPr>
-                  <a:t>bmatrix</a:t>
-                </a:r>
-                <a:r>
-                  <a:rPr lang="en-US" sz="1200" kern="1200" dirty="0" smtClean="0">
-                    <a:solidFill>
-                      <a:schemeClr val="tx1"/>
-                    </a:solidFill>
-                    <a:effectLst/>
-                    <a:latin typeface="+mn-lt"/>
-                    <a:ea typeface="+mn-ea"/>
-                    <a:cs typeface="+mn-cs"/>
-                  </a:rPr>
-                  <a:t>}</a:t>
-                </a:r>
-              </a:p>
-              <a:p>
-                <a:r>
-                  <a:rPr lang="en-US" sz="1200" kern="1200" dirty="0" smtClean="0">
-                    <a:solidFill>
-                      <a:schemeClr val="tx1"/>
-                    </a:solidFill>
-                    <a:effectLst/>
-                    <a:latin typeface="+mn-lt"/>
-                    <a:ea typeface="+mn-ea"/>
-                    <a:cs typeface="+mn-cs"/>
-                  </a:rPr>
-                  <a:t/>
-                </a:r>
-                <a:br>
-                  <a:rPr lang="en-US" sz="1200" kern="1200" dirty="0" smtClean="0">
-                    <a:solidFill>
-                      <a:schemeClr val="tx1"/>
-                    </a:solidFill>
-                    <a:effectLst/>
-                    <a:latin typeface="+mn-lt"/>
-                    <a:ea typeface="+mn-ea"/>
-                    <a:cs typeface="+mn-cs"/>
-                  </a:rPr>
-                </a:br>
-                <a:endParaRPr lang="en-US" sz="1200" kern="1200" dirty="0">
-                  <a:solidFill>
-                    <a:schemeClr val="tx1"/>
-                  </a:solidFill>
-                  <a:effectLst/>
-                  <a:latin typeface="+mn-lt"/>
-                  <a:ea typeface="+mn-ea"/>
-                  <a:cs typeface="+mn-cs"/>
-                </a:endParaRPr>
-              </a:p>
-            </p:txBody>
-          </p:sp>
-        </mc:Fallback>
-      </mc:AlternateContent>
+      <p:sp>
+        <p:nvSpPr>
+          <p:cNvPr id="3" name="Notes Placeholder 2"/>
+          <p:cNvSpPr>
+            <a:spLocks noGrp="1"/>
+          </p:cNvSpPr>
+          <p:nvPr>
+            <p:ph type="body" idx="1"/>
+          </p:nvPr>
+        </p:nvSpPr>
+        <p:spPr/>
+        <p:txBody>
+          <a:bodyPr/>
+          <a:lstStyle/>
+          <a:p>
+            <a:pPr marL="171450" indent="-171450">
+              <a:buFont typeface="Arial" charset="0"/>
+              <a:buChar char="•"/>
+            </a:pPr>
+            <a:endParaRPr lang="en-US" sz="1200" kern="1200" dirty="0">
+              <a:solidFill>
+                <a:schemeClr val="tx1"/>
+              </a:solidFill>
+              <a:effectLst/>
+              <a:latin typeface="+mn-lt"/>
+              <a:ea typeface="+mn-ea"/>
+              <a:cs typeface="+mn-cs"/>
+            </a:endParaRPr>
+          </a:p>
+        </p:txBody>
+      </p:sp>
       <p:sp>
         <p:nvSpPr>
           <p:cNvPr id="4" name="Slide Number Placeholder 3"/>
@@ -4405,231 +1383,6 @@
           <a:bodyPr/>
           <a:lstStyle/>
           <a:p>
-            <a:pPr marL="171450" marR="0" indent="-171450" algn="l" defTabSz="914400" rtl="0" eaLnBrk="1" fontAlgn="auto" latinLnBrk="0" hangingPunct="1">
-              <a:lnSpc>
-                <a:spcPct val="100000"/>
-              </a:lnSpc>
-              <a:spcBef>
-                <a:spcPts val="0"/>
-              </a:spcBef>
-              <a:spcAft>
-                <a:spcPts val="0"/>
-              </a:spcAft>
-              <a:buClrTx/>
-              <a:buSzTx/>
-              <a:buFont typeface="Arial" charset="0"/>
-              <a:buChar char="•"/>
-              <a:tabLst/>
-              <a:defRPr/>
-            </a:pPr>
-            <a:r>
-              <a:rPr lang="en-US" dirty="0"/>
-              <a:t>We can express these </a:t>
-            </a:r>
-            <a:r>
-              <a:rPr lang="en-US" dirty="0" err="1"/>
-              <a:t>contraints</a:t>
-            </a:r>
-            <a:r>
-              <a:rPr lang="en-US" dirty="0"/>
-              <a:t>  it in terms of a matrix equation of the form Pm = 0</a:t>
-            </a:r>
-          </a:p>
-          <a:p>
-            <a:pPr marL="171450" marR="0" indent="-171450" algn="l" defTabSz="914400" rtl="0" eaLnBrk="1" fontAlgn="auto" latinLnBrk="0" hangingPunct="1">
-              <a:lnSpc>
-                <a:spcPct val="100000"/>
-              </a:lnSpc>
-              <a:spcBef>
-                <a:spcPts val="0"/>
-              </a:spcBef>
-              <a:spcAft>
-                <a:spcPts val="0"/>
-              </a:spcAft>
-              <a:buClrTx/>
-              <a:buSzTx/>
-              <a:buFont typeface="Arial" charset="0"/>
-              <a:buChar char="•"/>
-              <a:tabLst/>
-              <a:defRPr/>
-            </a:pPr>
-            <a:r>
-              <a:rPr lang="en-US" dirty="0"/>
-              <a:t>Note that m is a </a:t>
-            </a:r>
-            <a:r>
-              <a:rPr lang="en-US" dirty="0" err="1"/>
-              <a:t>vectorized</a:t>
-            </a:r>
-            <a:r>
-              <a:rPr lang="en-US" dirty="0"/>
-              <a:t> version of the 3x4 projection matrix, where each 4x1 block corresponds to a row in the original matrix.</a:t>
-            </a:r>
-          </a:p>
-          <a:p>
-            <a:pPr marL="171450" marR="0" indent="-171450" algn="l" defTabSz="914400" rtl="0" eaLnBrk="1" fontAlgn="auto" latinLnBrk="0" hangingPunct="1">
-              <a:lnSpc>
-                <a:spcPct val="100000"/>
-              </a:lnSpc>
-              <a:spcBef>
-                <a:spcPts val="0"/>
-              </a:spcBef>
-              <a:spcAft>
-                <a:spcPts val="0"/>
-              </a:spcAft>
-              <a:buClrTx/>
-              <a:buSzTx/>
-              <a:buFont typeface="Arial" charset="0"/>
-              <a:buChar char="•"/>
-              <a:tabLst/>
-              <a:defRPr/>
-            </a:pPr>
-            <a:r>
-              <a:rPr lang="en-US" dirty="0"/>
-              <a:t>0 is always a solution. Furthermore, if m is a solution, then so is k m, where k is an arbitrary scaling factor. </a:t>
-            </a:r>
-            <a:endParaRPr lang="en-US" sz="1200" kern="1200" dirty="0">
-              <a:solidFill>
-                <a:schemeClr val="tx1"/>
-              </a:solidFill>
-              <a:effectLst/>
-              <a:latin typeface="+mn-lt"/>
-              <a:ea typeface="+mn-ea"/>
-              <a:cs typeface="+mn-cs"/>
-            </a:endParaRPr>
-          </a:p>
-          <a:p>
-            <a:pPr marL="0" marR="0" indent="0" algn="l" defTabSz="914400" rtl="0" eaLnBrk="1" fontAlgn="auto" latinLnBrk="0" hangingPunct="1">
-              <a:lnSpc>
-                <a:spcPct val="100000"/>
-              </a:lnSpc>
-              <a:spcBef>
-                <a:spcPts val="0"/>
-              </a:spcBef>
-              <a:spcAft>
-                <a:spcPts val="0"/>
-              </a:spcAft>
-              <a:buClrTx/>
-              <a:buSzTx/>
-              <a:buFontTx/>
-              <a:buNone/>
-              <a:tabLst/>
-              <a:defRPr/>
-            </a:pPr>
-            <a:endParaRPr lang="en-US" sz="1200" kern="1200" dirty="0">
-              <a:solidFill>
-                <a:schemeClr val="tx1"/>
-              </a:solidFill>
-              <a:effectLst/>
-              <a:latin typeface="+mn-lt"/>
-              <a:ea typeface="+mn-ea"/>
-              <a:cs typeface="+mn-cs"/>
-            </a:endParaRPr>
-          </a:p>
-          <a:p>
-            <a:pPr marL="0" marR="0" indent="0" algn="l" defTabSz="914400" rtl="0" eaLnBrk="1" fontAlgn="auto" latinLnBrk="0" hangingPunct="1">
-              <a:lnSpc>
-                <a:spcPct val="100000"/>
-              </a:lnSpc>
-              <a:spcBef>
-                <a:spcPts val="0"/>
-              </a:spcBef>
-              <a:spcAft>
-                <a:spcPts val="0"/>
-              </a:spcAft>
-              <a:buClrTx/>
-              <a:buSzTx/>
-              <a:buFontTx/>
-              <a:buNone/>
-              <a:tabLst/>
-              <a:defRPr/>
-            </a:pPr>
-            <a:r>
-              <a:rPr lang="en-US" sz="1200" kern="1200" dirty="0">
-                <a:solidFill>
-                  <a:schemeClr val="tx1"/>
-                </a:solidFill>
-                <a:effectLst/>
-                <a:latin typeface="+mn-lt"/>
-                <a:ea typeface="+mn-ea"/>
-                <a:cs typeface="+mn-cs"/>
-              </a:rPr>
-              <a:t>P m =0, \</a:t>
-            </a:r>
-            <a:r>
-              <a:rPr lang="en-US" sz="1200" kern="1200" dirty="0" err="1">
-                <a:solidFill>
-                  <a:schemeClr val="tx1"/>
-                </a:solidFill>
-                <a:effectLst/>
-                <a:latin typeface="+mn-lt"/>
-                <a:ea typeface="+mn-ea"/>
-                <a:cs typeface="+mn-cs"/>
-              </a:rPr>
-              <a:t>qquad</a:t>
-            </a:r>
-            <a:r>
-              <a:rPr lang="en-US" sz="1200" kern="1200" dirty="0">
-                <a:solidFill>
-                  <a:schemeClr val="tx1"/>
-                </a:solidFill>
-                <a:effectLst/>
-                <a:latin typeface="+mn-lt"/>
-                <a:ea typeface="+mn-ea"/>
-                <a:cs typeface="+mn-cs"/>
-              </a:rPr>
-              <a:t> \text{where } m = \begin{</a:t>
-            </a:r>
-            <a:r>
-              <a:rPr lang="en-US" sz="1200" kern="1200" dirty="0" err="1">
-                <a:solidFill>
-                  <a:schemeClr val="tx1"/>
-                </a:solidFill>
-                <a:effectLst/>
-                <a:latin typeface="+mn-lt"/>
-                <a:ea typeface="+mn-ea"/>
-                <a:cs typeface="+mn-cs"/>
-              </a:rPr>
-              <a:t>bmatrix</a:t>
-            </a:r>
-            <a:r>
-              <a:rPr lang="en-US" sz="1200" kern="1200" dirty="0">
-                <a:solidFill>
-                  <a:schemeClr val="tx1"/>
-                </a:solidFill>
-                <a:effectLst/>
-                <a:latin typeface="+mn-lt"/>
-                <a:ea typeface="+mn-ea"/>
-                <a:cs typeface="+mn-cs"/>
-              </a:rPr>
-              <a:t>}m_1^T\\m_2^T \\m_3^T \end{</a:t>
-            </a:r>
-            <a:r>
-              <a:rPr lang="en-US" sz="1200" kern="1200" dirty="0" err="1">
-                <a:solidFill>
-                  <a:schemeClr val="tx1"/>
-                </a:solidFill>
-                <a:effectLst/>
-                <a:latin typeface="+mn-lt"/>
-                <a:ea typeface="+mn-ea"/>
-                <a:cs typeface="+mn-cs"/>
-              </a:rPr>
-              <a:t>bmatrix</a:t>
-            </a:r>
-            <a:r>
-              <a:rPr lang="en-US" sz="1200" kern="1200" dirty="0">
-                <a:solidFill>
-                  <a:schemeClr val="tx1"/>
-                </a:solidFill>
-                <a:effectLst/>
-                <a:latin typeface="+mn-lt"/>
-                <a:ea typeface="+mn-ea"/>
-                <a:cs typeface="+mn-cs"/>
-              </a:rPr>
-              <a:t>}</a:t>
-            </a:r>
-          </a:p>
-          <a:p>
             <a:endParaRPr lang="en-US" dirty="0"/>
           </a:p>
         </p:txBody>
@@ -4714,233 +1467,6 @@
           <a:bodyPr/>
           <a:lstStyle/>
           <a:p>
-            <a:pPr marL="171450" indent="-171450">
-              <a:buFont typeface="Arial" charset="0"/>
-              <a:buChar char="•"/>
-            </a:pPr>
-            <a:r>
-              <a:rPr lang="en-US" dirty="0"/>
-              <a:t>When 2n&gt;11, the homogeneous linear system is overdetermined. </a:t>
-            </a:r>
-          </a:p>
-          <a:p>
-            <a:pPr marL="171450" indent="-171450">
-              <a:buFont typeface="Arial" charset="0"/>
-              <a:buChar char="•"/>
-            </a:pPr>
-            <a:r>
-              <a:rPr lang="en-US" dirty="0"/>
-              <a:t>0 is always a solution. Furthermore, if m is a solution, then so is k m, where k is an arbitrary scaling factor. </a:t>
-            </a:r>
-          </a:p>
-          <a:p>
-            <a:pPr marL="171450" indent="-171450">
-              <a:buFont typeface="Arial" charset="0"/>
-              <a:buChar char="•"/>
-            </a:pPr>
-            <a:r>
-              <a:rPr lang="en-US" sz="1200" kern="1200" dirty="0">
-                <a:solidFill>
-                  <a:schemeClr val="tx1"/>
-                </a:solidFill>
-                <a:effectLst/>
-                <a:latin typeface="+mn-lt"/>
-                <a:ea typeface="+mn-ea"/>
-                <a:cs typeface="+mn-cs"/>
-              </a:rPr>
-              <a:t> Here we are interested in finding a non-zero vector in the </a:t>
-            </a:r>
-            <a:r>
-              <a:rPr lang="en-US" sz="1200" kern="1200" dirty="0" err="1">
-                <a:solidFill>
-                  <a:schemeClr val="tx1"/>
-                </a:solidFill>
-                <a:effectLst/>
-                <a:latin typeface="+mn-lt"/>
-                <a:ea typeface="+mn-ea"/>
-                <a:cs typeface="+mn-cs"/>
-              </a:rPr>
-              <a:t>nullspace</a:t>
-            </a:r>
-            <a:r>
-              <a:rPr lang="en-US" sz="1200" kern="1200" dirty="0">
-                <a:solidFill>
-                  <a:schemeClr val="tx1"/>
-                </a:solidFill>
-                <a:effectLst/>
-                <a:latin typeface="+mn-lt"/>
-                <a:ea typeface="+mn-ea"/>
-                <a:cs typeface="+mn-cs"/>
-              </a:rPr>
-              <a:t> of M . Since the scale is arbitrary we can add</a:t>
-            </a:r>
-            <a:r>
-              <a:rPr lang="en-US" sz="1200" kern="1200" baseline="0" dirty="0">
-                <a:solidFill>
-                  <a:schemeClr val="tx1"/>
-                </a:solidFill>
-                <a:effectLst/>
-                <a:latin typeface="+mn-lt"/>
-                <a:ea typeface="+mn-ea"/>
-                <a:cs typeface="+mn-cs"/>
-              </a:rPr>
-              <a:t> </a:t>
-            </a:r>
-            <a:r>
-              <a:rPr lang="en-US" sz="1200" kern="1200" dirty="0">
-                <a:solidFill>
-                  <a:schemeClr val="tx1"/>
-                </a:solidFill>
-                <a:effectLst/>
-                <a:latin typeface="+mn-lt"/>
-                <a:ea typeface="+mn-ea"/>
-                <a:cs typeface="+mn-cs"/>
-              </a:rPr>
-              <a:t>the constraint kvk2 = 1  In most cases the system </a:t>
-            </a:r>
-            <a:r>
-              <a:rPr lang="en-US" sz="1200" kern="1200" dirty="0" err="1">
-                <a:solidFill>
-                  <a:schemeClr val="tx1"/>
-                </a:solidFill>
-                <a:effectLst/>
-                <a:latin typeface="+mn-lt"/>
-                <a:ea typeface="+mn-ea"/>
-                <a:cs typeface="+mn-cs"/>
-              </a:rPr>
-              <a:t>Mv</a:t>
-            </a:r>
-            <a:r>
-              <a:rPr lang="en-US" sz="1200" kern="1200" dirty="0">
-                <a:solidFill>
-                  <a:schemeClr val="tx1"/>
-                </a:solidFill>
-                <a:effectLst/>
-                <a:latin typeface="+mn-lt"/>
-                <a:ea typeface="+mn-ea"/>
-                <a:cs typeface="+mn-cs"/>
-              </a:rPr>
-              <a:t> = 0  will not have any exact solution due to noise in the</a:t>
-            </a:r>
-            <a:r>
-              <a:rPr lang="en-US" sz="1200" kern="1200" baseline="0" dirty="0">
-                <a:solidFill>
-                  <a:schemeClr val="tx1"/>
-                </a:solidFill>
-                <a:effectLst/>
-                <a:latin typeface="+mn-lt"/>
-                <a:ea typeface="+mn-ea"/>
-                <a:cs typeface="+mn-cs"/>
-              </a:rPr>
-              <a:t> </a:t>
-            </a:r>
-            <a:r>
-              <a:rPr lang="en-US" sz="1200" kern="1200" dirty="0">
-                <a:solidFill>
-                  <a:schemeClr val="tx1"/>
-                </a:solidFill>
-                <a:effectLst/>
-                <a:latin typeface="+mn-lt"/>
-                <a:ea typeface="+mn-ea"/>
-                <a:cs typeface="+mn-cs"/>
-              </a:rPr>
-              <a:t>measurements. Therefore we will search for a solution to [</a:t>
-            </a:r>
-            <a:r>
-              <a:rPr lang="is-IS" sz="1200" kern="1200" dirty="0">
-                <a:solidFill>
-                  <a:schemeClr val="tx1"/>
-                </a:solidFill>
-                <a:effectLst/>
-                <a:latin typeface="+mn-lt"/>
-                <a:ea typeface="+mn-ea"/>
-                <a:cs typeface="+mn-cs"/>
-              </a:rPr>
-              <a:t>…</a:t>
-            </a:r>
-            <a:r>
-              <a:rPr lang="en-US" sz="1200" kern="1200" dirty="0">
-                <a:solidFill>
-                  <a:schemeClr val="tx1"/>
-                </a:solidFill>
-                <a:effectLst/>
-                <a:latin typeface="+mn-lt"/>
-                <a:ea typeface="+mn-ea"/>
-                <a:cs typeface="+mn-cs"/>
-              </a:rPr>
-              <a:t>]</a:t>
-            </a:r>
-            <a:endParaRPr lang="en-US" dirty="0"/>
-          </a:p>
-          <a:p>
-            <a:pPr marL="171450" indent="-171450">
-              <a:buFont typeface="Arial" charset="0"/>
-              <a:buChar char="•"/>
-            </a:pPr>
-            <a:r>
-              <a:rPr lang="en-US" dirty="0"/>
-              <a:t>Therefore, to constrain our optimization, we minimize |P m|2 subject to the constraint that |m|2 = 1 </a:t>
-            </a:r>
-            <a:endParaRPr lang="en-US" sz="1200" kern="1200" dirty="0">
-              <a:solidFill>
-                <a:schemeClr val="tx1"/>
-              </a:solidFill>
-              <a:effectLst/>
-              <a:latin typeface="+mn-lt"/>
-              <a:ea typeface="+mn-ea"/>
-              <a:cs typeface="+mn-cs"/>
-            </a:endParaRPr>
-          </a:p>
-          <a:p>
-            <a:pPr marL="171450" indent="-171450">
-              <a:buFont typeface="Arial" charset="0"/>
-              <a:buChar char="•"/>
-            </a:pPr>
-            <a:r>
-              <a:rPr lang="en-US" dirty="0"/>
-              <a:t>We can obtain the least-squares solution for m by factorizing P to UDVT using SVD and then taking the last column of V.</a:t>
-            </a:r>
-          </a:p>
-          <a:p>
-            <a:endParaRPr lang="en-US" sz="1200" kern="1200" dirty="0">
-              <a:solidFill>
-                <a:schemeClr val="tx1"/>
-              </a:solidFill>
-              <a:effectLst/>
-              <a:latin typeface="+mn-lt"/>
-              <a:ea typeface="+mn-ea"/>
-              <a:cs typeface="+mn-cs"/>
-            </a:endParaRPr>
-          </a:p>
-          <a:p>
-            <a:r>
-              <a:rPr lang="en-US" sz="1200" kern="1200" dirty="0">
-                <a:solidFill>
-                  <a:schemeClr val="tx1"/>
-                </a:solidFill>
-                <a:effectLst/>
-                <a:latin typeface="+mn-lt"/>
-                <a:ea typeface="+mn-ea"/>
-                <a:cs typeface="+mn-cs"/>
-              </a:rPr>
-              <a:t>\underset{m\in R^{12}}{\text{min}} \quad &amp; \| \tilde P m\|^2\\</a:t>
-            </a:r>
-          </a:p>
-          <a:p>
-            <a:r>
-              <a:rPr lang="en-US" sz="1200" kern="1200" dirty="0">
-                <a:solidFill>
-                  <a:schemeClr val="tx1"/>
-                </a:solidFill>
-                <a:effectLst/>
-                <a:latin typeface="+mn-lt"/>
-                <a:ea typeface="+mn-ea"/>
-                <a:cs typeface="+mn-cs"/>
-              </a:rPr>
-              <a:t>\text{subject to}\quad &amp; \| m\|^2 = 1</a:t>
-            </a:r>
-          </a:p>
-          <a:p>
             <a:endParaRPr lang="en-US" dirty="0"/>
           </a:p>
         </p:txBody>
@@ -5025,190 +1551,6 @@
           <a:bodyPr/>
           <a:lstStyle/>
           <a:p>
-            <a:pPr marL="171450" marR="0" indent="-171450" algn="l" defTabSz="914400" rtl="0" eaLnBrk="1" fontAlgn="auto" latinLnBrk="0" hangingPunct="1">
-              <a:lnSpc>
-                <a:spcPct val="100000"/>
-              </a:lnSpc>
-              <a:spcBef>
-                <a:spcPts val="0"/>
-              </a:spcBef>
-              <a:spcAft>
-                <a:spcPts val="0"/>
-              </a:spcAft>
-              <a:buClrTx/>
-              <a:buSzTx/>
-              <a:buFont typeface="Arial" charset="0"/>
-              <a:buChar char="•"/>
-              <a:tabLst/>
-              <a:defRPr/>
-            </a:pPr>
-            <a:r>
-              <a:rPr lang="en-US" dirty="0"/>
-              <a:t>Once we have estimated the combined parameters in m, the next step is to extract the actual </a:t>
-            </a:r>
-            <a:r>
-              <a:rPr lang="en-US" dirty="0" err="1"/>
-              <a:t>intrinsics</a:t>
-            </a:r>
-            <a:r>
-              <a:rPr lang="en-US" dirty="0"/>
-              <a:t> and </a:t>
-            </a:r>
-            <a:r>
-              <a:rPr lang="en-US" dirty="0" err="1"/>
-              <a:t>extrinsics</a:t>
-            </a:r>
-            <a:r>
-              <a:rPr lang="en-US" dirty="0"/>
-              <a:t> from it.</a:t>
-            </a:r>
-          </a:p>
-          <a:p>
-            <a:pPr marL="171450" indent="-171450">
-              <a:buFont typeface="Arial" charset="0"/>
-              <a:buChar char="•"/>
-            </a:pPr>
-            <a:r>
-              <a:rPr lang="en-US" sz="1200" kern="1200" dirty="0">
-                <a:solidFill>
-                  <a:schemeClr val="tx1"/>
-                </a:solidFill>
-                <a:effectLst/>
-                <a:latin typeface="+mn-lt"/>
-                <a:ea typeface="+mn-ea"/>
-                <a:cs typeface="+mn-cs"/>
-              </a:rPr>
-              <a:t> If A  is an n  n  matrix then there is an orthogonal matrix Q  and a right triangular matrix R  such that</a:t>
-            </a:r>
-            <a:r>
-              <a:rPr lang="en-US" sz="1200" kern="1200" baseline="0" dirty="0">
-                <a:solidFill>
-                  <a:schemeClr val="tx1"/>
-                </a:solidFill>
-                <a:effectLst/>
-                <a:latin typeface="+mn-lt"/>
-                <a:ea typeface="+mn-ea"/>
-                <a:cs typeface="+mn-cs"/>
-              </a:rPr>
-              <a:t> </a:t>
-            </a:r>
-            <a:r>
-              <a:rPr lang="en-US" sz="1200" kern="1200" dirty="0">
-                <a:solidFill>
-                  <a:schemeClr val="tx1"/>
-                </a:solidFill>
-                <a:effectLst/>
-                <a:latin typeface="+mn-lt"/>
-                <a:ea typeface="+mn-ea"/>
-                <a:cs typeface="+mn-cs"/>
-              </a:rPr>
-              <a:t>A = RQ:</a:t>
-            </a:r>
-          </a:p>
-          <a:p>
-            <a:pPr marL="171450" marR="0" indent="-171450" algn="l" defTabSz="914400" rtl="0" eaLnBrk="1" fontAlgn="auto" latinLnBrk="0" hangingPunct="1">
-              <a:lnSpc>
-                <a:spcPct val="100000"/>
-              </a:lnSpc>
-              <a:spcBef>
-                <a:spcPts val="0"/>
-              </a:spcBef>
-              <a:spcAft>
-                <a:spcPts val="0"/>
-              </a:spcAft>
-              <a:buClrTx/>
-              <a:buSzTx/>
-              <a:buFont typeface="Arial" charset="0"/>
-              <a:buChar char="•"/>
-              <a:tabLst/>
-              <a:defRPr/>
-            </a:pPr>
-            <a:endParaRPr lang="en-US" dirty="0"/>
-          </a:p>
-          <a:p>
-            <a:pPr marL="171450" marR="0" indent="-171450" algn="l" defTabSz="914400" rtl="0" eaLnBrk="1" fontAlgn="auto" latinLnBrk="0" hangingPunct="1">
-              <a:lnSpc>
-                <a:spcPct val="100000"/>
-              </a:lnSpc>
-              <a:spcBef>
-                <a:spcPts val="0"/>
-              </a:spcBef>
-              <a:spcAft>
-                <a:spcPts val="0"/>
-              </a:spcAft>
-              <a:buClrTx/>
-              <a:buSzTx/>
-              <a:buFont typeface="Arial" charset="0"/>
-              <a:buChar char="•"/>
-              <a:tabLst/>
-              <a:defRPr/>
-            </a:pPr>
-            <a:endParaRPr lang="en-US" sz="1200" kern="1200" dirty="0">
-              <a:solidFill>
-                <a:schemeClr val="tx1"/>
-              </a:solidFill>
-              <a:effectLst/>
-              <a:latin typeface="+mn-lt"/>
-              <a:ea typeface="+mn-ea"/>
-              <a:cs typeface="+mn-cs"/>
-            </a:endParaRPr>
-          </a:p>
-          <a:p>
-            <a:pPr marL="0" marR="0" indent="0" algn="l" defTabSz="914400" rtl="0" eaLnBrk="1" fontAlgn="auto" latinLnBrk="0" hangingPunct="1">
-              <a:lnSpc>
-                <a:spcPct val="100000"/>
-              </a:lnSpc>
-              <a:spcBef>
-                <a:spcPts val="0"/>
-              </a:spcBef>
-              <a:spcAft>
-                <a:spcPts val="0"/>
-              </a:spcAft>
-              <a:buClrTx/>
-              <a:buSzTx/>
-              <a:buFontTx/>
-              <a:buNone/>
-              <a:tabLst/>
-              <a:defRPr/>
-            </a:pPr>
-            <a:r>
-              <a:rPr lang="en-US" sz="1200" kern="1200" dirty="0">
-                <a:solidFill>
-                  <a:schemeClr val="tx1"/>
-                </a:solidFill>
-                <a:effectLst/>
-                <a:latin typeface="+mn-lt"/>
-                <a:ea typeface="+mn-ea"/>
-                <a:cs typeface="+mn-cs"/>
-              </a:rPr>
-              <a:t>\tilde P = [KR\quad </a:t>
-            </a:r>
-            <a:r>
-              <a:rPr lang="en-US" sz="1200" kern="1200" dirty="0" err="1">
-                <a:solidFill>
-                  <a:schemeClr val="tx1"/>
-                </a:solidFill>
-                <a:effectLst/>
-                <a:latin typeface="+mn-lt"/>
-                <a:ea typeface="+mn-ea"/>
-                <a:cs typeface="+mn-cs"/>
-              </a:rPr>
-              <a:t>Kt</a:t>
-            </a:r>
-            <a:r>
-              <a:rPr lang="en-US" sz="1200" kern="1200" dirty="0">
-                <a:solidFill>
-                  <a:schemeClr val="tx1"/>
-                </a:solidFill>
-                <a:effectLst/>
-                <a:latin typeface="+mn-lt"/>
-                <a:ea typeface="+mn-ea"/>
-                <a:cs typeface="+mn-cs"/>
-              </a:rPr>
-              <a:t>]</a:t>
-            </a:r>
-          </a:p>
-          <a:p>
             <a:endParaRPr lang="en-US" dirty="0"/>
           </a:p>
         </p:txBody>
@@ -5297,20 +1639,7 @@
               <a:buFont typeface="Arial" charset="0"/>
               <a:buChar char="•"/>
             </a:pPr>
-            <a:r>
-              <a:rPr lang="en-US" dirty="0"/>
-              <a:t>it is in general not possible to recover the structure of the 3D world  from just one image. This is due to the intrinsic ambiguity of the 3D to 2D mapping. </a:t>
-            </a:r>
-          </a:p>
-          <a:p>
-            <a:pPr marL="171450" indent="-171450">
-              <a:buFont typeface="Arial" charset="0"/>
-              <a:buChar char="•"/>
-            </a:pPr>
-            <a:r>
-              <a:rPr lang="en-US" dirty="0"/>
-              <a:t>Any point along the ray from the camera center O to a point p in the image (line of sight) is a possible candidate for the actual 3D point P. </a:t>
-            </a:r>
+            <a:endParaRPr lang="en-US" dirty="0"/>
           </a:p>
         </p:txBody>
       </p:sp>
@@ -5567,38 +1896,7 @@
               <a:buFont typeface="Arial" charset="0"/>
               <a:buChar char="•"/>
             </a:pPr>
-            <a:r>
-              <a:rPr lang="en-US" dirty="0"/>
-              <a:t>As we can see in this image, it is easy to fool our eyes. The </a:t>
-            </a:r>
-            <a:r>
-              <a:rPr lang="en-US" dirty="0" err="1"/>
-              <a:t>pisa</a:t>
-            </a:r>
-            <a:r>
-              <a:rPr lang="en-US" dirty="0"/>
-              <a:t> tower here is much further that the shoe of this person even if it looks like this person is kicking the tower! </a:t>
-            </a:r>
-          </a:p>
-          <a:p>
-            <a:pPr marL="171450" indent="-171450">
-              <a:buFont typeface="Arial" charset="0"/>
-              <a:buChar char="•"/>
-            </a:pPr>
-            <a:r>
-              <a:rPr lang="en-US" dirty="0"/>
-              <a:t>By careful inspection we could actually use the ground plane and the location of the object’s base as cues, and can figure out that the tower is actually in the background and that the person is in the foreground.</a:t>
-            </a:r>
-          </a:p>
-          <a:p>
-            <a:pPr marL="171450" indent="-171450">
-              <a:buFont typeface="Arial" charset="0"/>
-              <a:buChar char="•"/>
-            </a:pPr>
-            <a:r>
-              <a:rPr lang="en-US" dirty="0"/>
-              <a:t> If we use two eyes, or move our head a little bit, this illusion immediately disappears and we can perfectly figure out the correct scene layout. </a:t>
-            </a:r>
+            <a:endParaRPr lang="en-US" dirty="0"/>
           </a:p>
         </p:txBody>
       </p:sp>
@@ -5686,10 +1984,7 @@
               <a:buFont typeface="Arial" charset="0"/>
               <a:buChar char="•"/>
             </a:pPr>
-            <a:r>
-              <a:rPr lang="en-US" dirty="0"/>
-              <a:t>Four methods are possible</a:t>
-            </a:r>
+            <a:endParaRPr lang="en-US" dirty="0"/>
           </a:p>
         </p:txBody>
       </p:sp>
@@ -5777,108 +2072,6 @@
               <a:buFont typeface="Arial" charset="0"/>
               <a:buChar char="•"/>
             </a:pPr>
-            <a:r>
-              <a:rPr lang="en-US" dirty="0"/>
-              <a:t>What if</a:t>
-            </a:r>
-            <a:r>
-              <a:rPr lang="en-US" baseline="0" dirty="0"/>
-              <a:t> </a:t>
-            </a:r>
-            <a:r>
-              <a:rPr lang="en-US" dirty="0"/>
-              <a:t>there are two cameras observing the object? </a:t>
-            </a:r>
-          </a:p>
-          <a:p>
-            <a:pPr marL="171450" indent="-171450">
-              <a:buFont typeface="Arial" charset="0"/>
-              <a:buChar char="•"/>
-            </a:pPr>
-            <a:r>
-              <a:rPr lang="en-US" sz="1200" kern="1200" dirty="0">
-                <a:solidFill>
-                  <a:schemeClr val="tx1"/>
-                </a:solidFill>
-                <a:effectLst/>
-                <a:latin typeface="+mn-lt"/>
-                <a:ea typeface="+mn-ea"/>
-                <a:cs typeface="+mn-cs"/>
-              </a:rPr>
-              <a:t>Fusing the pictures recorded by our two eyes and exploiting the difference (or disparity) between them allows us to gain a strong sense of depth. </a:t>
-            </a:r>
-          </a:p>
-          <a:p>
-            <a:pPr marL="171450" indent="-171450">
-              <a:buFont typeface="Arial" charset="0"/>
-              <a:buChar char="•"/>
-            </a:pPr>
-            <a:r>
-              <a:rPr lang="en-US" sz="1200" kern="1200" dirty="0">
-                <a:solidFill>
-                  <a:schemeClr val="tx1"/>
-                </a:solidFill>
-                <a:effectLst/>
-                <a:latin typeface="+mn-lt"/>
-                <a:ea typeface="+mn-ea"/>
-                <a:cs typeface="+mn-cs"/>
-              </a:rPr>
-              <a:t>We now focus</a:t>
-            </a:r>
-            <a:r>
-              <a:rPr lang="en-US" sz="1200" kern="1200" baseline="0" dirty="0">
-                <a:solidFill>
-                  <a:schemeClr val="tx1"/>
-                </a:solidFill>
-                <a:effectLst/>
-                <a:latin typeface="+mn-lt"/>
-                <a:ea typeface="+mn-ea"/>
-                <a:cs typeface="+mn-cs"/>
-              </a:rPr>
-              <a:t> on </a:t>
-            </a:r>
-            <a:r>
-              <a:rPr lang="en-US" sz="1200" kern="1200" dirty="0">
-                <a:solidFill>
-                  <a:schemeClr val="tx1"/>
-                </a:solidFill>
-                <a:effectLst/>
-                <a:latin typeface="+mn-lt"/>
-                <a:ea typeface="+mn-ea"/>
-                <a:cs typeface="+mn-cs"/>
-              </a:rPr>
-              <a:t>the design and implementation of algorithms that mimic our ability</a:t>
-            </a:r>
-            <a:r>
-              <a:rPr lang="en-US" sz="1200" kern="1200" baseline="0" dirty="0">
-                <a:solidFill>
-                  <a:schemeClr val="tx1"/>
-                </a:solidFill>
-                <a:effectLst/>
-                <a:latin typeface="+mn-lt"/>
-                <a:ea typeface="+mn-ea"/>
-                <a:cs typeface="+mn-cs"/>
-              </a:rPr>
-              <a:t> </a:t>
-            </a:r>
-            <a:r>
-              <a:rPr lang="en-US" sz="1200" kern="1200" dirty="0">
-                <a:solidFill>
-                  <a:schemeClr val="tx1"/>
-                </a:solidFill>
-                <a:effectLst/>
-                <a:latin typeface="+mn-lt"/>
-                <a:ea typeface="+mn-ea"/>
-                <a:cs typeface="+mn-cs"/>
-              </a:rPr>
-              <a:t>to perform this task, known as stereopsis .</a:t>
-            </a:r>
-          </a:p>
-          <a:p>
-            <a:pPr marL="171450" indent="-171450">
-              <a:buFont typeface="Arial" charset="0"/>
-              <a:buChar char="•"/>
-            </a:pPr>
             <a:endParaRPr lang="en-US" dirty="0"/>
           </a:p>
         </p:txBody>
@@ -5963,179 +2156,6 @@
           <a:bodyPr/>
           <a:lstStyle/>
           <a:p>
-            <a:pPr marL="171450" indent="-171450">
-              <a:buFont typeface="Arial" charset="0"/>
-              <a:buChar char="•"/>
-            </a:pPr>
-            <a:r>
-              <a:rPr lang="en-US" dirty="0"/>
-              <a:t>Here’s how having two eyes (or alternately, cameras) help. Suppose we have two cameras with known camera intrinsic parameters K and K’, respectively, and known relative locations and orientations (i.e., we know the transformations R and T that relate the two camera reference systems). </a:t>
-            </a:r>
-          </a:p>
-          <a:p>
-            <a:pPr marL="171450" indent="-171450">
-              <a:buFont typeface="Arial" charset="0"/>
-              <a:buChar char="•"/>
-            </a:pPr>
-            <a:r>
-              <a:rPr lang="en-US" dirty="0"/>
-              <a:t>Suppose we have a point P in 3D. Let p and p’ be the observations of P in the images of camera 1 and 2, respectively. </a:t>
-            </a:r>
-          </a:p>
-          <a:p>
-            <a:pPr marL="171450" indent="-171450">
-              <a:buFont typeface="Arial" charset="0"/>
-              <a:buChar char="•"/>
-            </a:pPr>
-            <a:r>
-              <a:rPr lang="en-US" dirty="0"/>
-              <a:t>The location of P is unknown in the 3D space, but we can measure the locations of p and p’ in each image. Because K, K’, R and T are known, we can compute the two lines of sight l and l’ which are defined by O and p, and O’ and p’, respectively. </a:t>
-            </a:r>
-          </a:p>
-          <a:p>
-            <a:pPr marL="171450" indent="-171450">
-              <a:buFont typeface="Arial" charset="0"/>
-              <a:buChar char="•"/>
-            </a:pPr>
-            <a:r>
-              <a:rPr lang="en-US" dirty="0"/>
-              <a:t>Thus, P can be computed as the intersection point between l and l’. </a:t>
-            </a:r>
-          </a:p>
-          <a:p>
-            <a:pPr marL="171450" indent="-171450">
-              <a:buFont typeface="Arial" charset="0"/>
-              <a:buChar char="•"/>
-            </a:pPr>
-            <a:r>
-              <a:rPr lang="en-US" dirty="0"/>
-              <a:t>This process is known as Triangulation. </a:t>
-            </a:r>
-            <a:endParaRPr lang="en-US" sz="1200" kern="1200" dirty="0">
-              <a:solidFill>
-                <a:schemeClr val="tx1"/>
-              </a:solidFill>
-              <a:effectLst/>
-              <a:latin typeface="+mn-lt"/>
-              <a:ea typeface="+mn-ea"/>
-              <a:cs typeface="+mn-cs"/>
-            </a:endParaRPr>
-          </a:p>
-          <a:p>
-            <a:endParaRPr lang="en-US" sz="1200" kern="1200" dirty="0">
-              <a:solidFill>
-                <a:schemeClr val="tx1"/>
-              </a:solidFill>
-              <a:effectLst/>
-              <a:latin typeface="+mn-lt"/>
-              <a:ea typeface="+mn-ea"/>
-              <a:cs typeface="+mn-cs"/>
-            </a:endParaRPr>
-          </a:p>
-          <a:p>
-            <a:endParaRPr lang="en-US" sz="1200" kern="1200" dirty="0">
-              <a:solidFill>
-                <a:schemeClr val="tx1"/>
-              </a:solidFill>
-              <a:effectLst/>
-              <a:latin typeface="+mn-lt"/>
-              <a:ea typeface="+mn-ea"/>
-              <a:cs typeface="+mn-cs"/>
-            </a:endParaRPr>
-          </a:p>
-          <a:p>
-            <a:r>
-              <a:rPr lang="en-US" sz="1200" kern="1200" dirty="0">
-                <a:solidFill>
-                  <a:schemeClr val="tx1"/>
-                </a:solidFill>
-                <a:effectLst/>
-                <a:latin typeface="+mn-lt"/>
-                <a:ea typeface="+mn-ea"/>
-                <a:cs typeface="+mn-cs"/>
-              </a:rPr>
-              <a:t>\begin{cases}</a:t>
-            </a:r>
-          </a:p>
-          <a:p>
-            <a:r>
-              <a:rPr lang="en-US" sz="1200" kern="1200" dirty="0" err="1">
-                <a:solidFill>
-                  <a:schemeClr val="tx1"/>
-                </a:solidFill>
-                <a:effectLst/>
-                <a:latin typeface="+mn-lt"/>
-                <a:ea typeface="+mn-ea"/>
-                <a:cs typeface="+mn-cs"/>
-              </a:rPr>
-              <a:t>p^h</a:t>
-            </a:r>
-            <a:r>
-              <a:rPr lang="en-US" sz="1200" kern="1200" dirty="0">
-                <a:solidFill>
-                  <a:schemeClr val="tx1"/>
-                </a:solidFill>
-                <a:effectLst/>
-                <a:latin typeface="+mn-lt"/>
-                <a:ea typeface="+mn-ea"/>
-                <a:cs typeface="+mn-cs"/>
-              </a:rPr>
-              <a:t> \times M \, </a:t>
-            </a:r>
-            <a:r>
-              <a:rPr lang="en-US" sz="1200" kern="1200" dirty="0" err="1">
-                <a:solidFill>
-                  <a:schemeClr val="tx1"/>
-                </a:solidFill>
-                <a:effectLst/>
-                <a:latin typeface="+mn-lt"/>
-                <a:ea typeface="+mn-ea"/>
-                <a:cs typeface="+mn-cs"/>
-              </a:rPr>
-              <a:t>P^h</a:t>
-            </a:r>
-            <a:r>
-              <a:rPr lang="en-US" sz="1200" kern="1200" dirty="0">
-                <a:solidFill>
-                  <a:schemeClr val="tx1"/>
-                </a:solidFill>
-                <a:effectLst/>
-                <a:latin typeface="+mn-lt"/>
-                <a:ea typeface="+mn-ea"/>
-                <a:cs typeface="+mn-cs"/>
-              </a:rPr>
-              <a:t> = 0\\</a:t>
-            </a:r>
-          </a:p>
-          <a:p>
-            <a:r>
-              <a:rPr lang="en-US" sz="1200" kern="1200" dirty="0">
-                <a:solidFill>
-                  <a:schemeClr val="tx1"/>
-                </a:solidFill>
-                <a:effectLst/>
-                <a:latin typeface="+mn-lt"/>
-                <a:ea typeface="+mn-ea"/>
-                <a:cs typeface="+mn-cs"/>
-              </a:rPr>
-              <a:t>p^{h,\prime} \times M \, P^{h,\prime} = 0</a:t>
-            </a:r>
-          </a:p>
-          <a:p>
-            <a:r>
-              <a:rPr lang="en-US" sz="1200" kern="1200" dirty="0">
-                <a:solidFill>
-                  <a:schemeClr val="tx1"/>
-                </a:solidFill>
-                <a:effectLst/>
-                <a:latin typeface="+mn-lt"/>
-                <a:ea typeface="+mn-ea"/>
-                <a:cs typeface="+mn-cs"/>
-              </a:rPr>
-              <a:t>\end{cases}</a:t>
-            </a:r>
-          </a:p>
-          <a:p>
             <a:endParaRPr lang="en-US" dirty="0"/>
           </a:p>
         </p:txBody>
@@ -6224,55 +2244,7 @@
               <a:buFont typeface="Arial" charset="0"/>
               <a:buChar char="•"/>
             </a:pPr>
-            <a:r>
-              <a:rPr lang="en-US" dirty="0"/>
-              <a:t>In practice, because the observations p and p’ are noisy and the camera calibration parameters may not be accurately estimated, finding the intersection point P  may be problematic (in fact, the exact intersection point may not exist at all). </a:t>
-            </a:r>
-          </a:p>
-          <a:p>
-            <a:pPr marL="171450" indent="-171450">
-              <a:buFont typeface="Arial" charset="0"/>
-              <a:buChar char="•"/>
-            </a:pPr>
-            <a:r>
-              <a:rPr lang="en-US" dirty="0"/>
-              <a:t>Thus, the triangulation problem is often mathematically characterized by solving the minimization problem where we optimize the </a:t>
-            </a:r>
-            <a:r>
-              <a:rPr lang="en-US" i="1" dirty="0"/>
-              <a:t>reprojection error</a:t>
-            </a:r>
-            <a:r>
-              <a:rPr lang="en-US" dirty="0"/>
-              <a:t>, that is</a:t>
-            </a:r>
-          </a:p>
-          <a:p>
-            <a:pPr marL="171450" indent="-171450">
-              <a:buFont typeface="Arial" charset="0"/>
-              <a:buChar char="•"/>
-            </a:pPr>
-            <a:r>
-              <a:rPr lang="en-US" dirty="0"/>
-              <a:t>we seek to find a point Q in 3D that best approximates P by minimizing the re-projection error of Q in both images. </a:t>
-            </a:r>
-          </a:p>
-          <a:p>
             <a:endParaRPr lang="en-US" dirty="0"/>
-          </a:p>
-          <a:p>
-            <a:r>
-              <a:rPr lang="en-US" dirty="0"/>
-              <a:t>d^2(</a:t>
-            </a:r>
-            <a:r>
-              <a:rPr lang="en-US" dirty="0" err="1"/>
-              <a:t>p,q</a:t>
-            </a:r>
-            <a:r>
-              <a:rPr lang="en-US" dirty="0"/>
-              <a:t>) + d^2(p^{\prime}, q^{\prime})</a:t>
-            </a:r>
           </a:p>
         </p:txBody>
       </p:sp>
@@ -6356,27 +2328,7 @@
           <a:bodyPr/>
           <a:lstStyle/>
           <a:p>
-            <a:r>
-              <a:rPr lang="en-US" dirty="0"/>
-              <a:t>Structure from motion (</a:t>
-            </a:r>
-            <a:r>
-              <a:rPr lang="en-US" dirty="0" err="1"/>
-              <a:t>SfM</a:t>
-            </a:r>
-            <a:r>
-              <a:rPr lang="en-US" dirty="0"/>
-              <a:t>) is a photogrammetric range imaging technique for estimating three-dimensional structures from two-dimensional image sequences that may be coupled with local motion signals. </a:t>
-            </a:r>
-          </a:p>
-          <a:p>
             <a:endParaRPr lang="en-US" dirty="0"/>
-          </a:p>
-          <a:p>
-            <a:r>
-              <a:rPr lang="en-US" dirty="0"/>
-              <a:t>Optical flow or optic flow is the pattern of apparent motion of objects, surfaces, and edges in a visual scene caused by the relative motion between an observer and a scene</a:t>
-            </a:r>
           </a:p>
         </p:txBody>
       </p:sp>
@@ -6464,84 +2416,6 @@
               <a:buFont typeface="Arial" charset="0"/>
               <a:buChar char="•"/>
             </a:pPr>
-            <a:r>
-              <a:rPr lang="en-US" dirty="0"/>
-              <a:t>From now on we’ll focus on the pinhole camera model:</a:t>
-            </a:r>
-          </a:p>
-          <a:p>
-            <a:pPr marL="171450" indent="-171450">
-              <a:buFont typeface="Arial" charset="0"/>
-              <a:buChar char="•"/>
-            </a:pPr>
-            <a:endParaRPr lang="en-US" dirty="0"/>
-          </a:p>
-          <a:p>
-            <a:pPr marL="171450" indent="-171450">
-              <a:buFont typeface="Arial" charset="0"/>
-              <a:buChar char="•"/>
-            </a:pPr>
-            <a:r>
-              <a:rPr lang="en-US" dirty="0"/>
-              <a:t>We will start by discussing today in details the geometry of the pinhole camera model. All the results derived using this camera model also hold for the thin lens model</a:t>
-            </a:r>
-          </a:p>
-          <a:p>
-            <a:pPr marL="171450" indent="-171450">
-              <a:buFont typeface="Arial" charset="0"/>
-              <a:buChar char="•"/>
-            </a:pPr>
-            <a:r>
-              <a:rPr lang="en-US" dirty="0"/>
-              <a:t>As we discussed earlier, in the pinhole camera model, a point P in 3D (in the camera reference system) is mapped (projected) into a point P’ in the image plane.  </a:t>
-            </a:r>
-          </a:p>
-          <a:p>
-            <a:pPr marL="171450" indent="-171450">
-              <a:buFont typeface="Arial" charset="0"/>
-              <a:buChar char="•"/>
-            </a:pPr>
-            <a:r>
-              <a:rPr lang="en-US" dirty="0"/>
-              <a:t>This mapping or transformation is also referred to as Perspective projection.</a:t>
-            </a:r>
-          </a:p>
-          <a:p>
-            <a:pPr marL="171450" marR="0" indent="-171450" algn="l" defTabSz="914400" rtl="0" eaLnBrk="1" fontAlgn="auto" latinLnBrk="0" hangingPunct="1">
-              <a:lnSpc>
-                <a:spcPct val="100000"/>
-              </a:lnSpc>
-              <a:spcBef>
-                <a:spcPts val="0"/>
-              </a:spcBef>
-              <a:spcAft>
-                <a:spcPts val="0"/>
-              </a:spcAft>
-              <a:buClrTx/>
-              <a:buSzTx/>
-              <a:buFont typeface="Arial" charset="0"/>
-              <a:buChar char="•"/>
-              <a:tabLst/>
-              <a:defRPr/>
-            </a:pPr>
-            <a:r>
-              <a:rPr lang="en-US" dirty="0"/>
-              <a:t>The goal is to find how world points map in the camera image, that is</a:t>
-            </a:r>
-            <a:r>
-              <a:rPr lang="en-US" baseline="0" dirty="0"/>
-              <a:t> how  </a:t>
-            </a:r>
-            <a:r>
-              <a:rPr lang="en-US" dirty="0"/>
-              <a:t>to map any 3D point from the 3D world directly into a point in pixel coordinates in the digital image.</a:t>
-            </a:r>
-          </a:p>
-          <a:p>
-            <a:pPr marL="171450" indent="-171450">
-              <a:buFont typeface="Arial" charset="0"/>
-              <a:buChar char="•"/>
-            </a:pPr>
             <a:endParaRPr lang="en-US" dirty="0"/>
           </a:p>
         </p:txBody>
@@ -6626,42 +2500,15 @@
           <a:bodyPr/>
           <a:lstStyle/>
           <a:p>
-            <a:r>
-              <a:rPr lang="es-ES_tradnl" sz="1200" kern="1200">
-                <a:solidFill>
-                  <a:schemeClr val="tx1"/>
-                </a:solidFill>
-                <a:effectLst/>
-                <a:latin typeface="+mn-lt"/>
-                <a:ea typeface="+mn-ea"/>
-                <a:cs typeface="+mn-cs"/>
-              </a:rPr>
-              <a:t>\tilde x = f\, \frac{X_C}{Y_C} + \tilde x_0, \</a:t>
-            </a:r>
-            <a:r>
-              <a:rPr lang="es-ES_tradnl" sz="1200" kern="1200" err="1">
-                <a:solidFill>
-                  <a:schemeClr val="tx1"/>
-                </a:solidFill>
-                <a:effectLst/>
-                <a:latin typeface="+mn-lt"/>
-                <a:ea typeface="+mn-ea"/>
-                <a:cs typeface="+mn-cs"/>
-              </a:rPr>
-              <a:t>qquad</a:t>
-            </a:r>
-            <a:r>
-              <a:rPr lang="es-ES_tradnl" sz="1200" kern="1200">
-                <a:solidFill>
-                  <a:schemeClr val="tx1"/>
-                </a:solidFill>
-                <a:effectLst/>
-                <a:latin typeface="+mn-lt"/>
-                <a:ea typeface="+mn-ea"/>
-                <a:cs typeface="+mn-cs"/>
-              </a:rPr>
-              <a:t>  \tilde y = f\, \frac{Y_C}{Y_C} + \tilde y_0,</a:t>
-            </a:r>
+            <a:endParaRPr lang="es-ES_tradnl" sz="1200" kern="1200" dirty="0">
+              <a:solidFill>
+                <a:schemeClr val="tx1"/>
+              </a:solidFill>
+              <a:effectLst/>
+              <a:latin typeface="+mn-lt"/>
+              <a:ea typeface="+mn-ea"/>
+              <a:cs typeface="+mn-cs"/>
+            </a:endParaRPr>
           </a:p>
         </p:txBody>
       </p:sp>
@@ -6745,240 +2592,6 @@
           <a:bodyPr/>
           <a:lstStyle/>
           <a:p>
-            <a:pPr marL="171450" marR="0" indent="-171450" algn="l" defTabSz="914400" rtl="0" eaLnBrk="1" fontAlgn="auto" latinLnBrk="0" hangingPunct="1">
-              <a:lnSpc>
-                <a:spcPct val="100000"/>
-              </a:lnSpc>
-              <a:spcBef>
-                <a:spcPts val="0"/>
-              </a:spcBef>
-              <a:spcAft>
-                <a:spcPts val="0"/>
-              </a:spcAft>
-              <a:buClrTx/>
-              <a:buSzTx/>
-              <a:buFont typeface="Arial" charset="0"/>
-              <a:buChar char="•"/>
-              <a:tabLst/>
-              <a:defRPr/>
-            </a:pPr>
-            <a:r>
-              <a:rPr lang="en-US" dirty="0"/>
-              <a:t>The projection of 3D points into the image plane does not directly correspond to what we see in actual digital images (i.e., what we see in a display or monitor):</a:t>
-            </a:r>
-          </a:p>
-          <a:p>
-            <a:pPr marL="628650" marR="0" lvl="1" indent="-171450" algn="l" defTabSz="914400" rtl="0" eaLnBrk="1" fontAlgn="auto" latinLnBrk="0" hangingPunct="1">
-              <a:lnSpc>
-                <a:spcPct val="100000"/>
-              </a:lnSpc>
-              <a:spcBef>
-                <a:spcPts val="0"/>
-              </a:spcBef>
-              <a:spcAft>
-                <a:spcPts val="0"/>
-              </a:spcAft>
-              <a:buClrTx/>
-              <a:buSzTx/>
-              <a:buFont typeface="Arial" charset="0"/>
-              <a:buChar char="•"/>
-              <a:tabLst/>
-              <a:defRPr/>
-            </a:pPr>
-            <a:r>
-              <a:rPr lang="en-US" dirty="0"/>
-              <a:t> </a:t>
-            </a:r>
-            <a:r>
-              <a:rPr lang="en-US" dirty="0" err="1"/>
-              <a:t>i</a:t>
-            </a:r>
-            <a:r>
-              <a:rPr lang="en-US" dirty="0"/>
-              <a:t>) points in the digital display are, in general, in a different reference system than those in the image/retinal plane; </a:t>
-            </a:r>
-          </a:p>
-          <a:p>
-            <a:pPr marL="628650" marR="0" lvl="1" indent="-171450" algn="l" defTabSz="914400" rtl="0" eaLnBrk="1" fontAlgn="auto" latinLnBrk="0" hangingPunct="1">
-              <a:lnSpc>
-                <a:spcPct val="100000"/>
-              </a:lnSpc>
-              <a:spcBef>
-                <a:spcPts val="0"/>
-              </a:spcBef>
-              <a:spcAft>
-                <a:spcPts val="0"/>
-              </a:spcAft>
-              <a:buClrTx/>
-              <a:buSzTx/>
-              <a:buFont typeface="Arial" charset="0"/>
-              <a:buChar char="•"/>
-              <a:tabLst/>
-              <a:defRPr/>
-            </a:pPr>
-            <a:r>
-              <a:rPr lang="en-US" dirty="0"/>
-              <a:t>ii) Digital images are divided into pixels whereas points in the image/retina plane are measured in centimeters;</a:t>
-            </a:r>
-          </a:p>
-          <a:p>
-            <a:pPr marL="628650" marR="0" lvl="1" indent="-171450" algn="l" defTabSz="914400" rtl="0" eaLnBrk="1" fontAlgn="auto" latinLnBrk="0" hangingPunct="1">
-              <a:lnSpc>
-                <a:spcPct val="100000"/>
-              </a:lnSpc>
-              <a:spcBef>
-                <a:spcPts val="0"/>
-              </a:spcBef>
-              <a:spcAft>
-                <a:spcPts val="0"/>
-              </a:spcAft>
-              <a:buClrTx/>
-              <a:buSzTx/>
-              <a:buFont typeface="Arial" charset="0"/>
-              <a:buChar char="•"/>
-              <a:tabLst/>
-              <a:defRPr/>
-            </a:pPr>
-            <a:r>
-              <a:rPr lang="en-US" dirty="0"/>
-              <a:t> iii) The physical sensors can introduce non-linearity (e.g. distortion) to the mapping. </a:t>
-            </a:r>
-          </a:p>
-          <a:p>
-            <a:pPr marL="171450" marR="0" lvl="0" indent="-171450" algn="l" defTabSz="914400" rtl="0" eaLnBrk="1" fontAlgn="auto" latinLnBrk="0" hangingPunct="1">
-              <a:lnSpc>
-                <a:spcPct val="100000"/>
-              </a:lnSpc>
-              <a:spcBef>
-                <a:spcPts val="0"/>
-              </a:spcBef>
-              <a:spcAft>
-                <a:spcPts val="0"/>
-              </a:spcAft>
-              <a:buClrTx/>
-              <a:buSzTx/>
-              <a:buFont typeface="Arial" charset="0"/>
-              <a:buChar char="•"/>
-              <a:tabLst/>
-              <a:defRPr/>
-            </a:pPr>
-            <a:r>
-              <a:rPr lang="en-US" dirty="0"/>
-              <a:t>Specifically, digital images typically have their origin at the lower-left corner of the image. Thus, 2D points in the image plane and 2D points in a digital image are equal up to an offset translation vector [x0 , y0 ], </a:t>
-            </a:r>
-          </a:p>
-          <a:p>
-            <a:pPr marL="0" marR="0" indent="0" algn="l" defTabSz="914400" rtl="0" eaLnBrk="1" fontAlgn="auto" latinLnBrk="0" hangingPunct="1">
-              <a:lnSpc>
-                <a:spcPct val="100000"/>
-              </a:lnSpc>
-              <a:spcBef>
-                <a:spcPts val="0"/>
-              </a:spcBef>
-              <a:spcAft>
-                <a:spcPts val="0"/>
-              </a:spcAft>
-              <a:buClrTx/>
-              <a:buSzTx/>
-              <a:buFontTx/>
-              <a:buNone/>
-              <a:tabLst/>
-              <a:defRPr/>
-            </a:pPr>
-            <a:endParaRPr lang="en-US" sz="1200" kern="1200" dirty="0">
-              <a:solidFill>
-                <a:schemeClr val="tx1"/>
-              </a:solidFill>
-              <a:effectLst/>
-              <a:latin typeface="+mn-lt"/>
-              <a:ea typeface="+mn-ea"/>
-              <a:cs typeface="+mn-cs"/>
-            </a:endParaRPr>
-          </a:p>
-          <a:p>
-            <a:pPr marL="0" marR="0" indent="0" algn="l" defTabSz="914400" rtl="0" eaLnBrk="1" fontAlgn="auto" latinLnBrk="0" hangingPunct="1">
-              <a:lnSpc>
-                <a:spcPct val="100000"/>
-              </a:lnSpc>
-              <a:spcBef>
-                <a:spcPts val="0"/>
-              </a:spcBef>
-              <a:spcAft>
-                <a:spcPts val="0"/>
-              </a:spcAft>
-              <a:buClrTx/>
-              <a:buSzTx/>
-              <a:buFontTx/>
-              <a:buNone/>
-              <a:tabLst/>
-              <a:defRPr/>
-            </a:pPr>
-            <a:endParaRPr lang="es-ES_tradnl" sz="1200" kern="1200" dirty="0">
-              <a:solidFill>
-                <a:schemeClr val="tx1"/>
-              </a:solidFill>
-              <a:effectLst/>
-              <a:latin typeface="+mn-lt"/>
-              <a:ea typeface="+mn-ea"/>
-              <a:cs typeface="+mn-cs"/>
-            </a:endParaRPr>
-          </a:p>
-          <a:p>
-            <a:pPr marL="0" marR="0" indent="0" algn="l" defTabSz="914400" rtl="0" eaLnBrk="1" fontAlgn="auto" latinLnBrk="0" hangingPunct="1">
-              <a:lnSpc>
-                <a:spcPct val="100000"/>
-              </a:lnSpc>
-              <a:spcBef>
-                <a:spcPts val="0"/>
-              </a:spcBef>
-              <a:spcAft>
-                <a:spcPts val="0"/>
-              </a:spcAft>
-              <a:buClrTx/>
-              <a:buSzTx/>
-              <a:buFontTx/>
-              <a:buNone/>
-              <a:tabLst/>
-              <a:defRPr/>
-            </a:pPr>
-            <a:r>
-              <a:rPr lang="es-ES_tradnl" sz="1200" kern="1200" dirty="0">
-                <a:solidFill>
-                  <a:schemeClr val="tx1"/>
-                </a:solidFill>
-                <a:effectLst/>
-                <a:latin typeface="+mn-lt"/>
-                <a:ea typeface="+mn-ea"/>
-                <a:cs typeface="+mn-cs"/>
-              </a:rPr>
-              <a:t>\tilde x = f\, \frac{X_C}{Y_C} + \tilde x_0, \</a:t>
-            </a:r>
-            <a:r>
-              <a:rPr lang="es-ES_tradnl" sz="1200" kern="1200" dirty="0" err="1">
-                <a:solidFill>
-                  <a:schemeClr val="tx1"/>
-                </a:solidFill>
-                <a:effectLst/>
-                <a:latin typeface="+mn-lt"/>
-                <a:ea typeface="+mn-ea"/>
-                <a:cs typeface="+mn-cs"/>
-              </a:rPr>
-              <a:t>qquad</a:t>
-            </a:r>
-            <a:r>
-              <a:rPr lang="es-ES_tradnl" sz="1200" kern="1200" dirty="0">
-                <a:solidFill>
-                  <a:schemeClr val="tx1"/>
-                </a:solidFill>
-                <a:effectLst/>
-                <a:latin typeface="+mn-lt"/>
-                <a:ea typeface="+mn-ea"/>
-                <a:cs typeface="+mn-cs"/>
-              </a:rPr>
-              <a:t>  \tilde y = f\, \frac{Y_C}{Y_C} + \tilde y_0,</a:t>
-            </a:r>
-          </a:p>
-          <a:p>
             <a:endParaRPr lang="en-US" dirty="0"/>
           </a:p>
         </p:txBody>
@@ -7067,271 +2680,6 @@
               <a:buFont typeface="Arial" charset="0"/>
               <a:buChar char="•"/>
             </a:pPr>
-            <a:r>
-              <a:rPr lang="en-US" dirty="0"/>
-              <a:t>As second effect we need to take into account for is the fact that points in a digital image are expressed in pixels whereas points in the image</a:t>
-            </a:r>
-            <a:r>
-              <a:rPr lang="en-US" baseline="0" dirty="0"/>
-              <a:t> </a:t>
-            </a:r>
-            <a:r>
-              <a:rPr lang="en-US" dirty="0"/>
-              <a:t>plane are expressed in (e.g.) centimeters. </a:t>
-            </a:r>
-          </a:p>
-          <a:p>
-            <a:pPr marL="171450" indent="-171450">
-              <a:buFont typeface="Arial" charset="0"/>
-              <a:buChar char="•"/>
-            </a:pPr>
-            <a:r>
-              <a:rPr lang="en-US" dirty="0"/>
-              <a:t>In order to accommodate this further change of coordinate systems, the mapping is now described by [..]</a:t>
-            </a:r>
-          </a:p>
-          <a:p>
-            <a:pPr marL="171450" indent="-171450">
-              <a:buFont typeface="Arial" charset="0"/>
-              <a:buChar char="•"/>
-            </a:pPr>
-            <a:r>
-              <a:rPr lang="en-US" dirty="0"/>
-              <a:t>Notice that </a:t>
-            </a:r>
-            <a:r>
-              <a:rPr lang="en-US" dirty="0" err="1"/>
-              <a:t>k_x</a:t>
-            </a:r>
-            <a:r>
-              <a:rPr lang="en-US" dirty="0"/>
-              <a:t> is different from </a:t>
-            </a:r>
-            <a:r>
-              <a:rPr lang="en-US" dirty="0" err="1"/>
-              <a:t>k_y</a:t>
-            </a:r>
-            <a:r>
-              <a:rPr lang="en-US" dirty="0"/>
-              <a:t> because the aspect ratio of the unit element of the sensor (CCD or CMOS) is not necessarily 1 or the pixel aspect ratio is modified by the imaging system.</a:t>
-            </a:r>
-          </a:p>
-          <a:p>
-            <a:pPr marL="171450" indent="-171450">
-              <a:buFont typeface="Arial" charset="0"/>
-              <a:buChar char="•"/>
-            </a:pPr>
-            <a:r>
-              <a:rPr lang="en-US" sz="1200" kern="1200" dirty="0">
-                <a:solidFill>
-                  <a:schemeClr val="tx1"/>
-                </a:solidFill>
-                <a:effectLst/>
-                <a:latin typeface="+mn-lt"/>
-                <a:ea typeface="+mn-ea"/>
-                <a:cs typeface="+mn-cs"/>
-              </a:rPr>
-              <a:t>Thi</a:t>
-            </a:r>
-            <a:r>
-              <a:rPr lang="en-US" sz="1200" kern="1200" baseline="0" dirty="0">
-                <a:solidFill>
-                  <a:schemeClr val="tx1"/>
-                </a:solidFill>
-                <a:effectLst/>
-                <a:latin typeface="+mn-lt"/>
-                <a:ea typeface="+mn-ea"/>
-                <a:cs typeface="+mn-cs"/>
-              </a:rPr>
-              <a:t>s is a non-linear transformation</a:t>
-            </a:r>
-          </a:p>
-          <a:p>
-            <a:pPr marL="171450" indent="-171450">
-              <a:buFont typeface="Arial" charset="0"/>
-              <a:buChar char="•"/>
-            </a:pPr>
-            <a:r>
-              <a:rPr lang="en-US" dirty="0"/>
-              <a:t>It is easy to show that a linear transformation (mapping) can be always be expressed as a product of a matrix and the input signal [x y z]T . Is there a way we can express the</a:t>
-            </a:r>
-            <a:r>
-              <a:rPr lang="en-US" baseline="0" dirty="0"/>
-              <a:t> projective equation</a:t>
-            </a:r>
-            <a:r>
-              <a:rPr lang="en-US" dirty="0"/>
-              <a:t> as product of a matrix and the vector [X Y Z]? </a:t>
-            </a:r>
-            <a:endParaRPr lang="de-DE" sz="1200" kern="1200" dirty="0">
-              <a:solidFill>
-                <a:schemeClr val="tx1"/>
-              </a:solidFill>
-              <a:effectLst/>
-              <a:latin typeface="+mn-lt"/>
-              <a:ea typeface="+mn-ea"/>
-              <a:cs typeface="+mn-cs"/>
-            </a:endParaRPr>
-          </a:p>
-          <a:p>
-            <a:endParaRPr lang="de-DE" sz="1200" kern="1200" dirty="0">
-              <a:solidFill>
-                <a:schemeClr val="tx1"/>
-              </a:solidFill>
-              <a:effectLst/>
-              <a:latin typeface="+mn-lt"/>
-              <a:ea typeface="+mn-ea"/>
-              <a:cs typeface="+mn-cs"/>
-            </a:endParaRPr>
-          </a:p>
-          <a:p>
-            <a:endParaRPr lang="de-DE" sz="1200" kern="1200" dirty="0">
-              <a:solidFill>
-                <a:schemeClr val="tx1"/>
-              </a:solidFill>
-              <a:effectLst/>
-              <a:latin typeface="+mn-lt"/>
-              <a:ea typeface="+mn-ea"/>
-              <a:cs typeface="+mn-cs"/>
-            </a:endParaRPr>
-          </a:p>
-          <a:p>
-            <a:r>
-              <a:rPr lang="de-DE" sz="1200" kern="1200" dirty="0" err="1">
-                <a:solidFill>
-                  <a:schemeClr val="tx1"/>
-                </a:solidFill>
-                <a:effectLst/>
-                <a:latin typeface="+mn-lt"/>
-                <a:ea typeface="+mn-ea"/>
-                <a:cs typeface="+mn-cs"/>
-              </a:rPr>
-              <a:t>u</a:t>
-            </a:r>
-            <a:r>
-              <a:rPr lang="de-DE" sz="1200" kern="1200" dirty="0">
-                <a:solidFill>
-                  <a:schemeClr val="tx1"/>
-                </a:solidFill>
-                <a:effectLst/>
-                <a:latin typeface="+mn-lt"/>
-                <a:ea typeface="+mn-ea"/>
-                <a:cs typeface="+mn-cs"/>
-              </a:rPr>
-              <a:t>&amp;= \</a:t>
-            </a:r>
-            <a:r>
-              <a:rPr lang="de-DE" sz="1200" kern="1200" dirty="0" err="1">
-                <a:solidFill>
-                  <a:schemeClr val="tx1"/>
-                </a:solidFill>
-                <a:effectLst/>
-                <a:latin typeface="+mn-lt"/>
-                <a:ea typeface="+mn-ea"/>
-                <a:cs typeface="+mn-cs"/>
-              </a:rPr>
-              <a:t>alpha_u</a:t>
-            </a:r>
-            <a:r>
-              <a:rPr lang="de-DE" sz="1200" kern="1200" dirty="0">
-                <a:solidFill>
-                  <a:schemeClr val="tx1"/>
-                </a:solidFill>
-                <a:effectLst/>
-                <a:latin typeface="+mn-lt"/>
-                <a:ea typeface="+mn-ea"/>
-                <a:cs typeface="+mn-cs"/>
-              </a:rPr>
-              <a:t> \</a:t>
-            </a:r>
-            <a:r>
-              <a:rPr lang="de-DE" sz="1200" kern="1200" dirty="0" err="1">
-                <a:solidFill>
-                  <a:schemeClr val="tx1"/>
-                </a:solidFill>
-                <a:effectLst/>
-                <a:latin typeface="+mn-lt"/>
-                <a:ea typeface="+mn-ea"/>
-                <a:cs typeface="+mn-cs"/>
-              </a:rPr>
-              <a:t>frac</a:t>
-            </a:r>
-            <a:r>
-              <a:rPr lang="de-DE" sz="1200" kern="1200" dirty="0">
-                <a:solidFill>
-                  <a:schemeClr val="tx1"/>
-                </a:solidFill>
-                <a:effectLst/>
-                <a:latin typeface="+mn-lt"/>
-                <a:ea typeface="+mn-ea"/>
-                <a:cs typeface="+mn-cs"/>
-              </a:rPr>
-              <a:t>{X_C}{Z_C} + u_0   \\</a:t>
-            </a:r>
-          </a:p>
-          <a:p>
-            <a:r>
-              <a:rPr lang="de-DE" sz="1200" kern="1200" dirty="0">
-                <a:solidFill>
-                  <a:schemeClr val="tx1"/>
-                </a:solidFill>
-                <a:effectLst/>
-                <a:latin typeface="+mn-lt"/>
-                <a:ea typeface="+mn-ea"/>
-                <a:cs typeface="+mn-cs"/>
-              </a:rPr>
-              <a:t>v&amp;= \</a:t>
-            </a:r>
-            <a:r>
-              <a:rPr lang="de-DE" sz="1200" kern="1200" dirty="0" err="1">
-                <a:solidFill>
-                  <a:schemeClr val="tx1"/>
-                </a:solidFill>
-                <a:effectLst/>
-                <a:latin typeface="+mn-lt"/>
-                <a:ea typeface="+mn-ea"/>
-                <a:cs typeface="+mn-cs"/>
-              </a:rPr>
-              <a:t>alpha_v</a:t>
-            </a:r>
-            <a:r>
-              <a:rPr lang="de-DE" sz="1200" kern="1200" dirty="0">
-                <a:solidFill>
-                  <a:schemeClr val="tx1"/>
-                </a:solidFill>
-                <a:effectLst/>
-                <a:latin typeface="+mn-lt"/>
-                <a:ea typeface="+mn-ea"/>
-                <a:cs typeface="+mn-cs"/>
-              </a:rPr>
-              <a:t>  \</a:t>
-            </a:r>
-            <a:r>
-              <a:rPr lang="de-DE" sz="1200" kern="1200" dirty="0" err="1">
-                <a:solidFill>
-                  <a:schemeClr val="tx1"/>
-                </a:solidFill>
-                <a:effectLst/>
-                <a:latin typeface="+mn-lt"/>
-                <a:ea typeface="+mn-ea"/>
-                <a:cs typeface="+mn-cs"/>
-              </a:rPr>
-              <a:t>frac</a:t>
-            </a:r>
-            <a:r>
-              <a:rPr lang="de-DE" sz="1200" kern="1200" dirty="0">
-                <a:solidFill>
-                  <a:schemeClr val="tx1"/>
-                </a:solidFill>
-                <a:effectLst/>
-                <a:latin typeface="+mn-lt"/>
-                <a:ea typeface="+mn-ea"/>
-                <a:cs typeface="+mn-cs"/>
-              </a:rPr>
-              <a:t>{Y_C}{Z_C} + v_0</a:t>
-            </a:r>
-          </a:p>
-          <a:p>
             <a:endParaRPr lang="es-ES_tradnl" sz="1200" kern="1200" dirty="0">
               <a:solidFill>
                 <a:schemeClr val="tx1"/>
@@ -7341,189 +2689,6 @@
               <a:ea typeface="+mn-ea"/>
               <a:cs typeface="+mn-cs"/>
             </a:endParaRPr>
-          </a:p>
-          <a:p>
-            <a:endParaRPr lang="es-ES_tradnl" sz="1200" kern="1200" dirty="0">
-              <a:solidFill>
-                <a:schemeClr val="tx1"/>
-              </a:solidFill>
-              <a:effectLst/>
-              <a:latin typeface="+mn-lt"/>
-              <a:ea typeface="+mn-ea"/>
-              <a:cs typeface="+mn-cs"/>
-            </a:endParaRPr>
-          </a:p>
-          <a:p>
-            <a:r>
-              <a:rPr lang="es-ES_tradnl" sz="1200" kern="1200" dirty="0">
-                <a:solidFill>
-                  <a:schemeClr val="tx1"/>
-                </a:solidFill>
-                <a:effectLst/>
-                <a:latin typeface="+mn-lt"/>
-                <a:ea typeface="+mn-ea"/>
-                <a:cs typeface="+mn-cs"/>
-              </a:rPr>
-              <a:t>u&amp;= </a:t>
-            </a:r>
-            <a:r>
-              <a:rPr lang="es-ES_tradnl" sz="1200" kern="1200" dirty="0" err="1">
-                <a:solidFill>
-                  <a:schemeClr val="tx1"/>
-                </a:solidFill>
-                <a:effectLst/>
-                <a:latin typeface="+mn-lt"/>
-                <a:ea typeface="+mn-ea"/>
-                <a:cs typeface="+mn-cs"/>
-              </a:rPr>
-              <a:t>k_x</a:t>
-            </a:r>
-            <a:r>
-              <a:rPr lang="es-ES_tradnl" sz="1200" kern="1200" dirty="0">
-                <a:solidFill>
-                  <a:schemeClr val="tx1"/>
-                </a:solidFill>
-                <a:effectLst/>
-                <a:latin typeface="+mn-lt"/>
-                <a:ea typeface="+mn-ea"/>
-                <a:cs typeface="+mn-cs"/>
-              </a:rPr>
-              <a:t> \tilde x = </a:t>
-            </a:r>
-            <a:r>
-              <a:rPr lang="es-ES_tradnl" sz="1200" kern="1200" dirty="0" err="1">
-                <a:solidFill>
-                  <a:schemeClr val="tx1"/>
-                </a:solidFill>
-                <a:effectLst/>
-                <a:latin typeface="+mn-lt"/>
-                <a:ea typeface="+mn-ea"/>
-                <a:cs typeface="+mn-cs"/>
-              </a:rPr>
-              <a:t>k_x</a:t>
-            </a:r>
-            <a:r>
-              <a:rPr lang="es-ES_tradnl" sz="1200" kern="1200" dirty="0">
-                <a:solidFill>
-                  <a:schemeClr val="tx1"/>
-                </a:solidFill>
-                <a:effectLst/>
-                <a:latin typeface="+mn-lt"/>
-                <a:ea typeface="+mn-ea"/>
-                <a:cs typeface="+mn-cs"/>
-              </a:rPr>
-              <a:t>\, f\, \frac{X_C}{Z_C} + </a:t>
-            </a:r>
-            <a:r>
-              <a:rPr lang="es-ES_tradnl" sz="1200" kern="1200" dirty="0" err="1">
-                <a:solidFill>
-                  <a:schemeClr val="tx1"/>
-                </a:solidFill>
-                <a:effectLst/>
-                <a:latin typeface="+mn-lt"/>
-                <a:ea typeface="+mn-ea"/>
-                <a:cs typeface="+mn-cs"/>
-              </a:rPr>
-              <a:t>k_x</a:t>
-            </a:r>
-            <a:r>
-              <a:rPr lang="es-ES_tradnl" sz="1200" kern="1200" dirty="0">
-                <a:solidFill>
-                  <a:schemeClr val="tx1"/>
-                </a:solidFill>
-                <a:effectLst/>
-                <a:latin typeface="+mn-lt"/>
-                <a:ea typeface="+mn-ea"/>
-                <a:cs typeface="+mn-cs"/>
-              </a:rPr>
-              <a:t> \tilde x_0   \\</a:t>
-            </a:r>
-          </a:p>
-          <a:p>
-            <a:r>
-              <a:rPr lang="es-ES_tradnl" sz="1200" kern="1200" dirty="0">
-                <a:solidFill>
-                  <a:schemeClr val="tx1"/>
-                </a:solidFill>
-                <a:effectLst/>
-                <a:latin typeface="+mn-lt"/>
-                <a:ea typeface="+mn-ea"/>
-                <a:cs typeface="+mn-cs"/>
-              </a:rPr>
-              <a:t>v&amp;= </a:t>
-            </a:r>
-            <a:r>
-              <a:rPr lang="es-ES_tradnl" sz="1200" kern="1200" dirty="0" err="1">
-                <a:solidFill>
-                  <a:schemeClr val="tx1"/>
-                </a:solidFill>
-                <a:effectLst/>
-                <a:latin typeface="+mn-lt"/>
-                <a:ea typeface="+mn-ea"/>
-                <a:cs typeface="+mn-cs"/>
-              </a:rPr>
-              <a:t>k_y</a:t>
-            </a:r>
-            <a:r>
-              <a:rPr lang="es-ES_tradnl" sz="1200" kern="1200" dirty="0">
-                <a:solidFill>
-                  <a:schemeClr val="tx1"/>
-                </a:solidFill>
-                <a:effectLst/>
-                <a:latin typeface="+mn-lt"/>
-                <a:ea typeface="+mn-ea"/>
-                <a:cs typeface="+mn-cs"/>
-              </a:rPr>
-              <a:t>\tilde y = </a:t>
-            </a:r>
-            <a:r>
-              <a:rPr lang="es-ES_tradnl" sz="1200" kern="1200" dirty="0" err="1">
-                <a:solidFill>
-                  <a:schemeClr val="tx1"/>
-                </a:solidFill>
-                <a:effectLst/>
-                <a:latin typeface="+mn-lt"/>
-                <a:ea typeface="+mn-ea"/>
-                <a:cs typeface="+mn-cs"/>
-              </a:rPr>
-              <a:t>k_yf</a:t>
-            </a:r>
-            <a:r>
-              <a:rPr lang="es-ES_tradnl" sz="1200" kern="1200" dirty="0">
-                <a:solidFill>
-                  <a:schemeClr val="tx1"/>
-                </a:solidFill>
-                <a:effectLst/>
-                <a:latin typeface="+mn-lt"/>
-                <a:ea typeface="+mn-ea"/>
-                <a:cs typeface="+mn-cs"/>
-              </a:rPr>
-              <a:t>\, \frac{Y_C}{Z_C} + </a:t>
-            </a:r>
-            <a:r>
-              <a:rPr lang="es-ES_tradnl" sz="1200" kern="1200" dirty="0" err="1">
-                <a:solidFill>
-                  <a:schemeClr val="tx1"/>
-                </a:solidFill>
-                <a:effectLst/>
-                <a:latin typeface="+mn-lt"/>
-                <a:ea typeface="+mn-ea"/>
-                <a:cs typeface="+mn-cs"/>
-              </a:rPr>
-              <a:t>k_y</a:t>
-            </a:r>
-            <a:r>
-              <a:rPr lang="es-ES_tradnl" sz="1200" kern="1200" dirty="0">
-                <a:solidFill>
-                  <a:schemeClr val="tx1"/>
-                </a:solidFill>
-                <a:effectLst/>
-                <a:latin typeface="+mn-lt"/>
-                <a:ea typeface="+mn-ea"/>
-                <a:cs typeface="+mn-cs"/>
-              </a:rPr>
-              <a:t>\tilde y_0</a:t>
-            </a:r>
           </a:p>
         </p:txBody>
       </p:sp>
@@ -7611,82 +2776,6 @@
               <a:buFont typeface="Arial" charset="0"/>
               <a:buChar char="•"/>
             </a:pPr>
-            <a:r>
-              <a:rPr lang="en-US" dirty="0"/>
-              <a:t>One way to get around this problem is to change coordinate system and go from the Euclidean reference system (our original coordinate system) to the so called Homogenous coordinate system --- a new</a:t>
-            </a:r>
-            <a:r>
-              <a:rPr lang="en-US" baseline="0" dirty="0"/>
-              <a:t> </a:t>
-            </a:r>
-            <a:r>
-              <a:rPr lang="en-US" sz="1200" b="0" i="0" kern="1200" dirty="0">
-                <a:solidFill>
-                  <a:schemeClr val="tx1"/>
-                </a:solidFill>
-                <a:effectLst/>
-                <a:latin typeface="+mn-lt"/>
-                <a:ea typeface="+mn-ea"/>
-                <a:cs typeface="+mn-cs"/>
-              </a:rPr>
-              <a:t>system of coordinates ubiquitous in projective geometry</a:t>
-            </a:r>
-            <a:r>
-              <a:rPr lang="en-US" dirty="0"/>
-              <a:t>. </a:t>
-            </a:r>
-          </a:p>
-          <a:p>
-            <a:pPr marL="171450" indent="-171450">
-              <a:buFont typeface="Arial" charset="0"/>
-              <a:buChar char="•"/>
-            </a:pPr>
-            <a:r>
-              <a:rPr lang="en-US" dirty="0"/>
-              <a:t>The process of going back and forth from Euclidean and Homogenous coordinate system is non-linear, but the good news is that once we are in the homogenous coordinate system a projective transformation  becomes linear. </a:t>
-            </a:r>
-          </a:p>
-          <a:p>
-            <a:pPr marL="171450" indent="-171450">
-              <a:buFont typeface="Arial" charset="0"/>
-              <a:buChar char="•"/>
-            </a:pPr>
-            <a:r>
-              <a:rPr lang="en-US" dirty="0"/>
-              <a:t>a point X in Rn (in the Euclidean coordinate system) is represented as Rn+1 vector (in the Homogenous coordinate system) by adding a final coordinate of 1.</a:t>
-            </a:r>
-          </a:p>
-          <a:p>
-            <a:pPr marL="171450" indent="-171450">
-              <a:buFont typeface="Arial" charset="0"/>
-              <a:buChar char="•"/>
-            </a:pPr>
-            <a:r>
-              <a:rPr lang="en-US" dirty="0"/>
-              <a:t>A</a:t>
-            </a:r>
-            <a:r>
-              <a:rPr lang="en-US" baseline="0" dirty="0"/>
-              <a:t> </a:t>
-            </a:r>
-            <a:r>
-              <a:rPr lang="en-US" dirty="0"/>
-              <a:t>generic point X in Rn+1 (in the Homogenous coordinate system) is represented as a Rn vector (in the Euclidean coordinate system) by suppressing the last coordinate and dividing the first n coordinates of X by the n+1th coordinate. </a:t>
-            </a:r>
-          </a:p>
-          <a:p>
-            <a:pPr marL="171450" indent="-171450">
-              <a:buFont typeface="Arial" charset="0"/>
-              <a:buChar char="•"/>
-            </a:pPr>
-            <a:r>
-              <a:rPr lang="en-US" dirty="0"/>
-              <a:t>The benefit of this will</a:t>
-            </a:r>
-            <a:r>
-              <a:rPr lang="en-US" baseline="0" dirty="0"/>
-              <a:t> become clear in a second</a:t>
-            </a:r>
             <a:endParaRPr lang="en-US" sz="1200" kern="1200" dirty="0">
               <a:solidFill>
                 <a:schemeClr val="tx1"/>
@@ -7696,1675 +2785,6 @@
               <a:ea typeface="+mn-ea"/>
               <a:cs typeface="+mn-cs"/>
             </a:endParaRPr>
-          </a:p>
-          <a:p>
-            <a:endParaRPr lang="en-US" sz="1200" kern="1200" dirty="0">
-              <a:solidFill>
-                <a:schemeClr val="tx1"/>
-              </a:solidFill>
-              <a:effectLst/>
-              <a:latin typeface="+mn-lt"/>
-              <a:ea typeface="+mn-ea"/>
-              <a:cs typeface="+mn-cs"/>
-            </a:endParaRPr>
-          </a:p>
-          <a:p>
-            <a:endParaRPr lang="en-US" sz="1200" kern="1200" dirty="0">
-              <a:solidFill>
-                <a:schemeClr val="tx1"/>
-              </a:solidFill>
-              <a:effectLst/>
-              <a:latin typeface="+mn-lt"/>
-              <a:ea typeface="+mn-ea"/>
-              <a:cs typeface="+mn-cs"/>
-            </a:endParaRPr>
-          </a:p>
-          <a:p>
-            <a:endParaRPr lang="en-US" sz="1200" kern="1200" dirty="0">
-              <a:solidFill>
-                <a:schemeClr val="tx1"/>
-              </a:solidFill>
-              <a:effectLst/>
-              <a:latin typeface="+mn-lt"/>
-              <a:ea typeface="+mn-ea"/>
-              <a:cs typeface="+mn-cs"/>
-            </a:endParaRPr>
-          </a:p>
-          <a:p>
-            <a:r>
-              <a:rPr lang="en-US" sz="1200" kern="1200" dirty="0">
-                <a:solidFill>
-                  <a:schemeClr val="tx1"/>
-                </a:solidFill>
-                <a:effectLst/>
-                <a:latin typeface="+mn-lt"/>
-                <a:ea typeface="+mn-ea"/>
-                <a:cs typeface="+mn-cs"/>
-              </a:rPr>
-              <a:t>\begin{</a:t>
-            </a:r>
-            <a:r>
-              <a:rPr lang="en-US" sz="1200" kern="1200" dirty="0" err="1">
-                <a:solidFill>
-                  <a:schemeClr val="tx1"/>
-                </a:solidFill>
-                <a:effectLst/>
-                <a:latin typeface="+mn-lt"/>
-                <a:ea typeface="+mn-ea"/>
-                <a:cs typeface="+mn-cs"/>
-              </a:rPr>
-              <a:t>pmatrix</a:t>
-            </a:r>
-            <a:r>
-              <a:rPr lang="en-US" sz="1200" kern="1200" dirty="0">
-                <a:solidFill>
-                  <a:schemeClr val="tx1"/>
-                </a:solidFill>
-                <a:effectLst/>
-                <a:latin typeface="+mn-lt"/>
-                <a:ea typeface="+mn-ea"/>
-                <a:cs typeface="+mn-cs"/>
-              </a:rPr>
-              <a:t>}</a:t>
-            </a:r>
-          </a:p>
-          <a:p>
-            <a:r>
-              <a:rPr lang="en-US" sz="1200" kern="1200" dirty="0">
-                <a:solidFill>
-                  <a:schemeClr val="tx1"/>
-                </a:solidFill>
-                <a:effectLst/>
-                <a:latin typeface="+mn-lt"/>
-                <a:ea typeface="+mn-ea"/>
-                <a:cs typeface="+mn-cs"/>
-              </a:rPr>
-              <a:t>x\\</a:t>
-            </a:r>
-          </a:p>
-          <a:p>
-            <a:r>
-              <a:rPr lang="en-US" sz="1200" kern="1200" dirty="0">
-                <a:solidFill>
-                  <a:schemeClr val="tx1"/>
-                </a:solidFill>
-                <a:effectLst/>
-                <a:latin typeface="+mn-lt"/>
-                <a:ea typeface="+mn-ea"/>
-                <a:cs typeface="+mn-cs"/>
-              </a:rPr>
-              <a:t>y</a:t>
-            </a:r>
-          </a:p>
-          <a:p>
-            <a:r>
-              <a:rPr lang="en-US" sz="1200" kern="1200" dirty="0">
-                <a:solidFill>
-                  <a:schemeClr val="tx1"/>
-                </a:solidFill>
-                <a:effectLst/>
-                <a:latin typeface="+mn-lt"/>
-                <a:ea typeface="+mn-ea"/>
-                <a:cs typeface="+mn-cs"/>
-              </a:rPr>
-              <a:t>\end{</a:t>
-            </a:r>
-            <a:r>
-              <a:rPr lang="en-US" sz="1200" kern="1200" dirty="0" err="1">
-                <a:solidFill>
-                  <a:schemeClr val="tx1"/>
-                </a:solidFill>
-                <a:effectLst/>
-                <a:latin typeface="+mn-lt"/>
-                <a:ea typeface="+mn-ea"/>
-                <a:cs typeface="+mn-cs"/>
-              </a:rPr>
-              <a:t>pmatrix</a:t>
-            </a:r>
-            <a:r>
-              <a:rPr lang="en-US" sz="1200" kern="1200" dirty="0">
-                <a:solidFill>
-                  <a:schemeClr val="tx1"/>
-                </a:solidFill>
-                <a:effectLst/>
-                <a:latin typeface="+mn-lt"/>
-                <a:ea typeface="+mn-ea"/>
-                <a:cs typeface="+mn-cs"/>
-              </a:rPr>
-              <a:t>} \</a:t>
-            </a:r>
-            <a:r>
-              <a:rPr lang="en-US" sz="1200" kern="1200" dirty="0" err="1">
-                <a:solidFill>
-                  <a:schemeClr val="tx1"/>
-                </a:solidFill>
-                <a:effectLst/>
-                <a:latin typeface="+mn-lt"/>
-                <a:ea typeface="+mn-ea"/>
-                <a:cs typeface="+mn-cs"/>
-              </a:rPr>
-              <a:t>Rightarrow</a:t>
-            </a:r>
-            <a:r>
-              <a:rPr lang="en-US" sz="1200" kern="1200" dirty="0">
-                <a:solidFill>
-                  <a:schemeClr val="tx1"/>
-                </a:solidFill>
-                <a:effectLst/>
-                <a:latin typeface="+mn-lt"/>
-                <a:ea typeface="+mn-ea"/>
-                <a:cs typeface="+mn-cs"/>
-              </a:rPr>
-              <a:t> \begin{</a:t>
-            </a:r>
-            <a:r>
-              <a:rPr lang="en-US" sz="1200" kern="1200" dirty="0" err="1">
-                <a:solidFill>
-                  <a:schemeClr val="tx1"/>
-                </a:solidFill>
-                <a:effectLst/>
-                <a:latin typeface="+mn-lt"/>
-                <a:ea typeface="+mn-ea"/>
-                <a:cs typeface="+mn-cs"/>
-              </a:rPr>
-              <a:t>pmatrix</a:t>
-            </a:r>
-            <a:r>
-              <a:rPr lang="en-US" sz="1200" kern="1200" dirty="0">
-                <a:solidFill>
-                  <a:schemeClr val="tx1"/>
-                </a:solidFill>
-                <a:effectLst/>
-                <a:latin typeface="+mn-lt"/>
-                <a:ea typeface="+mn-ea"/>
-                <a:cs typeface="+mn-cs"/>
-              </a:rPr>
-              <a:t>}</a:t>
-            </a:r>
-          </a:p>
-          <a:p>
-            <a:r>
-              <a:rPr lang="en-US" sz="1200" kern="1200" dirty="0">
-                <a:solidFill>
-                  <a:schemeClr val="tx1"/>
-                </a:solidFill>
-                <a:effectLst/>
-                <a:latin typeface="+mn-lt"/>
-                <a:ea typeface="+mn-ea"/>
-                <a:cs typeface="+mn-cs"/>
-              </a:rPr>
-              <a:t>x\\</a:t>
-            </a:r>
-          </a:p>
-          <a:p>
-            <a:r>
-              <a:rPr lang="en-US" sz="1200" kern="1200" dirty="0">
-                <a:solidFill>
-                  <a:schemeClr val="tx1"/>
-                </a:solidFill>
-                <a:effectLst/>
-                <a:latin typeface="+mn-lt"/>
-                <a:ea typeface="+mn-ea"/>
-                <a:cs typeface="+mn-cs"/>
-              </a:rPr>
-              <a:t>y\\</a:t>
-            </a:r>
-          </a:p>
-          <a:p>
-            <a:r>
-              <a:rPr lang="en-US" sz="1200" kern="1200" dirty="0">
-                <a:solidFill>
-                  <a:schemeClr val="tx1"/>
-                </a:solidFill>
-                <a:effectLst/>
-                <a:latin typeface="+mn-lt"/>
-                <a:ea typeface="+mn-ea"/>
-                <a:cs typeface="+mn-cs"/>
-              </a:rPr>
-              <a:t>1</a:t>
-            </a:r>
-          </a:p>
-          <a:p>
-            <a:r>
-              <a:rPr lang="en-US" sz="1200" kern="1200" dirty="0">
-                <a:solidFill>
-                  <a:schemeClr val="tx1"/>
-                </a:solidFill>
-                <a:effectLst/>
-                <a:latin typeface="+mn-lt"/>
-                <a:ea typeface="+mn-ea"/>
-                <a:cs typeface="+mn-cs"/>
-              </a:rPr>
-              <a:t>\end{</a:t>
-            </a:r>
-            <a:r>
-              <a:rPr lang="en-US" sz="1200" kern="1200" dirty="0" err="1">
-                <a:solidFill>
-                  <a:schemeClr val="tx1"/>
-                </a:solidFill>
-                <a:effectLst/>
-                <a:latin typeface="+mn-lt"/>
-                <a:ea typeface="+mn-ea"/>
-                <a:cs typeface="+mn-cs"/>
-              </a:rPr>
-              <a:t>pmatrix</a:t>
-            </a:r>
-            <a:r>
-              <a:rPr lang="en-US" sz="1200" kern="1200" dirty="0">
-                <a:solidFill>
-                  <a:schemeClr val="tx1"/>
-                </a:solidFill>
-                <a:effectLst/>
-                <a:latin typeface="+mn-lt"/>
-                <a:ea typeface="+mn-ea"/>
-                <a:cs typeface="+mn-cs"/>
-              </a:rPr>
-              <a:t>} \</a:t>
-            </a:r>
-            <a:r>
-              <a:rPr lang="en-US" sz="1200" kern="1200" dirty="0" err="1">
-                <a:solidFill>
-                  <a:schemeClr val="tx1"/>
-                </a:solidFill>
-                <a:effectLst/>
-                <a:latin typeface="+mn-lt"/>
-                <a:ea typeface="+mn-ea"/>
-                <a:cs typeface="+mn-cs"/>
-              </a:rPr>
-              <a:t>qquad</a:t>
-            </a:r>
-            <a:r>
-              <a:rPr lang="en-US" sz="1200" kern="1200" dirty="0">
-                <a:solidFill>
-                  <a:schemeClr val="tx1"/>
-                </a:solidFill>
-                <a:effectLst/>
-                <a:latin typeface="+mn-lt"/>
-                <a:ea typeface="+mn-ea"/>
-                <a:cs typeface="+mn-cs"/>
-              </a:rPr>
-              <a:t> </a:t>
-            </a:r>
-          </a:p>
-          <a:p>
-            <a:r>
-              <a:rPr lang="en-US" sz="1200" kern="1200" dirty="0">
-                <a:solidFill>
-                  <a:schemeClr val="tx1"/>
-                </a:solidFill>
-                <a:effectLst/>
-                <a:latin typeface="+mn-lt"/>
-                <a:ea typeface="+mn-ea"/>
-                <a:cs typeface="+mn-cs"/>
-              </a:rPr>
-              <a:t>\begin{</a:t>
-            </a:r>
-            <a:r>
-              <a:rPr lang="en-US" sz="1200" kern="1200" dirty="0" err="1">
-                <a:solidFill>
-                  <a:schemeClr val="tx1"/>
-                </a:solidFill>
-                <a:effectLst/>
-                <a:latin typeface="+mn-lt"/>
-                <a:ea typeface="+mn-ea"/>
-                <a:cs typeface="+mn-cs"/>
-              </a:rPr>
-              <a:t>pmatrix</a:t>
-            </a:r>
-            <a:r>
-              <a:rPr lang="en-US" sz="1200" kern="1200" dirty="0">
-                <a:solidFill>
-                  <a:schemeClr val="tx1"/>
-                </a:solidFill>
-                <a:effectLst/>
-                <a:latin typeface="+mn-lt"/>
-                <a:ea typeface="+mn-ea"/>
-                <a:cs typeface="+mn-cs"/>
-              </a:rPr>
-              <a:t>}</a:t>
-            </a:r>
-          </a:p>
-          <a:p>
-            <a:r>
-              <a:rPr lang="en-US" sz="1200" kern="1200" dirty="0">
-                <a:solidFill>
-                  <a:schemeClr val="tx1"/>
-                </a:solidFill>
-                <a:effectLst/>
-                <a:latin typeface="+mn-lt"/>
-                <a:ea typeface="+mn-ea"/>
-                <a:cs typeface="+mn-cs"/>
-              </a:rPr>
-              <a:t>x\\</a:t>
-            </a:r>
-          </a:p>
-          <a:p>
-            <a:r>
-              <a:rPr lang="en-US" sz="1200" kern="1200" dirty="0">
-                <a:solidFill>
-                  <a:schemeClr val="tx1"/>
-                </a:solidFill>
-                <a:effectLst/>
-                <a:latin typeface="+mn-lt"/>
-                <a:ea typeface="+mn-ea"/>
-                <a:cs typeface="+mn-cs"/>
-              </a:rPr>
-              <a:t>y\\</a:t>
-            </a:r>
-          </a:p>
-          <a:p>
-            <a:r>
-              <a:rPr lang="en-US" sz="1200" kern="1200" dirty="0">
-                <a:solidFill>
-                  <a:schemeClr val="tx1"/>
-                </a:solidFill>
-                <a:effectLst/>
-                <a:latin typeface="+mn-lt"/>
-                <a:ea typeface="+mn-ea"/>
-                <a:cs typeface="+mn-cs"/>
-              </a:rPr>
-              <a:t>z</a:t>
-            </a:r>
-          </a:p>
-          <a:p>
-            <a:r>
-              <a:rPr lang="en-US" sz="1200" kern="1200" dirty="0">
-                <a:solidFill>
-                  <a:schemeClr val="tx1"/>
-                </a:solidFill>
-                <a:effectLst/>
-                <a:latin typeface="+mn-lt"/>
-                <a:ea typeface="+mn-ea"/>
-                <a:cs typeface="+mn-cs"/>
-              </a:rPr>
-              <a:t>\end{</a:t>
-            </a:r>
-            <a:r>
-              <a:rPr lang="en-US" sz="1200" kern="1200" dirty="0" err="1">
-                <a:solidFill>
-                  <a:schemeClr val="tx1"/>
-                </a:solidFill>
-                <a:effectLst/>
-                <a:latin typeface="+mn-lt"/>
-                <a:ea typeface="+mn-ea"/>
-                <a:cs typeface="+mn-cs"/>
-              </a:rPr>
-              <a:t>pmatrix</a:t>
-            </a:r>
-            <a:r>
-              <a:rPr lang="en-US" sz="1200" kern="1200" dirty="0">
-                <a:solidFill>
-                  <a:schemeClr val="tx1"/>
-                </a:solidFill>
-                <a:effectLst/>
-                <a:latin typeface="+mn-lt"/>
-                <a:ea typeface="+mn-ea"/>
-                <a:cs typeface="+mn-cs"/>
-              </a:rPr>
-              <a:t>} \</a:t>
-            </a:r>
-            <a:r>
-              <a:rPr lang="en-US" sz="1200" kern="1200" dirty="0" err="1">
-                <a:solidFill>
-                  <a:schemeClr val="tx1"/>
-                </a:solidFill>
-                <a:effectLst/>
-                <a:latin typeface="+mn-lt"/>
-                <a:ea typeface="+mn-ea"/>
-                <a:cs typeface="+mn-cs"/>
-              </a:rPr>
-              <a:t>Rightarrow</a:t>
-            </a:r>
-            <a:r>
-              <a:rPr lang="en-US" sz="1200" kern="1200" dirty="0">
-                <a:solidFill>
-                  <a:schemeClr val="tx1"/>
-                </a:solidFill>
-                <a:effectLst/>
-                <a:latin typeface="+mn-lt"/>
-                <a:ea typeface="+mn-ea"/>
-                <a:cs typeface="+mn-cs"/>
-              </a:rPr>
-              <a:t> \begin{</a:t>
-            </a:r>
-            <a:r>
-              <a:rPr lang="en-US" sz="1200" kern="1200" dirty="0" err="1">
-                <a:solidFill>
-                  <a:schemeClr val="tx1"/>
-                </a:solidFill>
-                <a:effectLst/>
-                <a:latin typeface="+mn-lt"/>
-                <a:ea typeface="+mn-ea"/>
-                <a:cs typeface="+mn-cs"/>
-              </a:rPr>
-              <a:t>pmatrix</a:t>
-            </a:r>
-            <a:r>
-              <a:rPr lang="en-US" sz="1200" kern="1200" dirty="0">
-                <a:solidFill>
-                  <a:schemeClr val="tx1"/>
-                </a:solidFill>
-                <a:effectLst/>
-                <a:latin typeface="+mn-lt"/>
-                <a:ea typeface="+mn-ea"/>
-                <a:cs typeface="+mn-cs"/>
-              </a:rPr>
-              <a:t>}</a:t>
-            </a:r>
-          </a:p>
-          <a:p>
-            <a:r>
-              <a:rPr lang="en-US" sz="1200" kern="1200" dirty="0">
-                <a:solidFill>
-                  <a:schemeClr val="tx1"/>
-                </a:solidFill>
-                <a:effectLst/>
-                <a:latin typeface="+mn-lt"/>
-                <a:ea typeface="+mn-ea"/>
-                <a:cs typeface="+mn-cs"/>
-              </a:rPr>
-              <a:t>x\\</a:t>
-            </a:r>
-          </a:p>
-          <a:p>
-            <a:r>
-              <a:rPr lang="en-US" sz="1200" kern="1200" dirty="0">
-                <a:solidFill>
-                  <a:schemeClr val="tx1"/>
-                </a:solidFill>
-                <a:effectLst/>
-                <a:latin typeface="+mn-lt"/>
-                <a:ea typeface="+mn-ea"/>
-                <a:cs typeface="+mn-cs"/>
-              </a:rPr>
-              <a:t>y\\</a:t>
-            </a:r>
-          </a:p>
-          <a:p>
-            <a:r>
-              <a:rPr lang="en-US" sz="1200" kern="1200" dirty="0">
-                <a:solidFill>
-                  <a:schemeClr val="tx1"/>
-                </a:solidFill>
-                <a:effectLst/>
-                <a:latin typeface="+mn-lt"/>
-                <a:ea typeface="+mn-ea"/>
-                <a:cs typeface="+mn-cs"/>
-              </a:rPr>
-              <a:t>z\\</a:t>
-            </a:r>
-          </a:p>
-          <a:p>
-            <a:r>
-              <a:rPr lang="en-US" sz="1200" kern="1200" dirty="0">
-                <a:solidFill>
-                  <a:schemeClr val="tx1"/>
-                </a:solidFill>
-                <a:effectLst/>
-                <a:latin typeface="+mn-lt"/>
-                <a:ea typeface="+mn-ea"/>
-                <a:cs typeface="+mn-cs"/>
-              </a:rPr>
-              <a:t>1</a:t>
-            </a:r>
-          </a:p>
-          <a:p>
-            <a:r>
-              <a:rPr lang="en-US" sz="1200" kern="1200" dirty="0">
-                <a:solidFill>
-                  <a:schemeClr val="tx1"/>
-                </a:solidFill>
-                <a:effectLst/>
-                <a:latin typeface="+mn-lt"/>
-                <a:ea typeface="+mn-ea"/>
-                <a:cs typeface="+mn-cs"/>
-              </a:rPr>
-              <a:t>\end{</a:t>
-            </a:r>
-            <a:r>
-              <a:rPr lang="en-US" sz="1200" kern="1200" dirty="0" err="1">
-                <a:solidFill>
-                  <a:schemeClr val="tx1"/>
-                </a:solidFill>
-                <a:effectLst/>
-                <a:latin typeface="+mn-lt"/>
-                <a:ea typeface="+mn-ea"/>
-                <a:cs typeface="+mn-cs"/>
-              </a:rPr>
-              <a:t>pmatrix</a:t>
-            </a:r>
-            <a:r>
-              <a:rPr lang="en-US" sz="1200" kern="1200" dirty="0">
-                <a:solidFill>
-                  <a:schemeClr val="tx1"/>
-                </a:solidFill>
-                <a:effectLst/>
-                <a:latin typeface="+mn-lt"/>
-                <a:ea typeface="+mn-ea"/>
-                <a:cs typeface="+mn-cs"/>
-              </a:rPr>
-              <a:t>}</a:t>
-            </a:r>
-          </a:p>
-          <a:p>
-            <a:br>
-              <a:rPr lang="en-US" sz="1200" kern="1200" dirty="0">
-                <a:solidFill>
-                  <a:schemeClr val="tx1"/>
-                </a:solidFill>
-                <a:effectLst/>
-                <a:latin typeface="+mn-lt"/>
-                <a:ea typeface="+mn-ea"/>
-                <a:cs typeface="+mn-cs"/>
-              </a:rPr>
-            </a:br>
-            <a:endParaRPr lang="en-US" sz="1200" kern="1200" dirty="0">
-              <a:solidFill>
-                <a:schemeClr val="tx1"/>
-              </a:solidFill>
-              <a:effectLst/>
-              <a:latin typeface="+mn-lt"/>
-              <a:ea typeface="+mn-ea"/>
-              <a:cs typeface="+mn-cs"/>
-            </a:endParaRPr>
-          </a:p>
-          <a:p>
-            <a:endParaRPr lang="en-US" sz="1200" kern="1200" dirty="0">
-              <a:solidFill>
-                <a:schemeClr val="tx1"/>
-              </a:solidFill>
-              <a:effectLst/>
-              <a:latin typeface="+mn-lt"/>
-              <a:ea typeface="+mn-ea"/>
-              <a:cs typeface="+mn-cs"/>
-            </a:endParaRPr>
-          </a:p>
-          <a:p>
-            <a:endParaRPr lang="en-US" sz="1200" kern="1200" dirty="0">
-              <a:solidFill>
-                <a:schemeClr val="tx1"/>
-              </a:solidFill>
-              <a:effectLst/>
-              <a:latin typeface="+mn-lt"/>
-              <a:ea typeface="+mn-ea"/>
-              <a:cs typeface="+mn-cs"/>
-            </a:endParaRPr>
-          </a:p>
-          <a:p>
-            <a:r>
-              <a:rPr lang="en-US" sz="1200" kern="1200" dirty="0">
-                <a:solidFill>
-                  <a:schemeClr val="tx1"/>
-                </a:solidFill>
-                <a:effectLst/>
-                <a:latin typeface="+mn-lt"/>
-                <a:ea typeface="+mn-ea"/>
-                <a:cs typeface="+mn-cs"/>
-              </a:rPr>
-              <a:t>\begin{</a:t>
-            </a:r>
-            <a:r>
-              <a:rPr lang="en-US" sz="1200" kern="1200" dirty="0" err="1">
-                <a:solidFill>
-                  <a:schemeClr val="tx1"/>
-                </a:solidFill>
-                <a:effectLst/>
-                <a:latin typeface="+mn-lt"/>
-                <a:ea typeface="+mn-ea"/>
-                <a:cs typeface="+mn-cs"/>
-              </a:rPr>
-              <a:t>pmatrix</a:t>
-            </a:r>
-            <a:r>
-              <a:rPr lang="en-US" sz="1200" kern="1200" dirty="0">
-                <a:solidFill>
-                  <a:schemeClr val="tx1"/>
-                </a:solidFill>
-                <a:effectLst/>
-                <a:latin typeface="+mn-lt"/>
-                <a:ea typeface="+mn-ea"/>
-                <a:cs typeface="+mn-cs"/>
-              </a:rPr>
-              <a:t>}</a:t>
-            </a:r>
-          </a:p>
-          <a:p>
-            <a:r>
-              <a:rPr lang="en-US" sz="1200" kern="1200" dirty="0">
-                <a:solidFill>
-                  <a:schemeClr val="tx1"/>
-                </a:solidFill>
-                <a:effectLst/>
-                <a:latin typeface="+mn-lt"/>
-                <a:ea typeface="+mn-ea"/>
-                <a:cs typeface="+mn-cs"/>
-              </a:rPr>
-              <a:t>x\\</a:t>
-            </a:r>
-          </a:p>
-          <a:p>
-            <a:r>
-              <a:rPr lang="en-US" sz="1200" kern="1200" dirty="0">
-                <a:solidFill>
-                  <a:schemeClr val="tx1"/>
-                </a:solidFill>
-                <a:effectLst/>
-                <a:latin typeface="+mn-lt"/>
-                <a:ea typeface="+mn-ea"/>
-                <a:cs typeface="+mn-cs"/>
-              </a:rPr>
-              <a:t>y</a:t>
-            </a:r>
-          </a:p>
-          <a:p>
-            <a:r>
-              <a:rPr lang="en-US" sz="1200" kern="1200" dirty="0">
-                <a:solidFill>
-                  <a:schemeClr val="tx1"/>
-                </a:solidFill>
-                <a:effectLst/>
-                <a:latin typeface="+mn-lt"/>
-                <a:ea typeface="+mn-ea"/>
-                <a:cs typeface="+mn-cs"/>
-              </a:rPr>
-              <a:t>\end{</a:t>
-            </a:r>
-            <a:r>
-              <a:rPr lang="en-US" sz="1200" kern="1200" dirty="0" err="1">
-                <a:solidFill>
-                  <a:schemeClr val="tx1"/>
-                </a:solidFill>
-                <a:effectLst/>
-                <a:latin typeface="+mn-lt"/>
-                <a:ea typeface="+mn-ea"/>
-                <a:cs typeface="+mn-cs"/>
-              </a:rPr>
-              <a:t>pmatrix</a:t>
-            </a:r>
-            <a:r>
-              <a:rPr lang="en-US" sz="1200" kern="1200" dirty="0">
-                <a:solidFill>
-                  <a:schemeClr val="tx1"/>
-                </a:solidFill>
-                <a:effectLst/>
-                <a:latin typeface="+mn-lt"/>
-                <a:ea typeface="+mn-ea"/>
-                <a:cs typeface="+mn-cs"/>
-              </a:rPr>
-              <a:t>} \</a:t>
-            </a:r>
-            <a:r>
-              <a:rPr lang="en-US" sz="1200" kern="1200" dirty="0" err="1">
-                <a:solidFill>
-                  <a:schemeClr val="tx1"/>
-                </a:solidFill>
-                <a:effectLst/>
-                <a:latin typeface="+mn-lt"/>
-                <a:ea typeface="+mn-ea"/>
-                <a:cs typeface="+mn-cs"/>
-              </a:rPr>
-              <a:t>Rightarrow</a:t>
-            </a:r>
-            <a:r>
-              <a:rPr lang="en-US" sz="1200" kern="1200" dirty="0">
-                <a:solidFill>
-                  <a:schemeClr val="tx1"/>
-                </a:solidFill>
-                <a:effectLst/>
-                <a:latin typeface="+mn-lt"/>
-                <a:ea typeface="+mn-ea"/>
-                <a:cs typeface="+mn-cs"/>
-              </a:rPr>
-              <a:t> \begin{</a:t>
-            </a:r>
-            <a:r>
-              <a:rPr lang="en-US" sz="1200" kern="1200" dirty="0" err="1">
-                <a:solidFill>
-                  <a:schemeClr val="tx1"/>
-                </a:solidFill>
-                <a:effectLst/>
-                <a:latin typeface="+mn-lt"/>
-                <a:ea typeface="+mn-ea"/>
-                <a:cs typeface="+mn-cs"/>
-              </a:rPr>
-              <a:t>pmatrix</a:t>
-            </a:r>
-            <a:r>
-              <a:rPr lang="en-US" sz="1200" kern="1200" dirty="0">
-                <a:solidFill>
-                  <a:schemeClr val="tx1"/>
-                </a:solidFill>
-                <a:effectLst/>
-                <a:latin typeface="+mn-lt"/>
-                <a:ea typeface="+mn-ea"/>
-                <a:cs typeface="+mn-cs"/>
-              </a:rPr>
-              <a:t>}</a:t>
-            </a:r>
-          </a:p>
-          <a:p>
-            <a:r>
-              <a:rPr lang="en-US" sz="1200" kern="1200" dirty="0">
-                <a:solidFill>
-                  <a:schemeClr val="tx1"/>
-                </a:solidFill>
-                <a:effectLst/>
-                <a:latin typeface="+mn-lt"/>
-                <a:ea typeface="+mn-ea"/>
-                <a:cs typeface="+mn-cs"/>
-              </a:rPr>
-              <a:t>x\\</a:t>
-            </a:r>
-          </a:p>
-          <a:p>
-            <a:r>
-              <a:rPr lang="en-US" sz="1200" kern="1200" dirty="0">
-                <a:solidFill>
-                  <a:schemeClr val="tx1"/>
-                </a:solidFill>
-                <a:effectLst/>
-                <a:latin typeface="+mn-lt"/>
-                <a:ea typeface="+mn-ea"/>
-                <a:cs typeface="+mn-cs"/>
-              </a:rPr>
-              <a:t>y\\</a:t>
-            </a:r>
-          </a:p>
-          <a:p>
-            <a:r>
-              <a:rPr lang="en-US" sz="1200" kern="1200" dirty="0">
-                <a:solidFill>
-                  <a:schemeClr val="tx1"/>
-                </a:solidFill>
-                <a:effectLst/>
-                <a:latin typeface="+mn-lt"/>
-                <a:ea typeface="+mn-ea"/>
-                <a:cs typeface="+mn-cs"/>
-              </a:rPr>
-              <a:t>1</a:t>
-            </a:r>
-          </a:p>
-          <a:p>
-            <a:r>
-              <a:rPr lang="en-US" sz="1200" kern="1200" dirty="0">
-                <a:solidFill>
-                  <a:schemeClr val="tx1"/>
-                </a:solidFill>
-                <a:effectLst/>
-                <a:latin typeface="+mn-lt"/>
-                <a:ea typeface="+mn-ea"/>
-                <a:cs typeface="+mn-cs"/>
-              </a:rPr>
-              <a:t>\end{</a:t>
-            </a:r>
-            <a:r>
-              <a:rPr lang="en-US" sz="1200" kern="1200" dirty="0" err="1">
-                <a:solidFill>
-                  <a:schemeClr val="tx1"/>
-                </a:solidFill>
-                <a:effectLst/>
-                <a:latin typeface="+mn-lt"/>
-                <a:ea typeface="+mn-ea"/>
-                <a:cs typeface="+mn-cs"/>
-              </a:rPr>
-              <a:t>pmatrix</a:t>
-            </a:r>
-            <a:r>
-              <a:rPr lang="en-US" sz="1200" kern="1200" dirty="0">
-                <a:solidFill>
-                  <a:schemeClr val="tx1"/>
-                </a:solidFill>
-                <a:effectLst/>
-                <a:latin typeface="+mn-lt"/>
-                <a:ea typeface="+mn-ea"/>
-                <a:cs typeface="+mn-cs"/>
-              </a:rPr>
-              <a:t>} \</a:t>
-            </a:r>
-            <a:r>
-              <a:rPr lang="en-US" sz="1200" kern="1200" dirty="0" err="1">
-                <a:solidFill>
-                  <a:schemeClr val="tx1"/>
-                </a:solidFill>
-                <a:effectLst/>
-                <a:latin typeface="+mn-lt"/>
-                <a:ea typeface="+mn-ea"/>
-                <a:cs typeface="+mn-cs"/>
-              </a:rPr>
-              <a:t>qquad</a:t>
-            </a:r>
-            <a:r>
-              <a:rPr lang="en-US" sz="1200" kern="1200" dirty="0">
-                <a:solidFill>
-                  <a:schemeClr val="tx1"/>
-                </a:solidFill>
-                <a:effectLst/>
-                <a:latin typeface="+mn-lt"/>
-                <a:ea typeface="+mn-ea"/>
-                <a:cs typeface="+mn-cs"/>
-              </a:rPr>
-              <a:t> </a:t>
-            </a:r>
-          </a:p>
-          <a:p>
-            <a:r>
-              <a:rPr lang="en-US" sz="1200" kern="1200" dirty="0">
-                <a:solidFill>
-                  <a:schemeClr val="tx1"/>
-                </a:solidFill>
-                <a:effectLst/>
-                <a:latin typeface="+mn-lt"/>
-                <a:ea typeface="+mn-ea"/>
-                <a:cs typeface="+mn-cs"/>
-              </a:rPr>
-              <a:t>\begin{</a:t>
-            </a:r>
-            <a:r>
-              <a:rPr lang="en-US" sz="1200" kern="1200" dirty="0" err="1">
-                <a:solidFill>
-                  <a:schemeClr val="tx1"/>
-                </a:solidFill>
-                <a:effectLst/>
-                <a:latin typeface="+mn-lt"/>
-                <a:ea typeface="+mn-ea"/>
-                <a:cs typeface="+mn-cs"/>
-              </a:rPr>
-              <a:t>pmatrix</a:t>
-            </a:r>
-            <a:r>
-              <a:rPr lang="en-US" sz="1200" kern="1200" dirty="0">
-                <a:solidFill>
-                  <a:schemeClr val="tx1"/>
-                </a:solidFill>
-                <a:effectLst/>
-                <a:latin typeface="+mn-lt"/>
-                <a:ea typeface="+mn-ea"/>
-                <a:cs typeface="+mn-cs"/>
-              </a:rPr>
-              <a:t>}</a:t>
-            </a:r>
-          </a:p>
-          <a:p>
-            <a:r>
-              <a:rPr lang="en-US" sz="1200" kern="1200" dirty="0">
-                <a:solidFill>
-                  <a:schemeClr val="tx1"/>
-                </a:solidFill>
-                <a:effectLst/>
-                <a:latin typeface="+mn-lt"/>
-                <a:ea typeface="+mn-ea"/>
-                <a:cs typeface="+mn-cs"/>
-              </a:rPr>
-              <a:t>x\\</a:t>
-            </a:r>
-          </a:p>
-          <a:p>
-            <a:r>
-              <a:rPr lang="en-US" sz="1200" kern="1200" dirty="0">
-                <a:solidFill>
-                  <a:schemeClr val="tx1"/>
-                </a:solidFill>
-                <a:effectLst/>
-                <a:latin typeface="+mn-lt"/>
-                <a:ea typeface="+mn-ea"/>
-                <a:cs typeface="+mn-cs"/>
-              </a:rPr>
-              <a:t>y\\</a:t>
-            </a:r>
-          </a:p>
-          <a:p>
-            <a:r>
-              <a:rPr lang="en-US" sz="1200" kern="1200" dirty="0">
-                <a:solidFill>
-                  <a:schemeClr val="tx1"/>
-                </a:solidFill>
-                <a:effectLst/>
-                <a:latin typeface="+mn-lt"/>
-                <a:ea typeface="+mn-ea"/>
-                <a:cs typeface="+mn-cs"/>
-              </a:rPr>
-              <a:t>1</a:t>
-            </a:r>
-          </a:p>
-          <a:p>
-            <a:r>
-              <a:rPr lang="en-US" sz="1200" kern="1200" dirty="0">
-                <a:solidFill>
-                  <a:schemeClr val="tx1"/>
-                </a:solidFill>
-                <a:effectLst/>
-                <a:latin typeface="+mn-lt"/>
-                <a:ea typeface="+mn-ea"/>
-                <a:cs typeface="+mn-cs"/>
-              </a:rPr>
-              <a:t>\end{</a:t>
-            </a:r>
-            <a:r>
-              <a:rPr lang="en-US" sz="1200" kern="1200" dirty="0" err="1">
-                <a:solidFill>
-                  <a:schemeClr val="tx1"/>
-                </a:solidFill>
-                <a:effectLst/>
-                <a:latin typeface="+mn-lt"/>
-                <a:ea typeface="+mn-ea"/>
-                <a:cs typeface="+mn-cs"/>
-              </a:rPr>
-              <a:t>pmatrix</a:t>
-            </a:r>
-            <a:r>
-              <a:rPr lang="en-US" sz="1200" kern="1200" dirty="0">
-                <a:solidFill>
-                  <a:schemeClr val="tx1"/>
-                </a:solidFill>
-                <a:effectLst/>
-                <a:latin typeface="+mn-lt"/>
-                <a:ea typeface="+mn-ea"/>
-                <a:cs typeface="+mn-cs"/>
-              </a:rPr>
-              <a:t>} \</a:t>
-            </a:r>
-            <a:r>
-              <a:rPr lang="en-US" sz="1200" kern="1200" dirty="0" err="1">
-                <a:solidFill>
-                  <a:schemeClr val="tx1"/>
-                </a:solidFill>
-                <a:effectLst/>
-                <a:latin typeface="+mn-lt"/>
-                <a:ea typeface="+mn-ea"/>
-                <a:cs typeface="+mn-cs"/>
-              </a:rPr>
-              <a:t>Rightarrow</a:t>
-            </a:r>
-            <a:r>
-              <a:rPr lang="en-US" sz="1200" kern="1200" dirty="0">
-                <a:solidFill>
-                  <a:schemeClr val="tx1"/>
-                </a:solidFill>
-                <a:effectLst/>
-                <a:latin typeface="+mn-lt"/>
-                <a:ea typeface="+mn-ea"/>
-                <a:cs typeface="+mn-cs"/>
-              </a:rPr>
-              <a:t> \begin{</a:t>
-            </a:r>
-            <a:r>
-              <a:rPr lang="en-US" sz="1200" kern="1200" dirty="0" err="1">
-                <a:solidFill>
-                  <a:schemeClr val="tx1"/>
-                </a:solidFill>
-                <a:effectLst/>
-                <a:latin typeface="+mn-lt"/>
-                <a:ea typeface="+mn-ea"/>
-                <a:cs typeface="+mn-cs"/>
-              </a:rPr>
-              <a:t>pmatrix</a:t>
-            </a:r>
-            <a:r>
-              <a:rPr lang="en-US" sz="1200" kern="1200" dirty="0">
-                <a:solidFill>
-                  <a:schemeClr val="tx1"/>
-                </a:solidFill>
-                <a:effectLst/>
-                <a:latin typeface="+mn-lt"/>
-                <a:ea typeface="+mn-ea"/>
-                <a:cs typeface="+mn-cs"/>
-              </a:rPr>
-              <a:t>}</a:t>
-            </a:r>
-          </a:p>
-          <a:p>
-            <a:r>
-              <a:rPr lang="en-US" sz="1200" kern="1200" dirty="0">
-                <a:solidFill>
-                  <a:schemeClr val="tx1"/>
-                </a:solidFill>
-                <a:effectLst/>
-                <a:latin typeface="+mn-lt"/>
-                <a:ea typeface="+mn-ea"/>
-                <a:cs typeface="+mn-cs"/>
-              </a:rPr>
-              <a:t>x\\</a:t>
-            </a:r>
-          </a:p>
-          <a:p>
-            <a:r>
-              <a:rPr lang="en-US" sz="1200" kern="1200" dirty="0">
-                <a:solidFill>
-                  <a:schemeClr val="tx1"/>
-                </a:solidFill>
-                <a:effectLst/>
-                <a:latin typeface="+mn-lt"/>
-                <a:ea typeface="+mn-ea"/>
-                <a:cs typeface="+mn-cs"/>
-              </a:rPr>
-              <a:t>y\\</a:t>
-            </a:r>
-          </a:p>
-          <a:p>
-            <a:r>
-              <a:rPr lang="en-US" sz="1200" kern="1200" dirty="0">
-                <a:solidFill>
-                  <a:schemeClr val="tx1"/>
-                </a:solidFill>
-                <a:effectLst/>
-                <a:latin typeface="+mn-lt"/>
-                <a:ea typeface="+mn-ea"/>
-                <a:cs typeface="+mn-cs"/>
-              </a:rPr>
-              <a:t>z</a:t>
-            </a:r>
-          </a:p>
-          <a:p>
-            <a:r>
-              <a:rPr lang="en-US" sz="1200" kern="1200" dirty="0">
-                <a:solidFill>
-                  <a:schemeClr val="tx1"/>
-                </a:solidFill>
-                <a:effectLst/>
-                <a:latin typeface="+mn-lt"/>
-                <a:ea typeface="+mn-ea"/>
-                <a:cs typeface="+mn-cs"/>
-              </a:rPr>
-              <a:t>\end{</a:t>
-            </a:r>
-            <a:r>
-              <a:rPr lang="en-US" sz="1200" kern="1200" dirty="0" err="1">
-                <a:solidFill>
-                  <a:schemeClr val="tx1"/>
-                </a:solidFill>
-                <a:effectLst/>
-                <a:latin typeface="+mn-lt"/>
-                <a:ea typeface="+mn-ea"/>
-                <a:cs typeface="+mn-cs"/>
-              </a:rPr>
-              <a:t>pmatrix</a:t>
-            </a:r>
-            <a:r>
-              <a:rPr lang="en-US" sz="1200" kern="1200" dirty="0">
-                <a:solidFill>
-                  <a:schemeClr val="tx1"/>
-                </a:solidFill>
-                <a:effectLst/>
-                <a:latin typeface="+mn-lt"/>
-                <a:ea typeface="+mn-ea"/>
-                <a:cs typeface="+mn-cs"/>
-              </a:rPr>
-              <a:t>}</a:t>
-            </a:r>
-          </a:p>
-          <a:p>
-            <a:br>
-              <a:rPr lang="en-US" sz="1200" kern="1200" dirty="0">
-                <a:solidFill>
-                  <a:schemeClr val="tx1"/>
-                </a:solidFill>
-                <a:effectLst/>
-                <a:latin typeface="+mn-lt"/>
-                <a:ea typeface="+mn-ea"/>
-                <a:cs typeface="+mn-cs"/>
-              </a:rPr>
-            </a:br>
-            <a:endParaRPr lang="en-US" sz="1200" kern="1200" dirty="0">
-              <a:solidFill>
-                <a:schemeClr val="tx1"/>
-              </a:solidFill>
-              <a:effectLst/>
-              <a:latin typeface="+mn-lt"/>
-              <a:ea typeface="+mn-ea"/>
-              <a:cs typeface="+mn-cs"/>
-            </a:endParaRPr>
-          </a:p>
-          <a:p>
-            <a:endParaRPr lang="en-US" sz="1200" kern="1200" dirty="0">
-              <a:solidFill>
-                <a:schemeClr val="tx1"/>
-              </a:solidFill>
-              <a:effectLst/>
-              <a:latin typeface="+mn-lt"/>
-              <a:ea typeface="+mn-ea"/>
-              <a:cs typeface="+mn-cs"/>
-            </a:endParaRPr>
-          </a:p>
-          <a:p>
-            <a:endParaRPr lang="en-US" sz="1200" kern="1200" dirty="0">
-              <a:solidFill>
-                <a:schemeClr val="tx1"/>
-              </a:solidFill>
-              <a:effectLst/>
-              <a:latin typeface="+mn-lt"/>
-              <a:ea typeface="+mn-ea"/>
-              <a:cs typeface="+mn-cs"/>
-            </a:endParaRPr>
-          </a:p>
-          <a:p>
-            <a:r>
-              <a:rPr lang="en-US" sz="1200" kern="1200" dirty="0">
-                <a:solidFill>
-                  <a:schemeClr val="tx1"/>
-                </a:solidFill>
-                <a:effectLst/>
-                <a:latin typeface="+mn-lt"/>
-                <a:ea typeface="+mn-ea"/>
-                <a:cs typeface="+mn-cs"/>
-              </a:rPr>
-              <a:t>\begin{</a:t>
-            </a:r>
-            <a:r>
-              <a:rPr lang="en-US" sz="1200" kern="1200" dirty="0" err="1">
-                <a:solidFill>
-                  <a:schemeClr val="tx1"/>
-                </a:solidFill>
-                <a:effectLst/>
-                <a:latin typeface="+mn-lt"/>
-                <a:ea typeface="+mn-ea"/>
-                <a:cs typeface="+mn-cs"/>
-              </a:rPr>
-              <a:t>pmatrix</a:t>
-            </a:r>
-            <a:r>
-              <a:rPr lang="en-US" sz="1200" kern="1200" dirty="0">
-                <a:solidFill>
-                  <a:schemeClr val="tx1"/>
-                </a:solidFill>
-                <a:effectLst/>
-                <a:latin typeface="+mn-lt"/>
-                <a:ea typeface="+mn-ea"/>
-                <a:cs typeface="+mn-cs"/>
-              </a:rPr>
-              <a:t>}</a:t>
-            </a:r>
-          </a:p>
-          <a:p>
-            <a:r>
-              <a:rPr lang="en-US" sz="1200" kern="1200" dirty="0">
-                <a:solidFill>
-                  <a:schemeClr val="tx1"/>
-                </a:solidFill>
-                <a:effectLst/>
-                <a:latin typeface="+mn-lt"/>
-                <a:ea typeface="+mn-ea"/>
-                <a:cs typeface="+mn-cs"/>
-              </a:rPr>
-              <a:t>x\\</a:t>
-            </a:r>
-          </a:p>
-          <a:p>
-            <a:r>
-              <a:rPr lang="en-US" sz="1200" kern="1200" dirty="0">
-                <a:solidFill>
-                  <a:schemeClr val="tx1"/>
-                </a:solidFill>
-                <a:effectLst/>
-                <a:latin typeface="+mn-lt"/>
-                <a:ea typeface="+mn-ea"/>
-                <a:cs typeface="+mn-cs"/>
-              </a:rPr>
-              <a:t>y\\</a:t>
-            </a:r>
-          </a:p>
-          <a:p>
-            <a:r>
-              <a:rPr lang="en-US" sz="1200" kern="1200" dirty="0">
-                <a:solidFill>
-                  <a:schemeClr val="tx1"/>
-                </a:solidFill>
-                <a:effectLst/>
-                <a:latin typeface="+mn-lt"/>
-                <a:ea typeface="+mn-ea"/>
-                <a:cs typeface="+mn-cs"/>
-              </a:rPr>
-              <a:t>w</a:t>
-            </a:r>
-          </a:p>
-          <a:p>
-            <a:r>
-              <a:rPr lang="en-US" sz="1200" kern="1200" dirty="0">
-                <a:solidFill>
-                  <a:schemeClr val="tx1"/>
-                </a:solidFill>
-                <a:effectLst/>
-                <a:latin typeface="+mn-lt"/>
-                <a:ea typeface="+mn-ea"/>
-                <a:cs typeface="+mn-cs"/>
-              </a:rPr>
-              <a:t>\end{</a:t>
-            </a:r>
-            <a:r>
-              <a:rPr lang="en-US" sz="1200" kern="1200" dirty="0" err="1">
-                <a:solidFill>
-                  <a:schemeClr val="tx1"/>
-                </a:solidFill>
-                <a:effectLst/>
-                <a:latin typeface="+mn-lt"/>
-                <a:ea typeface="+mn-ea"/>
-                <a:cs typeface="+mn-cs"/>
-              </a:rPr>
-              <a:t>pmatrix</a:t>
-            </a:r>
-            <a:r>
-              <a:rPr lang="en-US" sz="1200" kern="1200" dirty="0">
-                <a:solidFill>
-                  <a:schemeClr val="tx1"/>
-                </a:solidFill>
-                <a:effectLst/>
-                <a:latin typeface="+mn-lt"/>
-                <a:ea typeface="+mn-ea"/>
-                <a:cs typeface="+mn-cs"/>
-              </a:rPr>
-              <a:t>}\</a:t>
-            </a:r>
-            <a:r>
-              <a:rPr lang="en-US" sz="1200" kern="1200" dirty="0" err="1">
-                <a:solidFill>
-                  <a:schemeClr val="tx1"/>
-                </a:solidFill>
-                <a:effectLst/>
-                <a:latin typeface="+mn-lt"/>
-                <a:ea typeface="+mn-ea"/>
-                <a:cs typeface="+mn-cs"/>
-              </a:rPr>
-              <a:t>Rightarrow</a:t>
-            </a:r>
-            <a:r>
-              <a:rPr lang="en-US" sz="1200" kern="1200" dirty="0">
-                <a:solidFill>
-                  <a:schemeClr val="tx1"/>
-                </a:solidFill>
-                <a:effectLst/>
-                <a:latin typeface="+mn-lt"/>
-                <a:ea typeface="+mn-ea"/>
-                <a:cs typeface="+mn-cs"/>
-              </a:rPr>
-              <a:t> </a:t>
-            </a:r>
-          </a:p>
-          <a:p>
-            <a:r>
-              <a:rPr lang="en-US" sz="1200" kern="1200" dirty="0">
-                <a:solidFill>
-                  <a:schemeClr val="tx1"/>
-                </a:solidFill>
-                <a:effectLst/>
-                <a:latin typeface="+mn-lt"/>
-                <a:ea typeface="+mn-ea"/>
-                <a:cs typeface="+mn-cs"/>
-              </a:rPr>
-              <a:t>\begin{</a:t>
-            </a:r>
-            <a:r>
-              <a:rPr lang="en-US" sz="1200" kern="1200" dirty="0" err="1">
-                <a:solidFill>
-                  <a:schemeClr val="tx1"/>
-                </a:solidFill>
-                <a:effectLst/>
-                <a:latin typeface="+mn-lt"/>
-                <a:ea typeface="+mn-ea"/>
-                <a:cs typeface="+mn-cs"/>
-              </a:rPr>
-              <a:t>pmatrix</a:t>
-            </a:r>
-            <a:r>
-              <a:rPr lang="en-US" sz="1200" kern="1200" dirty="0">
-                <a:solidFill>
-                  <a:schemeClr val="tx1"/>
-                </a:solidFill>
-                <a:effectLst/>
-                <a:latin typeface="+mn-lt"/>
-                <a:ea typeface="+mn-ea"/>
-                <a:cs typeface="+mn-cs"/>
-              </a:rPr>
-              <a:t>}</a:t>
-            </a:r>
-          </a:p>
-          <a:p>
-            <a:r>
-              <a:rPr lang="en-US" sz="1200" kern="1200" dirty="0">
-                <a:solidFill>
-                  <a:schemeClr val="tx1"/>
-                </a:solidFill>
-                <a:effectLst/>
-                <a:latin typeface="+mn-lt"/>
-                <a:ea typeface="+mn-ea"/>
-                <a:cs typeface="+mn-cs"/>
-              </a:rPr>
-              <a:t>x/w\\</a:t>
-            </a:r>
-          </a:p>
-          <a:p>
-            <a:r>
-              <a:rPr lang="en-US" sz="1200" kern="1200" dirty="0">
-                <a:solidFill>
-                  <a:schemeClr val="tx1"/>
-                </a:solidFill>
-                <a:effectLst/>
-                <a:latin typeface="+mn-lt"/>
-                <a:ea typeface="+mn-ea"/>
-                <a:cs typeface="+mn-cs"/>
-              </a:rPr>
-              <a:t>y/w</a:t>
-            </a:r>
-          </a:p>
-          <a:p>
-            <a:r>
-              <a:rPr lang="en-US" sz="1200" kern="1200" dirty="0">
-                <a:solidFill>
-                  <a:schemeClr val="tx1"/>
-                </a:solidFill>
-                <a:effectLst/>
-                <a:latin typeface="+mn-lt"/>
-                <a:ea typeface="+mn-ea"/>
-                <a:cs typeface="+mn-cs"/>
-              </a:rPr>
-              <a:t>\end{</a:t>
-            </a:r>
-            <a:r>
-              <a:rPr lang="en-US" sz="1200" kern="1200" dirty="0" err="1">
-                <a:solidFill>
-                  <a:schemeClr val="tx1"/>
-                </a:solidFill>
-                <a:effectLst/>
-                <a:latin typeface="+mn-lt"/>
-                <a:ea typeface="+mn-ea"/>
-                <a:cs typeface="+mn-cs"/>
-              </a:rPr>
-              <a:t>pmatrix</a:t>
-            </a:r>
-            <a:r>
-              <a:rPr lang="en-US" sz="1200" kern="1200" dirty="0">
-                <a:solidFill>
-                  <a:schemeClr val="tx1"/>
-                </a:solidFill>
-                <a:effectLst/>
-                <a:latin typeface="+mn-lt"/>
-                <a:ea typeface="+mn-ea"/>
-                <a:cs typeface="+mn-cs"/>
-              </a:rPr>
-              <a:t>}</a:t>
-            </a:r>
-          </a:p>
-          <a:p>
-            <a:r>
-              <a:rPr lang="en-US" sz="1200" kern="1200" dirty="0">
-                <a:solidFill>
-                  <a:schemeClr val="tx1"/>
-                </a:solidFill>
-                <a:effectLst/>
-                <a:latin typeface="+mn-lt"/>
-                <a:ea typeface="+mn-ea"/>
-                <a:cs typeface="+mn-cs"/>
-              </a:rPr>
-              <a:t> \</a:t>
-            </a:r>
-            <a:r>
-              <a:rPr lang="en-US" sz="1200" kern="1200" dirty="0" err="1">
-                <a:solidFill>
-                  <a:schemeClr val="tx1"/>
-                </a:solidFill>
-                <a:effectLst/>
-                <a:latin typeface="+mn-lt"/>
-                <a:ea typeface="+mn-ea"/>
-                <a:cs typeface="+mn-cs"/>
-              </a:rPr>
-              <a:t>qquad</a:t>
-            </a:r>
-            <a:r>
-              <a:rPr lang="en-US" sz="1200" kern="1200" dirty="0">
-                <a:solidFill>
-                  <a:schemeClr val="tx1"/>
-                </a:solidFill>
-                <a:effectLst/>
-                <a:latin typeface="+mn-lt"/>
-                <a:ea typeface="+mn-ea"/>
-                <a:cs typeface="+mn-cs"/>
-              </a:rPr>
-              <a:t> \begin{</a:t>
-            </a:r>
-            <a:r>
-              <a:rPr lang="en-US" sz="1200" kern="1200" dirty="0" err="1">
-                <a:solidFill>
-                  <a:schemeClr val="tx1"/>
-                </a:solidFill>
-                <a:effectLst/>
-                <a:latin typeface="+mn-lt"/>
-                <a:ea typeface="+mn-ea"/>
-                <a:cs typeface="+mn-cs"/>
-              </a:rPr>
-              <a:t>pmatrix</a:t>
-            </a:r>
-            <a:r>
-              <a:rPr lang="en-US" sz="1200" kern="1200" dirty="0">
-                <a:solidFill>
-                  <a:schemeClr val="tx1"/>
-                </a:solidFill>
-                <a:effectLst/>
-                <a:latin typeface="+mn-lt"/>
-                <a:ea typeface="+mn-ea"/>
-                <a:cs typeface="+mn-cs"/>
-              </a:rPr>
-              <a:t>}</a:t>
-            </a:r>
-          </a:p>
-          <a:p>
-            <a:r>
-              <a:rPr lang="en-US" sz="1200" kern="1200" dirty="0">
-                <a:solidFill>
-                  <a:schemeClr val="tx1"/>
-                </a:solidFill>
-                <a:effectLst/>
-                <a:latin typeface="+mn-lt"/>
-                <a:ea typeface="+mn-ea"/>
-                <a:cs typeface="+mn-cs"/>
-              </a:rPr>
-              <a:t>x\\</a:t>
-            </a:r>
-          </a:p>
-          <a:p>
-            <a:r>
-              <a:rPr lang="en-US" sz="1200" kern="1200" dirty="0">
-                <a:solidFill>
-                  <a:schemeClr val="tx1"/>
-                </a:solidFill>
-                <a:effectLst/>
-                <a:latin typeface="+mn-lt"/>
-                <a:ea typeface="+mn-ea"/>
-                <a:cs typeface="+mn-cs"/>
-              </a:rPr>
-              <a:t>y\\</a:t>
-            </a:r>
-          </a:p>
-          <a:p>
-            <a:r>
-              <a:rPr lang="en-US" sz="1200" kern="1200" dirty="0">
-                <a:solidFill>
-                  <a:schemeClr val="tx1"/>
-                </a:solidFill>
-                <a:effectLst/>
-                <a:latin typeface="+mn-lt"/>
-                <a:ea typeface="+mn-ea"/>
-                <a:cs typeface="+mn-cs"/>
-              </a:rPr>
-              <a:t>z\\</a:t>
-            </a:r>
-          </a:p>
-          <a:p>
-            <a:r>
-              <a:rPr lang="en-US" sz="1200" kern="1200" dirty="0">
-                <a:solidFill>
-                  <a:schemeClr val="tx1"/>
-                </a:solidFill>
-                <a:effectLst/>
-                <a:latin typeface="+mn-lt"/>
-                <a:ea typeface="+mn-ea"/>
-                <a:cs typeface="+mn-cs"/>
-              </a:rPr>
-              <a:t>w</a:t>
-            </a:r>
-          </a:p>
-          <a:p>
-            <a:r>
-              <a:rPr lang="en-US" sz="1200" kern="1200" dirty="0">
-                <a:solidFill>
-                  <a:schemeClr val="tx1"/>
-                </a:solidFill>
-                <a:effectLst/>
-                <a:latin typeface="+mn-lt"/>
-                <a:ea typeface="+mn-ea"/>
-                <a:cs typeface="+mn-cs"/>
-              </a:rPr>
-              <a:t>\end{</a:t>
-            </a:r>
-            <a:r>
-              <a:rPr lang="en-US" sz="1200" kern="1200" dirty="0" err="1">
-                <a:solidFill>
-                  <a:schemeClr val="tx1"/>
-                </a:solidFill>
-                <a:effectLst/>
-                <a:latin typeface="+mn-lt"/>
-                <a:ea typeface="+mn-ea"/>
-                <a:cs typeface="+mn-cs"/>
-              </a:rPr>
-              <a:t>pmatrix</a:t>
-            </a:r>
-            <a:r>
-              <a:rPr lang="en-US" sz="1200" kern="1200" dirty="0">
-                <a:solidFill>
-                  <a:schemeClr val="tx1"/>
-                </a:solidFill>
-                <a:effectLst/>
-                <a:latin typeface="+mn-lt"/>
-                <a:ea typeface="+mn-ea"/>
-                <a:cs typeface="+mn-cs"/>
-              </a:rPr>
-              <a:t>}\</a:t>
-            </a:r>
-            <a:r>
-              <a:rPr lang="en-US" sz="1200" kern="1200" dirty="0" err="1">
-                <a:solidFill>
-                  <a:schemeClr val="tx1"/>
-                </a:solidFill>
-                <a:effectLst/>
-                <a:latin typeface="+mn-lt"/>
-                <a:ea typeface="+mn-ea"/>
-                <a:cs typeface="+mn-cs"/>
-              </a:rPr>
-              <a:t>Rightarrow</a:t>
-            </a:r>
-            <a:r>
-              <a:rPr lang="en-US" sz="1200" kern="1200" dirty="0">
-                <a:solidFill>
-                  <a:schemeClr val="tx1"/>
-                </a:solidFill>
-                <a:effectLst/>
-                <a:latin typeface="+mn-lt"/>
-                <a:ea typeface="+mn-ea"/>
-                <a:cs typeface="+mn-cs"/>
-              </a:rPr>
-              <a:t> \begin{</a:t>
-            </a:r>
-            <a:r>
-              <a:rPr lang="en-US" sz="1200" kern="1200" dirty="0" err="1">
-                <a:solidFill>
-                  <a:schemeClr val="tx1"/>
-                </a:solidFill>
-                <a:effectLst/>
-                <a:latin typeface="+mn-lt"/>
-                <a:ea typeface="+mn-ea"/>
-                <a:cs typeface="+mn-cs"/>
-              </a:rPr>
-              <a:t>pmatrix</a:t>
-            </a:r>
-            <a:r>
-              <a:rPr lang="en-US" sz="1200" kern="1200" dirty="0">
-                <a:solidFill>
-                  <a:schemeClr val="tx1"/>
-                </a:solidFill>
-                <a:effectLst/>
-                <a:latin typeface="+mn-lt"/>
-                <a:ea typeface="+mn-ea"/>
-                <a:cs typeface="+mn-cs"/>
-              </a:rPr>
-              <a:t>}</a:t>
-            </a:r>
-          </a:p>
-          <a:p>
-            <a:r>
-              <a:rPr lang="en-US" sz="1200" kern="1200" dirty="0">
-                <a:solidFill>
-                  <a:schemeClr val="tx1"/>
-                </a:solidFill>
-                <a:effectLst/>
-                <a:latin typeface="+mn-lt"/>
-                <a:ea typeface="+mn-ea"/>
-                <a:cs typeface="+mn-cs"/>
-              </a:rPr>
-              <a:t>x/w\\</a:t>
-            </a:r>
-          </a:p>
-          <a:p>
-            <a:r>
-              <a:rPr lang="en-US" sz="1200" kern="1200" dirty="0">
-                <a:solidFill>
-                  <a:schemeClr val="tx1"/>
-                </a:solidFill>
-                <a:effectLst/>
-                <a:latin typeface="+mn-lt"/>
-                <a:ea typeface="+mn-ea"/>
-                <a:cs typeface="+mn-cs"/>
-              </a:rPr>
-              <a:t>y/w\\</a:t>
-            </a:r>
-          </a:p>
-          <a:p>
-            <a:r>
-              <a:rPr lang="en-US" sz="1200" kern="1200" dirty="0">
-                <a:solidFill>
-                  <a:schemeClr val="tx1"/>
-                </a:solidFill>
-                <a:effectLst/>
-                <a:latin typeface="+mn-lt"/>
-                <a:ea typeface="+mn-ea"/>
-                <a:cs typeface="+mn-cs"/>
-              </a:rPr>
-              <a:t>z/w</a:t>
-            </a:r>
-          </a:p>
-          <a:p>
-            <a:r>
-              <a:rPr lang="en-US" sz="1200" kern="1200" dirty="0">
-                <a:solidFill>
-                  <a:schemeClr val="tx1"/>
-                </a:solidFill>
-                <a:effectLst/>
-                <a:latin typeface="+mn-lt"/>
-                <a:ea typeface="+mn-ea"/>
-                <a:cs typeface="+mn-cs"/>
-              </a:rPr>
-              <a:t>\end{</a:t>
-            </a:r>
-            <a:r>
-              <a:rPr lang="en-US" sz="1200" kern="1200" dirty="0" err="1">
-                <a:solidFill>
-                  <a:schemeClr val="tx1"/>
-                </a:solidFill>
-                <a:effectLst/>
-                <a:latin typeface="+mn-lt"/>
-                <a:ea typeface="+mn-ea"/>
-                <a:cs typeface="+mn-cs"/>
-              </a:rPr>
-              <a:t>pmatrix</a:t>
-            </a:r>
-            <a:r>
-              <a:rPr lang="en-US" sz="1200" kern="1200" dirty="0">
-                <a:solidFill>
-                  <a:schemeClr val="tx1"/>
-                </a:solidFill>
-                <a:effectLst/>
-                <a:latin typeface="+mn-lt"/>
-                <a:ea typeface="+mn-ea"/>
-                <a:cs typeface="+mn-cs"/>
-              </a:rPr>
-              <a:t>}</a:t>
-            </a:r>
           </a:p>
         </p:txBody>
       </p:sp>
@@ -9448,502 +2868,6 @@
           <a:bodyPr/>
           <a:lstStyle/>
           <a:p>
-            <a:pPr marL="171450" indent="-171450">
-              <a:buFont typeface="Arial" charset="0"/>
-              <a:buChar char="•"/>
-            </a:pPr>
-            <a:r>
-              <a:rPr lang="en-US" dirty="0"/>
-              <a:t>A point P=[x y z] in the 3D Euclidean reference system is expressed as Ph = [x y z 1] in Homogenous reference system. Let’s multiply the matrix K (which contains an arrangement of the camera parameters) by Ph: the result is a 3D vector,</a:t>
-            </a:r>
-            <a:r>
-              <a:rPr lang="en-US" baseline="0" dirty="0"/>
-              <a:t> which converted to the Euclidean system is the desired point.</a:t>
-            </a:r>
-          </a:p>
-          <a:p>
-            <a:pPr marL="171450" marR="0" indent="-171450" algn="l" defTabSz="914400" rtl="0" eaLnBrk="1" fontAlgn="auto" latinLnBrk="0" hangingPunct="1">
-              <a:lnSpc>
-                <a:spcPct val="100000"/>
-              </a:lnSpc>
-              <a:spcBef>
-                <a:spcPts val="0"/>
-              </a:spcBef>
-              <a:spcAft>
-                <a:spcPts val="0"/>
-              </a:spcAft>
-              <a:buClrTx/>
-              <a:buSzTx/>
-              <a:buFont typeface="Arial" charset="0"/>
-              <a:buChar char="•"/>
-              <a:tabLst/>
-              <a:defRPr/>
-            </a:pPr>
-            <a:r>
-              <a:rPr lang="en-US" dirty="0"/>
-              <a:t>The conversion from Homogenous to Euclidean returns the actual point p (that’s where the non-linearity takes place). </a:t>
-            </a:r>
-            <a:endParaRPr lang="en-US" baseline="0" dirty="0"/>
-          </a:p>
-          <a:p>
-            <a:pPr marL="171450" marR="0" indent="-171450" algn="l" defTabSz="914400" rtl="0" eaLnBrk="1" fontAlgn="auto" latinLnBrk="0" hangingPunct="1">
-              <a:lnSpc>
-                <a:spcPct val="100000"/>
-              </a:lnSpc>
-              <a:spcBef>
-                <a:spcPts val="0"/>
-              </a:spcBef>
-              <a:spcAft>
-                <a:spcPts val="0"/>
-              </a:spcAft>
-              <a:buClrTx/>
-              <a:buSzTx/>
-              <a:buFont typeface="Arial" charset="0"/>
-              <a:buChar char="•"/>
-              <a:tabLst/>
-              <a:defRPr/>
-            </a:pPr>
-            <a:r>
-              <a:rPr lang="en-US" dirty="0"/>
-              <a:t>This transformation is expressed as a multiplication of the matrix K and the vector Ph. </a:t>
-            </a:r>
-          </a:p>
-          <a:p>
-            <a:pPr marL="171450" indent="-171450">
-              <a:buFont typeface="Arial" charset="0"/>
-              <a:buChar char="•"/>
-            </a:pPr>
-            <a:r>
-              <a:rPr lang="en-US" dirty="0"/>
-              <a:t>The projective transformation can be expressed as a linear transformation in the Homogenous reference system – </a:t>
-            </a:r>
-          </a:p>
-          <a:p>
-            <a:pPr marL="171450" indent="-171450">
-              <a:buFont typeface="Arial" charset="0"/>
-              <a:buChar char="•"/>
-            </a:pPr>
-            <a:r>
-              <a:rPr lang="en-US" dirty="0"/>
-              <a:t>The key advantage of this representation is that we have obtained a much more compact expression for capturing the projective transformation.</a:t>
-            </a:r>
-            <a:endParaRPr lang="en-US" sz="1200" kern="1200" dirty="0">
-              <a:solidFill>
-                <a:schemeClr val="tx1"/>
-              </a:solidFill>
-              <a:effectLst/>
-              <a:latin typeface="+mn-lt"/>
-              <a:ea typeface="+mn-ea"/>
-              <a:cs typeface="+mn-cs"/>
-            </a:endParaRPr>
-          </a:p>
-          <a:p>
-            <a:endParaRPr lang="en-US" sz="1200" kern="1200" dirty="0">
-              <a:solidFill>
-                <a:schemeClr val="tx1"/>
-              </a:solidFill>
-              <a:effectLst/>
-              <a:latin typeface="+mn-lt"/>
-              <a:ea typeface="+mn-ea"/>
-              <a:cs typeface="+mn-cs"/>
-            </a:endParaRPr>
-          </a:p>
-          <a:p>
-            <a:endParaRPr lang="en-US" sz="1200" kern="1200" dirty="0">
-              <a:solidFill>
-                <a:schemeClr val="tx1"/>
-              </a:solidFill>
-              <a:effectLst/>
-              <a:latin typeface="+mn-lt"/>
-              <a:ea typeface="+mn-ea"/>
-              <a:cs typeface="+mn-cs"/>
-            </a:endParaRPr>
-          </a:p>
-          <a:p>
-            <a:r>
-              <a:rPr lang="en-US" sz="1200" kern="1200" dirty="0" err="1">
-                <a:solidFill>
-                  <a:schemeClr val="tx1"/>
-                </a:solidFill>
-                <a:effectLst/>
-                <a:latin typeface="+mn-lt"/>
-                <a:ea typeface="+mn-ea"/>
-                <a:cs typeface="+mn-cs"/>
-              </a:rPr>
-              <a:t>P_c</a:t>
-            </a:r>
-            <a:r>
-              <a:rPr lang="en-US" sz="1200" kern="1200" dirty="0">
-                <a:solidFill>
-                  <a:schemeClr val="tx1"/>
-                </a:solidFill>
-                <a:effectLst/>
-                <a:latin typeface="+mn-lt"/>
-                <a:ea typeface="+mn-ea"/>
-                <a:cs typeface="+mn-cs"/>
-              </a:rPr>
-              <a:t> = \begin{</a:t>
-            </a:r>
-            <a:r>
-              <a:rPr lang="en-US" sz="1200" kern="1200" dirty="0" err="1">
-                <a:solidFill>
-                  <a:schemeClr val="tx1"/>
-                </a:solidFill>
-                <a:effectLst/>
-                <a:latin typeface="+mn-lt"/>
-                <a:ea typeface="+mn-ea"/>
-                <a:cs typeface="+mn-cs"/>
-              </a:rPr>
-              <a:t>pmatrix</a:t>
-            </a:r>
-            <a:r>
-              <a:rPr lang="en-US" sz="1200" kern="1200" dirty="0">
-                <a:solidFill>
-                  <a:schemeClr val="tx1"/>
-                </a:solidFill>
-                <a:effectLst/>
-                <a:latin typeface="+mn-lt"/>
-                <a:ea typeface="+mn-ea"/>
-                <a:cs typeface="+mn-cs"/>
-              </a:rPr>
-              <a:t>}</a:t>
-            </a:r>
-          </a:p>
-          <a:p>
-            <a:r>
-              <a:rPr lang="en-US" sz="1200" kern="1200" dirty="0" err="1">
-                <a:solidFill>
-                  <a:schemeClr val="tx1"/>
-                </a:solidFill>
-                <a:effectLst/>
-                <a:latin typeface="+mn-lt"/>
-                <a:ea typeface="+mn-ea"/>
-                <a:cs typeface="+mn-cs"/>
-              </a:rPr>
-              <a:t>X_c</a:t>
-            </a:r>
-            <a:r>
-              <a:rPr lang="en-US" sz="1200" kern="1200" dirty="0">
-                <a:solidFill>
-                  <a:schemeClr val="tx1"/>
-                </a:solidFill>
-                <a:effectLst/>
-                <a:latin typeface="+mn-lt"/>
-                <a:ea typeface="+mn-ea"/>
-                <a:cs typeface="+mn-cs"/>
-              </a:rPr>
-              <a:t>\\</a:t>
-            </a:r>
-          </a:p>
-          <a:p>
-            <a:r>
-              <a:rPr lang="en-US" sz="1200" kern="1200" dirty="0" err="1">
-                <a:solidFill>
-                  <a:schemeClr val="tx1"/>
-                </a:solidFill>
-                <a:effectLst/>
-                <a:latin typeface="+mn-lt"/>
-                <a:ea typeface="+mn-ea"/>
-                <a:cs typeface="+mn-cs"/>
-              </a:rPr>
-              <a:t>Y_c</a:t>
-            </a:r>
-            <a:r>
-              <a:rPr lang="en-US" sz="1200" kern="1200" dirty="0">
-                <a:solidFill>
-                  <a:schemeClr val="tx1"/>
-                </a:solidFill>
-                <a:effectLst/>
-                <a:latin typeface="+mn-lt"/>
-                <a:ea typeface="+mn-ea"/>
-                <a:cs typeface="+mn-cs"/>
-              </a:rPr>
-              <a:t>\\</a:t>
-            </a:r>
-          </a:p>
-          <a:p>
-            <a:r>
-              <a:rPr lang="en-US" sz="1200" kern="1200" dirty="0" err="1">
-                <a:solidFill>
-                  <a:schemeClr val="tx1"/>
-                </a:solidFill>
-                <a:effectLst/>
-                <a:latin typeface="+mn-lt"/>
-                <a:ea typeface="+mn-ea"/>
-                <a:cs typeface="+mn-cs"/>
-              </a:rPr>
-              <a:t>Z_c</a:t>
-            </a:r>
-            <a:endParaRPr lang="en-US" sz="1200" kern="1200" dirty="0">
-              <a:solidFill>
-                <a:schemeClr val="tx1"/>
-              </a:solidFill>
-              <a:effectLst/>
-              <a:latin typeface="+mn-lt"/>
-              <a:ea typeface="+mn-ea"/>
-              <a:cs typeface="+mn-cs"/>
-            </a:endParaRPr>
-          </a:p>
-          <a:p>
-            <a:r>
-              <a:rPr lang="en-US" sz="1200" kern="1200" dirty="0">
-                <a:solidFill>
-                  <a:schemeClr val="tx1"/>
-                </a:solidFill>
-                <a:effectLst/>
-                <a:latin typeface="+mn-lt"/>
-                <a:ea typeface="+mn-ea"/>
-                <a:cs typeface="+mn-cs"/>
-              </a:rPr>
-              <a:t>\end{</a:t>
-            </a:r>
-            <a:r>
-              <a:rPr lang="en-US" sz="1200" kern="1200" dirty="0" err="1">
-                <a:solidFill>
-                  <a:schemeClr val="tx1"/>
-                </a:solidFill>
-                <a:effectLst/>
-                <a:latin typeface="+mn-lt"/>
-                <a:ea typeface="+mn-ea"/>
-                <a:cs typeface="+mn-cs"/>
-              </a:rPr>
-              <a:t>pmatrix</a:t>
-            </a:r>
-            <a:r>
-              <a:rPr lang="en-US" sz="1200" kern="1200" dirty="0">
-                <a:solidFill>
-                  <a:schemeClr val="tx1"/>
-                </a:solidFill>
-                <a:effectLst/>
-                <a:latin typeface="+mn-lt"/>
-                <a:ea typeface="+mn-ea"/>
-                <a:cs typeface="+mn-cs"/>
-              </a:rPr>
-              <a:t>} \</a:t>
-            </a:r>
-            <a:r>
-              <a:rPr lang="en-US" sz="1200" kern="1200" dirty="0" err="1">
-                <a:solidFill>
-                  <a:schemeClr val="tx1"/>
-                </a:solidFill>
-                <a:effectLst/>
-                <a:latin typeface="+mn-lt"/>
-                <a:ea typeface="+mn-ea"/>
-                <a:cs typeface="+mn-cs"/>
-              </a:rPr>
-              <a:t>Rightarrow</a:t>
-            </a:r>
-            <a:r>
-              <a:rPr lang="en-US" sz="1200" kern="1200" dirty="0">
-                <a:solidFill>
-                  <a:schemeClr val="tx1"/>
-                </a:solidFill>
-                <a:effectLst/>
-                <a:latin typeface="+mn-lt"/>
-                <a:ea typeface="+mn-ea"/>
-                <a:cs typeface="+mn-cs"/>
-              </a:rPr>
-              <a:t> \begin{</a:t>
-            </a:r>
-            <a:r>
-              <a:rPr lang="en-US" sz="1200" kern="1200" dirty="0" err="1">
-                <a:solidFill>
-                  <a:schemeClr val="tx1"/>
-                </a:solidFill>
-                <a:effectLst/>
-                <a:latin typeface="+mn-lt"/>
-                <a:ea typeface="+mn-ea"/>
-                <a:cs typeface="+mn-cs"/>
-              </a:rPr>
-              <a:t>pmatrix</a:t>
-            </a:r>
-            <a:r>
-              <a:rPr lang="en-US" sz="1200" kern="1200" dirty="0">
-                <a:solidFill>
-                  <a:schemeClr val="tx1"/>
-                </a:solidFill>
-                <a:effectLst/>
-                <a:latin typeface="+mn-lt"/>
-                <a:ea typeface="+mn-ea"/>
-                <a:cs typeface="+mn-cs"/>
-              </a:rPr>
-              <a:t>}</a:t>
-            </a:r>
-          </a:p>
-          <a:p>
-            <a:r>
-              <a:rPr lang="en-US" sz="1200" kern="1200" dirty="0" err="1">
-                <a:solidFill>
-                  <a:schemeClr val="tx1"/>
-                </a:solidFill>
-                <a:effectLst/>
-                <a:latin typeface="+mn-lt"/>
-                <a:ea typeface="+mn-ea"/>
-                <a:cs typeface="+mn-cs"/>
-              </a:rPr>
-              <a:t>X_c</a:t>
-            </a:r>
-            <a:r>
-              <a:rPr lang="en-US" sz="1200" kern="1200" dirty="0">
-                <a:solidFill>
-                  <a:schemeClr val="tx1"/>
-                </a:solidFill>
-                <a:effectLst/>
-                <a:latin typeface="+mn-lt"/>
-                <a:ea typeface="+mn-ea"/>
-                <a:cs typeface="+mn-cs"/>
-              </a:rPr>
-              <a:t>\\</a:t>
-            </a:r>
-          </a:p>
-          <a:p>
-            <a:r>
-              <a:rPr lang="en-US" sz="1200" kern="1200" dirty="0" err="1">
-                <a:solidFill>
-                  <a:schemeClr val="tx1"/>
-                </a:solidFill>
-                <a:effectLst/>
-                <a:latin typeface="+mn-lt"/>
-                <a:ea typeface="+mn-ea"/>
-                <a:cs typeface="+mn-cs"/>
-              </a:rPr>
-              <a:t>Y_c</a:t>
-            </a:r>
-            <a:r>
-              <a:rPr lang="en-US" sz="1200" kern="1200" dirty="0">
-                <a:solidFill>
-                  <a:schemeClr val="tx1"/>
-                </a:solidFill>
-                <a:effectLst/>
-                <a:latin typeface="+mn-lt"/>
-                <a:ea typeface="+mn-ea"/>
-                <a:cs typeface="+mn-cs"/>
-              </a:rPr>
-              <a:t>\\</a:t>
-            </a:r>
-          </a:p>
-          <a:p>
-            <a:r>
-              <a:rPr lang="en-US" sz="1200" kern="1200" dirty="0" err="1">
-                <a:solidFill>
-                  <a:schemeClr val="tx1"/>
-                </a:solidFill>
-                <a:effectLst/>
-                <a:latin typeface="+mn-lt"/>
-                <a:ea typeface="+mn-ea"/>
-                <a:cs typeface="+mn-cs"/>
-              </a:rPr>
-              <a:t>Z_c</a:t>
-            </a:r>
-            <a:r>
-              <a:rPr lang="en-US" sz="1200" kern="1200" dirty="0">
-                <a:solidFill>
-                  <a:schemeClr val="tx1"/>
-                </a:solidFill>
-                <a:effectLst/>
-                <a:latin typeface="+mn-lt"/>
-                <a:ea typeface="+mn-ea"/>
-                <a:cs typeface="+mn-cs"/>
-              </a:rPr>
-              <a:t>\\</a:t>
-            </a:r>
-          </a:p>
-          <a:p>
-            <a:r>
-              <a:rPr lang="en-US" sz="1200" kern="1200" dirty="0">
-                <a:solidFill>
-                  <a:schemeClr val="tx1"/>
-                </a:solidFill>
-                <a:effectLst/>
-                <a:latin typeface="+mn-lt"/>
-                <a:ea typeface="+mn-ea"/>
-                <a:cs typeface="+mn-cs"/>
-              </a:rPr>
-              <a:t>1</a:t>
-            </a:r>
-          </a:p>
-          <a:p>
-            <a:r>
-              <a:rPr lang="en-US" sz="1200" kern="1200" dirty="0">
-                <a:solidFill>
-                  <a:schemeClr val="tx1"/>
-                </a:solidFill>
-                <a:effectLst/>
-                <a:latin typeface="+mn-lt"/>
-                <a:ea typeface="+mn-ea"/>
-                <a:cs typeface="+mn-cs"/>
-              </a:rPr>
-              <a:t>\end{</a:t>
-            </a:r>
-            <a:r>
-              <a:rPr lang="en-US" sz="1200" kern="1200" dirty="0" err="1">
-                <a:solidFill>
-                  <a:schemeClr val="tx1"/>
-                </a:solidFill>
-                <a:effectLst/>
-                <a:latin typeface="+mn-lt"/>
-                <a:ea typeface="+mn-ea"/>
-                <a:cs typeface="+mn-cs"/>
-              </a:rPr>
-              <a:t>pmatrix</a:t>
-            </a:r>
-            <a:r>
-              <a:rPr lang="en-US" sz="1200" kern="1200" dirty="0">
-                <a:solidFill>
-                  <a:schemeClr val="tx1"/>
-                </a:solidFill>
-                <a:effectLst/>
-                <a:latin typeface="+mn-lt"/>
-                <a:ea typeface="+mn-ea"/>
-                <a:cs typeface="+mn-cs"/>
-              </a:rPr>
-              <a:t>} = </a:t>
-            </a:r>
-            <a:r>
-              <a:rPr lang="en-US" sz="1200" kern="1200" dirty="0" err="1">
-                <a:solidFill>
-                  <a:schemeClr val="tx1"/>
-                </a:solidFill>
-                <a:effectLst/>
-                <a:latin typeface="+mn-lt"/>
-                <a:ea typeface="+mn-ea"/>
-                <a:cs typeface="+mn-cs"/>
-              </a:rPr>
-              <a:t>P_c^h</a:t>
-            </a:r>
-            <a:endParaRPr lang="en-US" sz="1200" kern="1200" dirty="0">
-              <a:solidFill>
-                <a:schemeClr val="tx1"/>
-              </a:solidFill>
-              <a:effectLst/>
-              <a:latin typeface="+mn-lt"/>
-              <a:ea typeface="+mn-ea"/>
-              <a:cs typeface="+mn-cs"/>
-            </a:endParaRPr>
-          </a:p>
-          <a:p>
-            <a:br>
-              <a:rPr lang="en-US" sz="1200" kern="1200" dirty="0">
-                <a:solidFill>
-                  <a:schemeClr val="tx1"/>
-                </a:solidFill>
-                <a:effectLst/>
-                <a:latin typeface="+mn-lt"/>
-                <a:ea typeface="+mn-ea"/>
-                <a:cs typeface="+mn-cs"/>
-              </a:rPr>
-            </a:br>
-            <a:endParaRPr lang="en-US" sz="1200" kern="1200" dirty="0">
-              <a:solidFill>
-                <a:schemeClr val="tx1"/>
-              </a:solidFill>
-              <a:effectLst/>
-              <a:latin typeface="+mn-lt"/>
-              <a:ea typeface="+mn-ea"/>
-              <a:cs typeface="+mn-cs"/>
-            </a:endParaRPr>
-          </a:p>
-          <a:p>
             <a:endParaRPr lang="en-US" dirty="0"/>
           </a:p>
         </p:txBody>
@@ -10032,39 +2956,7 @@
               <a:buFont typeface="Arial" charset="0"/>
               <a:buChar char="•"/>
             </a:pPr>
-            <a:r>
-              <a:rPr lang="en-US"/>
-              <a:t>We say that an image is skewed when the camera coordinate system is skewed; that is, the two image axes are not perpendicular (as they should) and the angle </a:t>
-            </a:r>
-            <a:r>
-              <a:rPr lang="en-US" err="1"/>
-              <a:t>θ</a:t>
-            </a:r>
-            <a:r>
-              <a:rPr lang="en-US"/>
-              <a:t> between the two axes is slightly larger or smaller than 90 degrees.</a:t>
-            </a:r>
-          </a:p>
-          <a:p>
-            <a:pPr marL="171450" indent="-171450">
-              <a:buFont typeface="Arial" charset="0"/>
-              <a:buChar char="•"/>
-            </a:pPr>
-            <a:r>
-              <a:rPr lang="en-US" sz="1200" kern="1200">
-                <a:solidFill>
-                  <a:schemeClr val="tx1"/>
-                </a:solidFill>
-                <a:effectLst/>
-                <a:latin typeface="+mn-lt"/>
-                <a:ea typeface="+mn-ea"/>
-                <a:cs typeface="+mn-cs"/>
-              </a:rPr>
-              <a:t>5 parameters: These parameters encompass focal length, image sensor format, and principal point. </a:t>
-            </a:r>
-          </a:p>
-          <a:p>
-            <a:endParaRPr lang="en-US" sz="1200" kern="1200">
+            <a:endParaRPr lang="en-US" sz="1200" kern="1200" dirty="0">
               <a:solidFill>
                 <a:schemeClr val="tx1"/>
               </a:solidFill>
@@ -10073,135 +2965,6 @@
               <a:ea typeface="+mn-ea"/>
               <a:cs typeface="+mn-cs"/>
             </a:endParaRPr>
-          </a:p>
-          <a:p>
-            <a:endParaRPr lang="en-US" sz="1200" kern="1200">
-              <a:solidFill>
-                <a:schemeClr val="tx1"/>
-              </a:solidFill>
-              <a:effectLst/>
-              <a:latin typeface="+mn-lt"/>
-              <a:ea typeface="+mn-ea"/>
-              <a:cs typeface="+mn-cs"/>
-            </a:endParaRPr>
-          </a:p>
-          <a:p>
-            <a:r>
-              <a:rPr lang="en-US" sz="1200" kern="1200">
-                <a:solidFill>
-                  <a:schemeClr val="tx1"/>
-                </a:solidFill>
-                <a:effectLst/>
-                <a:latin typeface="+mn-lt"/>
-                <a:ea typeface="+mn-ea"/>
-                <a:cs typeface="+mn-cs"/>
-              </a:rPr>
-              <a:t>K = \begin{</a:t>
-            </a:r>
-            <a:r>
-              <a:rPr lang="en-US" sz="1200" kern="1200" err="1">
-                <a:solidFill>
-                  <a:schemeClr val="tx1"/>
-                </a:solidFill>
-                <a:effectLst/>
-                <a:latin typeface="+mn-lt"/>
-                <a:ea typeface="+mn-ea"/>
-                <a:cs typeface="+mn-cs"/>
-              </a:rPr>
-              <a:t>bmatrix</a:t>
-            </a:r>
-            <a:r>
-              <a:rPr lang="en-US" sz="1200" kern="1200">
-                <a:solidFill>
-                  <a:schemeClr val="tx1"/>
-                </a:solidFill>
-                <a:effectLst/>
-                <a:latin typeface="+mn-lt"/>
-                <a:ea typeface="+mn-ea"/>
-                <a:cs typeface="+mn-cs"/>
-              </a:rPr>
-              <a:t>}</a:t>
-            </a:r>
-          </a:p>
-          <a:p>
-            <a:r>
-              <a:rPr lang="en-US" sz="1200" kern="1200">
-                <a:solidFill>
-                  <a:schemeClr val="tx1"/>
-                </a:solidFill>
-                <a:effectLst/>
-                <a:latin typeface="+mn-lt"/>
-                <a:ea typeface="+mn-ea"/>
-                <a:cs typeface="+mn-cs"/>
-              </a:rPr>
-              <a:t>\alpha &amp;{\color{red} \gamma} &amp; u_0\\</a:t>
-            </a:r>
-          </a:p>
-          <a:p>
-            <a:r>
-              <a:rPr lang="en-US" sz="1200" kern="1200">
-                <a:solidFill>
-                  <a:schemeClr val="tx1"/>
-                </a:solidFill>
-                <a:effectLst/>
-                <a:latin typeface="+mn-lt"/>
-                <a:ea typeface="+mn-ea"/>
-                <a:cs typeface="+mn-cs"/>
-              </a:rPr>
-              <a:t>0 &amp; \beta &amp; v_0\\</a:t>
-            </a:r>
-          </a:p>
-          <a:p>
-            <a:r>
-              <a:rPr lang="en-US" sz="1200" kern="1200">
-                <a:solidFill>
-                  <a:schemeClr val="tx1"/>
-                </a:solidFill>
-                <a:effectLst/>
-                <a:latin typeface="+mn-lt"/>
-                <a:ea typeface="+mn-ea"/>
-                <a:cs typeface="+mn-cs"/>
-              </a:rPr>
-              <a:t>0 &amp; 0&amp; 1</a:t>
-            </a:r>
-          </a:p>
-          <a:p>
-            <a:r>
-              <a:rPr lang="en-US" sz="1200" kern="1200">
-                <a:solidFill>
-                  <a:schemeClr val="tx1"/>
-                </a:solidFill>
-                <a:effectLst/>
-                <a:latin typeface="+mn-lt"/>
-                <a:ea typeface="+mn-ea"/>
-                <a:cs typeface="+mn-cs"/>
-              </a:rPr>
-              <a:t>\end{</a:t>
-            </a:r>
-            <a:r>
-              <a:rPr lang="en-US" sz="1200" kern="1200" err="1">
-                <a:solidFill>
-                  <a:schemeClr val="tx1"/>
-                </a:solidFill>
-                <a:effectLst/>
-                <a:latin typeface="+mn-lt"/>
-                <a:ea typeface="+mn-ea"/>
-                <a:cs typeface="+mn-cs"/>
-              </a:rPr>
-              <a:t>bmatrix</a:t>
-            </a:r>
-            <a:r>
-              <a:rPr lang="en-US" sz="1200" kern="1200">
-                <a:solidFill>
-                  <a:schemeClr val="tx1"/>
-                </a:solidFill>
-                <a:effectLst/>
-                <a:latin typeface="+mn-lt"/>
-                <a:ea typeface="+mn-ea"/>
-                <a:cs typeface="+mn-cs"/>
-              </a:rPr>
-              <a:t>}</a:t>
-            </a:r>
           </a:p>
         </p:txBody>
       </p:sp>
@@ -10370,7 +3133,7 @@
           <a:p>
             <a:fld id="{EC6E59AD-1965-0B4F-BBAC-611B690A4A50}" type="datetime1">
               <a:rPr lang="en-US" smtClean="0"/>
-              <a:t>12/20/2025</a:t>
+              <a:t>8/13/26</a:t>
             </a:fld>
             <a:endParaRPr lang="en-US" dirty="0"/>
           </a:p>
@@ -10593,7 +3356,7 @@
           <a:p>
             <a:fld id="{4F1A43F1-81BF-1D4E-8918-631ADEAFD7A0}" type="datetime1">
               <a:rPr lang="en-US" smtClean="0"/>
-              <a:t>12/20/2025</a:t>
+              <a:t>8/13/26</a:t>
             </a:fld>
             <a:endParaRPr lang="en-US"/>
           </a:p>
@@ -10864,7 +3627,7 @@
           <a:p>
             <a:fld id="{2E4EF09A-6CCF-1F4C-8785-E3CA2FE17814}" type="datetime1">
               <a:rPr lang="en-US" smtClean="0"/>
-              <a:t>12/20/2025</a:t>
+              <a:t>8/13/26</a:t>
             </a:fld>
             <a:endParaRPr lang="en-US"/>
           </a:p>
@@ -11534,7 +4297,7 @@
           <a:p>
             <a:fld id="{BF828213-04AF-AC4C-AE81-2DAF874BE0AA}" type="datetime1">
               <a:rPr lang="en-US" smtClean="0"/>
-              <a:t>12/20/2025</a:t>
+              <a:t>8/13/26</a:t>
             </a:fld>
             <a:endParaRPr lang="en-US"/>
           </a:p>
@@ -11772,7 +4535,7 @@
           <a:p>
             <a:fld id="{5A53D8D5-C0C3-7C47-AB9D-9886C2C1C767}" type="datetime1">
               <a:rPr lang="en-US" smtClean="0"/>
-              <a:t>12/20/2025</a:t>
+              <a:t>8/13/26</a:t>
             </a:fld>
             <a:endParaRPr lang="en-US"/>
           </a:p>
@@ -12140,7 +4903,7 @@
           <a:p>
             <a:fld id="{F4E52D6E-59EF-3443-AAEB-E4475832FEBC}" type="datetime1">
               <a:rPr lang="en-US" smtClean="0"/>
-              <a:t>12/20/2025</a:t>
+              <a:t>8/13/26</a:t>
             </a:fld>
             <a:endParaRPr lang="en-US"/>
           </a:p>
@@ -12591,7 +5354,7 @@
           <a:p>
             <a:fld id="{7E93F09F-0F67-B24D-8A71-B618D42C92E1}" type="datetime1">
               <a:rPr lang="en-US" smtClean="0"/>
-              <a:t>12/20/2025</a:t>
+              <a:t>8/13/26</a:t>
             </a:fld>
             <a:endParaRPr lang="en-US"/>
           </a:p>
@@ -12678,7 +5441,7 @@
                       <m:sSubPr>
                         <m:ctrlPr>
                           <a:rPr lang="en-US" i="1">
-                            <a:latin typeface="Cambria Math" panose="02040503050406030204" pitchFamily="18" charset="0"/>
+                            <a:latin typeface="Cambria Math" charset="0"/>
                           </a:rPr>
                         </m:ctrlPr>
                       </m:sSubPr>
@@ -12822,7 +5585,7 @@
                       <m:sSubPr>
                         <m:ctrlPr>
                           <a:rPr lang="en-US" i="1">
-                            <a:latin typeface="Cambria Math" panose="02040503050406030204" pitchFamily="18" charset="0"/>
+                            <a:latin typeface="Cambria Math" charset="0"/>
                           </a:rPr>
                         </m:ctrlPr>
                       </m:sSubPr>
@@ -13082,7 +5845,7 @@
           <a:p>
             <a:fld id="{4874945D-5288-D540-A7B4-6638325BFF1E}" type="datetime1">
               <a:rPr lang="en-US" smtClean="0"/>
-              <a:t>12/20/2025</a:t>
+              <a:t>8/13/26</a:t>
             </a:fld>
             <a:endParaRPr lang="en-US"/>
           </a:p>
@@ -13528,7 +6291,7 @@
           <a:p>
             <a:fld id="{634C25D9-0710-084A-A23F-1536884FE22C}" type="datetime1">
               <a:rPr lang="en-US" smtClean="0"/>
-              <a:t>12/20/2025</a:t>
+              <a:t>8/13/26</a:t>
             </a:fld>
             <a:endParaRPr lang="en-US"/>
           </a:p>
@@ -13767,7 +6530,7 @@
                       <m:sSubPr>
                         <m:ctrlPr>
                           <a:rPr lang="en-US" b="0" i="1" smtClean="0">
-                            <a:latin typeface="Cambria Math" panose="02040503050406030204" pitchFamily="18" charset="0"/>
+                            <a:latin typeface="Cambria Math" charset="0"/>
                           </a:rPr>
                         </m:ctrlPr>
                       </m:sSubPr>
@@ -13806,7 +6569,7 @@
                       <m:sSubPr>
                         <m:ctrlPr>
                           <a:rPr lang="en-US" b="0" i="1" smtClean="0">
-                            <a:latin typeface="Cambria Math" panose="02040503050406030204" pitchFamily="18" charset="0"/>
+                            <a:latin typeface="Cambria Math" charset="0"/>
                             <a:ea typeface="Cambria Math" charset="0"/>
                             <a:cs typeface="Cambria Math" charset="0"/>
                           </a:rPr>
@@ -14120,7 +6883,7 @@
                       <m:sSubPr>
                         <m:ctrlPr>
                           <a:rPr lang="en-US" b="0" i="1" smtClean="0">
-                            <a:latin typeface="Cambria Math" panose="02040503050406030204" pitchFamily="18" charset="0"/>
+                            <a:latin typeface="Cambria Math" charset="0"/>
                           </a:rPr>
                         </m:ctrlPr>
                       </m:sSubPr>
@@ -14157,7 +6920,7 @@
                       <m:sSubPr>
                         <m:ctrlPr>
                           <a:rPr lang="en-US" b="0" i="1" smtClean="0">
-                            <a:latin typeface="Cambria Math" panose="02040503050406030204" pitchFamily="18" charset="0"/>
+                            <a:latin typeface="Cambria Math" charset="0"/>
                           </a:rPr>
                         </m:ctrlPr>
                       </m:sSubPr>
@@ -14194,7 +6957,7 @@
                       <m:sSubPr>
                         <m:ctrlPr>
                           <a:rPr lang="en-US" b="0" i="1" smtClean="0">
-                            <a:latin typeface="Cambria Math" panose="02040503050406030204" pitchFamily="18" charset="0"/>
+                            <a:latin typeface="Cambria Math" charset="0"/>
                           </a:rPr>
                         </m:ctrlPr>
                       </m:sSubPr>
@@ -14255,8 +7018,8 @@
                     <m:sSub>
                       <m:sSubPr>
                         <m:ctrlPr>
-                          <a:rPr lang="en-US" i="1">
-                            <a:latin typeface="Cambria Math" panose="02040503050406030204" pitchFamily="18" charset="0"/>
+                          <a:rPr lang="en-US" b="0" i="1" smtClean="0">
+                            <a:latin typeface="Cambria Math" charset="0"/>
                           </a:rPr>
                         </m:ctrlPr>
                       </m:sSubPr>
@@ -14286,8 +7049,8 @@
                     <m:sSub>
                       <m:sSubPr>
                         <m:ctrlPr>
-                          <a:rPr lang="en-US" i="1">
-                            <a:latin typeface="Cambria Math" panose="02040503050406030204" pitchFamily="18" charset="0"/>
+                          <a:rPr lang="en-US" b="0" i="1" smtClean="0">
+                            <a:latin typeface="Cambria Math" charset="0"/>
                           </a:rPr>
                         </m:ctrlPr>
                       </m:sSubPr>
@@ -14317,8 +7080,8 @@
                     <m:sSub>
                       <m:sSubPr>
                         <m:ctrlPr>
-                          <a:rPr lang="en-US" i="1">
-                            <a:latin typeface="Cambria Math" panose="02040503050406030204" pitchFamily="18" charset="0"/>
+                          <a:rPr lang="en-US" b="0" i="1" smtClean="0">
+                            <a:latin typeface="Cambria Math" charset="0"/>
                           </a:rPr>
                         </m:ctrlPr>
                       </m:sSubPr>
@@ -14852,7 +7615,7 @@
           <a:p>
             <a:fld id="{4B5E4F07-043D-AA48-80DB-4C1CE4153F62}" type="datetime1">
               <a:rPr lang="en-US" smtClean="0"/>
-              <a:t>12/20/2025</a:t>
+              <a:t>8/13/26</a:t>
             </a:fld>
             <a:endParaRPr lang="en-US"/>
           </a:p>
@@ -15222,7 +7985,7 @@
                         <m:chr m:val="̃"/>
                         <m:ctrlPr>
                           <a:rPr lang="en-US" b="0" i="1" smtClean="0">
-                            <a:latin typeface="Cambria Math" panose="02040503050406030204" pitchFamily="18" charset="0"/>
+                            <a:latin typeface="Cambria Math" charset="0"/>
                           </a:rPr>
                         </m:ctrlPr>
                       </m:accPr>
@@ -15318,7 +8081,7 @@
           <a:p>
             <a:fld id="{02FCCDB2-26BF-3240-AB22-7BAF09D6F93A}" type="datetime1">
               <a:rPr lang="en-US" smtClean="0"/>
-              <a:t>12/20/2025</a:t>
+              <a:t>8/13/26</a:t>
             </a:fld>
             <a:endParaRPr lang="en-US"/>
           </a:p>
@@ -15613,7 +8376,7 @@
                       <m:sSupPr>
                         <m:ctrlPr>
                           <a:rPr lang="en-US" b="0" i="1" smtClean="0">
-                            <a:latin typeface="Cambria Math" panose="02040503050406030204" pitchFamily="18" charset="0"/>
+                            <a:latin typeface="Cambria Math" charset="0"/>
                           </a:rPr>
                         </m:ctrlPr>
                       </m:sSupPr>
@@ -15629,7 +8392,7 @@
                             <m:chr m:val="̃"/>
                             <m:ctrlPr>
                               <a:rPr lang="en-US" i="1">
-                                <a:latin typeface="Cambria Math" panose="02040503050406030204" pitchFamily="18" charset="0"/>
+                                <a:latin typeface="Cambria Math" charset="0"/>
                               </a:rPr>
                             </m:ctrlPr>
                           </m:accPr>
@@ -15657,7 +8420,7 @@
                         <m:chr m:val="̃"/>
                         <m:ctrlPr>
                           <a:rPr lang="en-US" i="1">
-                            <a:latin typeface="Cambria Math" panose="02040503050406030204" pitchFamily="18" charset="0"/>
+                            <a:latin typeface="Cambria Math" charset="0"/>
                           </a:rPr>
                         </m:ctrlPr>
                       </m:accPr>
@@ -15737,7 +8500,7 @@
           <a:p>
             <a:fld id="{E7C26461-18D1-A449-980F-E3764B268569}" type="datetime1">
               <a:rPr lang="en-US" smtClean="0"/>
-              <a:t>12/20/2025</a:t>
+              <a:t>8/13/26</a:t>
             </a:fld>
             <a:endParaRPr lang="en-US"/>
           </a:p>
@@ -15888,8 +8651,8 @@
                     <m:sSub>
                       <m:sSubPr>
                         <m:ctrlPr>
-                          <a:rPr lang="en-US" b="0" i="1" smtClean="0">
-                            <a:latin typeface="Cambria Math" panose="02040503050406030204" pitchFamily="18" charset="0"/>
+                          <a:rPr lang="en-US" b="0" i="0" smtClean="0">
+                            <a:latin typeface="Cambria Math" charset="0"/>
                           </a:rPr>
                         </m:ctrlPr>
                       </m:sSubPr>
@@ -16019,7 +8782,7 @@
           <a:p>
             <a:fld id="{8320C0CB-522F-9D49-B14E-32E1EAA9393F}" type="datetime1">
               <a:rPr lang="en-US" smtClean="0"/>
-              <a:t>12/20/2025</a:t>
+              <a:t>8/13/26</a:t>
             </a:fld>
             <a:endParaRPr lang="en-US"/>
           </a:p>
@@ -16195,7 +8958,7 @@
           <a:p>
             <a:fld id="{3951F07E-F16A-2A40-8168-4C568DBB1998}" type="datetime1">
               <a:rPr lang="en-US" smtClean="0"/>
-              <a:t>12/20/2025</a:t>
+              <a:t>8/13/26</a:t>
             </a:fld>
             <a:endParaRPr lang="en-US"/>
           </a:p>
@@ -16299,7 +9062,7 @@
           <a:p>
             <a:fld id="{656DF391-C9ED-F646-A0B7-F97748F9567B}" type="datetime1">
               <a:rPr lang="en-US" smtClean="0"/>
-              <a:t>12/20/2025</a:t>
+              <a:t>8/13/26</a:t>
             </a:fld>
             <a:endParaRPr lang="en-US"/>
           </a:p>
@@ -17109,7 +9872,7 @@
           <a:p>
             <a:fld id="{5003CF10-FF63-3D49-B6EE-9C4C6E9319ED}" type="datetime1">
               <a:rPr lang="en-US" smtClean="0"/>
-              <a:t>12/20/2025</a:t>
+              <a:t>8/13/26</a:t>
             </a:fld>
             <a:endParaRPr lang="en-US"/>
           </a:p>
@@ -17321,7 +10084,7 @@
           <a:p>
             <a:fld id="{BA224C7D-ECBC-D34A-8AA0-8EC728FD4F55}" type="datetime1">
               <a:rPr lang="en-US" smtClean="0"/>
-              <a:t>12/20/2025</a:t>
+              <a:t>8/13/26</a:t>
             </a:fld>
             <a:endParaRPr lang="en-US"/>
           </a:p>
@@ -17448,7 +10211,7 @@
           <a:p>
             <a:fld id="{7A84A4F2-0414-8D4D-B142-646010AAC0F4}" type="datetime1">
               <a:rPr lang="en-US" smtClean="0"/>
-              <a:t>12/20/2025</a:t>
+              <a:t>8/13/26</a:t>
             </a:fld>
             <a:endParaRPr lang="en-US"/>
           </a:p>
@@ -17599,7 +10362,7 @@
           <a:p>
             <a:fld id="{45E31C4D-9052-FF44-BDBD-716BCC43D8DC}" type="datetime1">
               <a:rPr lang="en-US" smtClean="0"/>
-              <a:t>12/20/2025</a:t>
+              <a:t>8/13/26</a:t>
             </a:fld>
             <a:endParaRPr lang="en-US"/>
           </a:p>
@@ -17706,11 +10469,11 @@
                     <m:sSup>
                       <m:sSupPr>
                         <m:ctrlPr>
-                          <a:rPr lang="en-US" sz="2800" b="0" i="1" smtClean="0">
+                          <a:rPr lang="en-US" sz="2800" i="1">
                             <a:solidFill>
                               <a:schemeClr val="tx1"/>
                             </a:solidFill>
-                            <a:latin typeface="Cambria Math" panose="02040503050406030204" pitchFamily="18" charset="0"/>
+                            <a:latin typeface="Cambria Math" charset="0"/>
                           </a:rPr>
                         </m:ctrlPr>
                       </m:sSupPr>
@@ -17775,7 +10538,7 @@
                         <m:chr m:val="̅"/>
                         <m:ctrlPr>
                           <a:rPr lang="en-US" sz="2800" b="0" i="1" smtClean="0">
-                            <a:latin typeface="Cambria Math" panose="02040503050406030204" pitchFamily="18" charset="0"/>
+                            <a:latin typeface="Cambria Math" charset="0"/>
                           </a:rPr>
                         </m:ctrlPr>
                       </m:accPr>
@@ -17816,7 +10579,7 @@
                       <m:accPr>
                         <m:chr m:val="̅"/>
                         <m:ctrlPr>
-                          <a:rPr lang="en-US" sz="2800" i="1">
+                          <a:rPr lang="en-US" sz="2800" b="0" i="1" smtClean="0">
                             <a:latin typeface="Cambria Math" panose="02040503050406030204" pitchFamily="18" charset="0"/>
                           </a:rPr>
                         </m:ctrlPr>
@@ -17825,8 +10588,8 @@
                         <m:sSup>
                           <m:sSupPr>
                             <m:ctrlPr>
-                              <a:rPr lang="en-US" sz="2800" b="0" i="1" smtClean="0">
-                                <a:latin typeface="Cambria Math" panose="02040503050406030204" pitchFamily="18" charset="0"/>
+                              <a:rPr lang="en-US" sz="2800" i="1">
+                                <a:latin typeface="Cambria Math" charset="0"/>
                               </a:rPr>
                             </m:ctrlPr>
                           </m:sSupPr>
@@ -17850,8 +10613,8 @@
                         <m:sSup>
                           <m:sSupPr>
                             <m:ctrlPr>
-                              <a:rPr lang="en-US" sz="2800" b="0" i="1" smtClean="0">
-                                <a:latin typeface="Cambria Math" panose="02040503050406030204" pitchFamily="18" charset="0"/>
+                              <a:rPr lang="en-US" sz="2800" i="1">
+                                <a:latin typeface="Cambria Math" charset="0"/>
                               </a:rPr>
                             </m:ctrlPr>
                           </m:sSupPr>
@@ -18004,7 +10767,7 @@
           <a:p>
             <a:fld id="{B4BC7CAC-A1BE-D145-9147-D96518662327}" type="datetime1">
               <a:rPr lang="en-US" smtClean="0"/>
-              <a:t>12/20/2025</a:t>
+              <a:t>8/13/26</a:t>
             </a:fld>
             <a:endParaRPr lang="en-US"/>
           </a:p>
@@ -18142,8 +10905,8 @@
                     <m:sSup>
                       <m:sSupPr>
                         <m:ctrlPr>
-                          <a:rPr lang="en-US" sz="2800" i="1">
-                            <a:latin typeface="Cambria Math" panose="02040503050406030204" pitchFamily="18" charset="0"/>
+                          <a:rPr lang="en-US" sz="2800" b="0" i="1" smtClean="0">
+                            <a:latin typeface="Cambria Math" charset="0"/>
                           </a:rPr>
                         </m:ctrlPr>
                       </m:sSupPr>
@@ -18394,7 +11157,7 @@
           <a:p>
             <a:fld id="{B47FBA6B-78FA-E24A-8DE8-8AE8746D8EE3}" type="datetime1">
               <a:rPr lang="en-US" smtClean="0"/>
-              <a:t>12/20/2025</a:t>
+              <a:t>8/13/26</a:t>
             </a:fld>
             <a:endParaRPr lang="en-US"/>
           </a:p>
@@ -18583,7 +11346,7 @@
             </a:pPr>
             <a:fld id="{50FD7D44-4CBD-814B-9B08-62ADEB196032}" type="datetime1">
               <a:rPr lang="en-US" smtClean="0"/>
-              <a:t>12/20/2025</a:t>
+              <a:t>8/13/26</a:t>
             </a:fld>
             <a:endParaRPr/>
           </a:p>
@@ -19194,7 +11957,7 @@
           <a:p>
             <a:fld id="{9574F506-5A10-D145-85BC-8A889C80E15F}" type="datetime1">
               <a:rPr lang="en-US" smtClean="0"/>
-              <a:t>12/20/2025</a:t>
+              <a:t>8/13/26</a:t>
             </a:fld>
             <a:endParaRPr lang="en-US"/>
           </a:p>
@@ -19434,7 +12197,7 @@
                       <m:sSubPr>
                         <m:ctrlPr>
                           <a:rPr lang="en-US" b="0" i="1" smtClean="0">
-                            <a:latin typeface="Cambria Math" panose="02040503050406030204" pitchFamily="18" charset="0"/>
+                            <a:latin typeface="Cambria Math" charset="0"/>
                           </a:rPr>
                         </m:ctrlPr>
                       </m:sSubPr>
@@ -19510,8 +12273,8 @@
                     <m:sSub>
                       <m:sSubPr>
                         <m:ctrlPr>
-                          <a:rPr lang="en-US" i="1" smtClean="0">
-                            <a:latin typeface="Cambria Math" panose="02040503050406030204" pitchFamily="18" charset="0"/>
+                          <a:rPr lang="en-US" i="1">
+                            <a:latin typeface="Cambria Math" charset="0"/>
                           </a:rPr>
                         </m:ctrlPr>
                       </m:sSubPr>
@@ -19544,7 +12307,7 @@
                       <m:sSubPr>
                         <m:ctrlPr>
                           <a:rPr lang="en-US" i="1">
-                            <a:latin typeface="Cambria Math" panose="02040503050406030204" pitchFamily="18" charset="0"/>
+                            <a:latin typeface="Cambria Math" charset="0"/>
                           </a:rPr>
                         </m:ctrlPr>
                       </m:sSubPr>
@@ -19975,7 +12738,7 @@
                       <m:sSubPr>
                         <m:ctrlPr>
                           <a:rPr lang="en-US" sz="2800" i="1">
-                            <a:latin typeface="Cambria Math" panose="02040503050406030204" pitchFamily="18" charset="0"/>
+                            <a:latin typeface="Cambria Math" charset="0"/>
                           </a:rPr>
                         </m:ctrlPr>
                       </m:sSubPr>
@@ -20006,7 +12769,7 @@
                       <m:sSubPr>
                         <m:ctrlPr>
                           <a:rPr lang="en-US" sz="2800" b="0" i="1" smtClean="0">
-                            <a:latin typeface="Cambria Math" panose="02040503050406030204" pitchFamily="18" charset="0"/>
+                            <a:latin typeface="Cambria Math" charset="0"/>
                           </a:rPr>
                         </m:ctrlPr>
                       </m:sSubPr>
@@ -20037,7 +12800,7 @@
                       <m:sSubPr>
                         <m:ctrlPr>
                           <a:rPr lang="en-US" sz="2800" b="0" i="1" smtClean="0">
-                            <a:latin typeface="Cambria Math" panose="02040503050406030204" pitchFamily="18" charset="0"/>
+                            <a:latin typeface="Cambria Math" charset="0"/>
                           </a:rPr>
                         </m:ctrlPr>
                       </m:sSubPr>
@@ -20068,7 +12831,7 @@
                       <m:sSubPr>
                         <m:ctrlPr>
                           <a:rPr lang="en-US" sz="2800" b="0" i="1" smtClean="0">
-                            <a:latin typeface="Cambria Math" panose="02040503050406030204" pitchFamily="18" charset="0"/>
+                            <a:latin typeface="Cambria Math" charset="0"/>
                           </a:rPr>
                         </m:ctrlPr>
                       </m:sSubPr>
@@ -20215,7 +12978,7 @@
           <a:p>
             <a:fld id="{C267B199-DF51-764C-B82E-1DCC654197A4}" type="datetime1">
               <a:rPr lang="en-US" smtClean="0"/>
-              <a:t>12/20/2025</a:t>
+              <a:t>8/13/26</a:t>
             </a:fld>
             <a:endParaRPr lang="en-US"/>
           </a:p>
@@ -20728,7 +13491,7 @@
           <a:p>
             <a:fld id="{143C54D0-1E55-274A-97AF-4C11C09E3BFE}" type="datetime1">
               <a:rPr lang="en-US" smtClean="0"/>
-              <a:t>12/20/2025</a:t>
+              <a:t>8/13/26</a:t>
             </a:fld>
             <a:endParaRPr lang="en-US"/>
           </a:p>
@@ -21382,7 +14145,7 @@
                         <m:chr m:val="̃"/>
                         <m:ctrlPr>
                           <a:rPr lang="en-US" b="0" i="1" smtClean="0">
-                            <a:latin typeface="Cambria Math" panose="02040503050406030204" pitchFamily="18" charset="0"/>
+                            <a:latin typeface="Cambria Math" charset="0"/>
                           </a:rPr>
                         </m:ctrlPr>
                       </m:accPr>
@@ -21406,7 +14169,7 @@
                         <m:chr m:val="̃"/>
                         <m:ctrlPr>
                           <a:rPr lang="en-US" b="0" i="1" smtClean="0">
-                            <a:latin typeface="Cambria Math" panose="02040503050406030204" pitchFamily="18" charset="0"/>
+                            <a:latin typeface="Cambria Math" charset="0"/>
                           </a:rPr>
                         </m:ctrlPr>
                       </m:accPr>
@@ -21478,7 +14241,7 @@
                       <m:sSubPr>
                         <m:ctrlPr>
                           <a:rPr lang="en-US" b="0" i="1" smtClean="0">
-                            <a:latin typeface="Cambria Math" panose="02040503050406030204" pitchFamily="18" charset="0"/>
+                            <a:latin typeface="Cambria Math" charset="0"/>
                           </a:rPr>
                         </m:ctrlPr>
                       </m:sSubPr>
@@ -21511,7 +14274,7 @@
                       <m:sSubPr>
                         <m:ctrlPr>
                           <a:rPr lang="en-US" i="1">
-                            <a:latin typeface="Cambria Math" panose="02040503050406030204" pitchFamily="18" charset="0"/>
+                            <a:latin typeface="Cambria Math" charset="0"/>
                           </a:rPr>
                         </m:ctrlPr>
                       </m:sSubPr>
@@ -21613,7 +14376,7 @@
           <a:p>
             <a:fld id="{960A0150-4907-734C-9CE1-D8854326207F}" type="datetime1">
               <a:rPr lang="en-US" smtClean="0"/>
-              <a:t>12/20/2025</a:t>
+              <a:t>8/13/26</a:t>
             </a:fld>
             <a:endParaRPr lang="en-US"/>
           </a:p>
@@ -22194,7 +14957,7 @@
           <a:p>
             <a:fld id="{693596DB-8E50-FA43-87C9-AD88140A0A49}" type="datetime1">
               <a:rPr lang="en-US" smtClean="0"/>
-              <a:t>12/20/2025</a:t>
+              <a:t>8/13/26</a:t>
             </a:fld>
             <a:endParaRPr lang="en-US"/>
           </a:p>
@@ -22507,7 +15270,7 @@
           <a:p>
             <a:fld id="{1E890CA4-D9DB-AD43-9222-03E78BAD59F6}" type="datetime1">
               <a:rPr lang="en-US" smtClean="0"/>
-              <a:t>12/20/2025</a:t>
+              <a:t>8/13/26</a:t>
             </a:fld>
             <a:endParaRPr lang="en-US"/>
           </a:p>
@@ -22590,7 +15353,7 @@
                       <m:sSubPr>
                         <m:ctrlPr>
                           <a:rPr lang="en-US" b="0" i="1" smtClean="0">
-                            <a:latin typeface="Cambria Math" panose="02040503050406030204" pitchFamily="18" charset="0"/>
+                            <a:latin typeface="Cambria Math" charset="0"/>
                           </a:rPr>
                         </m:ctrlPr>
                       </m:sSubPr>
@@ -23052,7 +15815,7 @@
                       <m:sSubPr>
                         <m:ctrlPr>
                           <a:rPr lang="en-US" i="1">
-                            <a:latin typeface="Cambria Math" panose="02040503050406030204" pitchFamily="18" charset="0"/>
+                            <a:latin typeface="Cambria Math" charset="0"/>
                           </a:rPr>
                         </m:ctrlPr>
                       </m:sSubPr>
